--- a/Smart Retail Analytics for Fashion Sales (1).pptx
+++ b/Smart Retail Analytics for Fashion Sales (1).pptx
@@ -20,7 +20,7 @@
     <p:sldId id="278" r:id="rId14"/>
     <p:sldId id="261" r:id="rId15"/>
     <p:sldId id="262" r:id="rId16"/>
-    <p:sldId id="264" r:id="rId17"/>
+    <p:sldId id="282" r:id="rId17"/>
     <p:sldId id="274" r:id="rId18"/>
   </p:sldIdLst>
   <p:sldSz cx="12192000" cy="6858000"/>
@@ -929,7 +929,7 @@
           <a:p>
             <a:fld id="{DF37364F-89AB-4B95-98E5-867F7745783F}" type="datetimeFigureOut">
               <a:rPr lang="en-IN" smtClean="0"/>
-              <a:t>03-02-2026</a:t>
+              <a:t>06-02-2026</a:t>
             </a:fld>
             <a:endParaRPr lang="en-IN"/>
           </a:p>
@@ -1180,7 +1180,7 @@
           <a:p>
             <a:fld id="{DF37364F-89AB-4B95-98E5-867F7745783F}" type="datetimeFigureOut">
               <a:rPr lang="en-IN" smtClean="0"/>
-              <a:t>03-02-2026</a:t>
+              <a:t>06-02-2026</a:t>
             </a:fld>
             <a:endParaRPr lang="en-IN"/>
           </a:p>
@@ -1494,7 +1494,7 @@
           <a:p>
             <a:fld id="{DF37364F-89AB-4B95-98E5-867F7745783F}" type="datetimeFigureOut">
               <a:rPr lang="en-IN" smtClean="0"/>
-              <a:t>03-02-2026</a:t>
+              <a:t>06-02-2026</a:t>
             </a:fld>
             <a:endParaRPr lang="en-IN"/>
           </a:p>
@@ -1827,7 +1827,7 @@
           <a:p>
             <a:fld id="{DF37364F-89AB-4B95-98E5-867F7745783F}" type="datetimeFigureOut">
               <a:rPr lang="en-IN" smtClean="0"/>
-              <a:t>03-02-2026</a:t>
+              <a:t>06-02-2026</a:t>
             </a:fld>
             <a:endParaRPr lang="en-IN"/>
           </a:p>
@@ -2141,7 +2141,7 @@
           <a:p>
             <a:fld id="{DF37364F-89AB-4B95-98E5-867F7745783F}" type="datetimeFigureOut">
               <a:rPr lang="en-IN" smtClean="0"/>
-              <a:t>03-02-2026</a:t>
+              <a:t>06-02-2026</a:t>
             </a:fld>
             <a:endParaRPr lang="en-IN"/>
           </a:p>
@@ -2534,7 +2534,7 @@
           <a:p>
             <a:fld id="{DF37364F-89AB-4B95-98E5-867F7745783F}" type="datetimeFigureOut">
               <a:rPr lang="en-IN" smtClean="0"/>
-              <a:t>03-02-2026</a:t>
+              <a:t>06-02-2026</a:t>
             </a:fld>
             <a:endParaRPr lang="en-IN"/>
           </a:p>
@@ -2704,7 +2704,7 @@
           <a:p>
             <a:fld id="{DF37364F-89AB-4B95-98E5-867F7745783F}" type="datetimeFigureOut">
               <a:rPr lang="en-IN" smtClean="0"/>
-              <a:t>03-02-2026</a:t>
+              <a:t>06-02-2026</a:t>
             </a:fld>
             <a:endParaRPr lang="en-IN"/>
           </a:p>
@@ -2884,7 +2884,7 @@
           <a:p>
             <a:fld id="{DF37364F-89AB-4B95-98E5-867F7745783F}" type="datetimeFigureOut">
               <a:rPr lang="en-IN" smtClean="0"/>
-              <a:t>03-02-2026</a:t>
+              <a:t>06-02-2026</a:t>
             </a:fld>
             <a:endParaRPr lang="en-IN"/>
           </a:p>
@@ -3054,7 +3054,7 @@
           <a:p>
             <a:fld id="{DF37364F-89AB-4B95-98E5-867F7745783F}" type="datetimeFigureOut">
               <a:rPr lang="en-IN" smtClean="0"/>
-              <a:t>03-02-2026</a:t>
+              <a:t>06-02-2026</a:t>
             </a:fld>
             <a:endParaRPr lang="en-IN"/>
           </a:p>
@@ -3301,7 +3301,7 @@
           <a:p>
             <a:fld id="{DF37364F-89AB-4B95-98E5-867F7745783F}" type="datetimeFigureOut">
               <a:rPr lang="en-IN" smtClean="0"/>
-              <a:t>03-02-2026</a:t>
+              <a:t>06-02-2026</a:t>
             </a:fld>
             <a:endParaRPr lang="en-IN"/>
           </a:p>
@@ -3533,7 +3533,7 @@
           <a:p>
             <a:fld id="{DF37364F-89AB-4B95-98E5-867F7745783F}" type="datetimeFigureOut">
               <a:rPr lang="en-IN" smtClean="0"/>
-              <a:t>03-02-2026</a:t>
+              <a:t>06-02-2026</a:t>
             </a:fld>
             <a:endParaRPr lang="en-IN"/>
           </a:p>
@@ -3907,7 +3907,7 @@
           <a:p>
             <a:fld id="{DF37364F-89AB-4B95-98E5-867F7745783F}" type="datetimeFigureOut">
               <a:rPr lang="en-IN" smtClean="0"/>
-              <a:t>03-02-2026</a:t>
+              <a:t>06-02-2026</a:t>
             </a:fld>
             <a:endParaRPr lang="en-IN"/>
           </a:p>
@@ -4030,7 +4030,7 @@
           <a:p>
             <a:fld id="{DF37364F-89AB-4B95-98E5-867F7745783F}" type="datetimeFigureOut">
               <a:rPr lang="en-IN" smtClean="0"/>
-              <a:t>03-02-2026</a:t>
+              <a:t>06-02-2026</a:t>
             </a:fld>
             <a:endParaRPr lang="en-IN"/>
           </a:p>
@@ -4125,7 +4125,7 @@
           <a:p>
             <a:fld id="{DF37364F-89AB-4B95-98E5-867F7745783F}" type="datetimeFigureOut">
               <a:rPr lang="en-IN" smtClean="0"/>
-              <a:t>03-02-2026</a:t>
+              <a:t>06-02-2026</a:t>
             </a:fld>
             <a:endParaRPr lang="en-IN"/>
           </a:p>
@@ -4380,7 +4380,7 @@
           <a:p>
             <a:fld id="{DF37364F-89AB-4B95-98E5-867F7745783F}" type="datetimeFigureOut">
               <a:rPr lang="en-IN" smtClean="0"/>
-              <a:t>03-02-2026</a:t>
+              <a:t>06-02-2026</a:t>
             </a:fld>
             <a:endParaRPr lang="en-IN"/>
           </a:p>
@@ -4685,7 +4685,7 @@
           <a:p>
             <a:fld id="{DF37364F-89AB-4B95-98E5-867F7745783F}" type="datetimeFigureOut">
               <a:rPr lang="en-IN" smtClean="0"/>
-              <a:t>03-02-2026</a:t>
+              <a:t>06-02-2026</a:t>
             </a:fld>
             <a:endParaRPr lang="en-IN"/>
           </a:p>
@@ -5443,7 +5443,7 @@
           <a:p>
             <a:fld id="{DF37364F-89AB-4B95-98E5-867F7745783F}" type="datetimeFigureOut">
               <a:rPr lang="en-IN" smtClean="0"/>
-              <a:t>03-02-2026</a:t>
+              <a:t>06-02-2026</a:t>
             </a:fld>
             <a:endParaRPr lang="en-IN"/>
           </a:p>
@@ -6029,7 +6029,7 @@
         <p:spPr>
           <a:xfrm>
             <a:off x="5872047" y="4826775"/>
-            <a:ext cx="5198724" cy="707886"/>
+            <a:ext cx="5198724" cy="1015663"/>
           </a:xfrm>
           <a:prstGeom prst="rect">
             <a:avLst/>
@@ -6058,6 +6058,8 @@
               </a:rPr>
               <a:t>Mentor : PANKAJ DOUNDEY</a:t>
             </a:r>
+          </a:p>
+          <a:p>
             <a:endParaRPr lang="en-IN" sz="2000" b="1" dirty="0">
               <a:latin typeface="Times New Roman" panose="02020603050405020304" pitchFamily="18" charset="0"/>
               <a:cs typeface="Times New Roman" panose="02020603050405020304" pitchFamily="18" charset="0"/>
@@ -7513,7 +7515,7 @@
         <p:cNvPr id="1" name="">
           <a:extLst>
             <a:ext uri="{FF2B5EF4-FFF2-40B4-BE49-F238E27FC236}">
-              <a16:creationId xmlns:a16="http://schemas.microsoft.com/office/drawing/2014/main" id="{CD6D0018-499B-5431-D927-CADADA02EA4C}"/>
+              <a16:creationId xmlns:a16="http://schemas.microsoft.com/office/drawing/2014/main" id="{62D3112B-FFA8-D0A3-E32B-BD52A24A0200}"/>
             </a:ext>
           </a:extLst>
         </p:cNvPr>
@@ -7533,7 +7535,7 @@
           <p:cNvPr id="2" name="Title 1">
             <a:extLst>
               <a:ext uri="{FF2B5EF4-FFF2-40B4-BE49-F238E27FC236}">
-                <a16:creationId xmlns:a16="http://schemas.microsoft.com/office/drawing/2014/main" id="{22D36BC8-B096-74EB-C4B5-C01FF5B01823}"/>
+                <a16:creationId xmlns:a16="http://schemas.microsoft.com/office/drawing/2014/main" id="{48611448-55E7-0519-2C42-4DB347562B12}"/>
               </a:ext>
             </a:extLst>
           </p:cNvPr>
@@ -7544,12 +7546,19 @@
             <p:ph type="title"/>
           </p:nvPr>
         </p:nvSpPr>
-        <p:spPr/>
-        <p:txBody>
-          <a:bodyPr/>
+        <p:spPr>
+          <a:xfrm>
+            <a:off x="646512" y="709078"/>
+            <a:ext cx="8596668" cy="1320800"/>
+          </a:xfrm>
+        </p:spPr>
+        <p:txBody>
+          <a:bodyPr>
+            <a:normAutofit fontScale="90000"/>
+          </a:bodyPr>
           <a:lstStyle/>
           <a:p>
-            <a:pPr algn="just"/>
+            <a:pPr algn="ctr"/>
             <a:r>
               <a:rPr lang="en-US" b="1" dirty="0">
                 <a:solidFill>
@@ -7558,8 +7567,24 @@
                 <a:latin typeface="Times New Roman" panose="02020603050405020304" pitchFamily="18" charset="0"/>
                 <a:cs typeface="Times New Roman" panose="02020603050405020304" pitchFamily="18" charset="0"/>
               </a:rPr>
-              <a:t>                                 Dataset</a:t>
-            </a:r>
+              <a:t>                </a:t>
+            </a:r>
+            <a:r>
+              <a:rPr lang="en-IN" b="1" dirty="0">
+                <a:solidFill>
+                  <a:schemeClr val="tx1"/>
+                </a:solidFill>
+                <a:latin typeface="Times New Roman" panose="02020603050405020304" pitchFamily="18" charset="0"/>
+                <a:cs typeface="Times New Roman" panose="02020603050405020304" pitchFamily="18" charset="0"/>
+              </a:rPr>
+              <a:t>Business Impact &amp; Value Delivered</a:t>
+            </a:r>
+            <a:br>
+              <a:rPr lang="en-US" b="1" dirty="0">
+                <a:latin typeface="Times New Roman" panose="02020603050405020304" pitchFamily="18" charset="0"/>
+                <a:cs typeface="Times New Roman" panose="02020603050405020304" pitchFamily="18" charset="0"/>
+              </a:rPr>
+            </a:br>
             <a:endParaRPr lang="en-IN" b="1" dirty="0">
               <a:solidFill>
                 <a:schemeClr val="tx1"/>
@@ -7572,87 +7597,236 @@
       </p:sp>
       <p:sp>
         <p:nvSpPr>
-          <p:cNvPr id="6" name="TextBox 5">
+          <p:cNvPr id="4" name="Rectangle 1">
             <a:extLst>
               <a:ext uri="{FF2B5EF4-FFF2-40B4-BE49-F238E27FC236}">
-                <a16:creationId xmlns:a16="http://schemas.microsoft.com/office/drawing/2014/main" id="{F928174C-08FE-ED97-440F-132E446C8BFC}"/>
+                <a16:creationId xmlns:a16="http://schemas.microsoft.com/office/drawing/2014/main" id="{88EAE399-D5BF-615B-9B4C-C1E0D3DDAFE9}"/>
               </a:ext>
             </a:extLst>
           </p:cNvPr>
-          <p:cNvSpPr txBox="1"/>
-          <p:nvPr/>
-        </p:nvSpPr>
-        <p:spPr>
+          <p:cNvSpPr>
+            <a:spLocks noGrp="1" noChangeArrowheads="1"/>
+          </p:cNvSpPr>
+          <p:nvPr>
+            <p:ph idx="1"/>
+          </p:nvPr>
+        </p:nvSpPr>
+        <p:spPr bwMode="auto">
           <a:xfrm>
-            <a:off x="3386667" y="1464733"/>
-            <a:ext cx="3716866" cy="400110"/>
+            <a:off x="986319" y="2029878"/>
+            <a:ext cx="9325999" cy="3246530"/>
           </a:xfrm>
           <a:prstGeom prst="rect">
             <a:avLst/>
           </a:prstGeom>
           <a:noFill/>
+          <a:ln>
+            <a:noFill/>
+          </a:ln>
+          <a:effectLst/>
+          <a:extLst>
+            <a:ext uri="{909E8E84-426E-40DD-AFC4-6F175D3DCCD1}">
+              <a14:hiddenFill xmlns:a14="http://schemas.microsoft.com/office/drawing/2010/main">
+                <a:solidFill>
+                  <a:schemeClr val="accent1"/>
+                </a:solidFill>
+              </a14:hiddenFill>
+            </a:ext>
+            <a:ext uri="{91240B29-F687-4F45-9708-019B960494DF}">
+              <a14:hiddenLine xmlns:a14="http://schemas.microsoft.com/office/drawing/2010/main" w="9525">
+                <a:solidFill>
+                  <a:schemeClr val="tx1"/>
+                </a:solidFill>
+                <a:miter lim="800000"/>
+                <a:headEnd/>
+                <a:tailEnd/>
+              </a14:hiddenLine>
+            </a:ext>
+            <a:ext uri="{AF507438-7753-43E0-B8FC-AC1667EBCBE1}">
+              <a14:hiddenEffects xmlns:a14="http://schemas.microsoft.com/office/drawing/2010/main">
+                <a:effectLst>
+                  <a:outerShdw dist="35921" dir="2700000" algn="ctr" rotWithShape="0">
+                    <a:schemeClr val="bg2"/>
+                  </a:outerShdw>
+                </a:effectLst>
+              </a14:hiddenEffects>
+            </a:ext>
+          </a:extLst>
         </p:spPr>
         <p:txBody>
-          <a:bodyPr wrap="square" rtlCol="0">
+          <a:bodyPr vert="horz" wrap="square" lIns="91440" tIns="45720" rIns="91440" bIns="45720" numCol="1" anchor="ctr" anchorCtr="0" compatLnSpc="1">
+            <a:prstTxWarp prst="textNoShape">
+              <a:avLst/>
+            </a:prstTxWarp>
             <a:spAutoFit/>
           </a:bodyPr>
           <a:lstStyle/>
           <a:p>
-            <a:r>
-              <a:rPr lang="en-US" sz="2000" dirty="0">
+            <a:pPr marR="0" lvl="0" algn="l" defTabSz="914400" rtl="0" eaLnBrk="0" fontAlgn="base" latinLnBrk="0" hangingPunct="0">
+              <a:lnSpc>
+                <a:spcPct val="150000"/>
+              </a:lnSpc>
+              <a:spcBef>
+                <a:spcPct val="0"/>
+              </a:spcBef>
+              <a:spcAft>
+                <a:spcPct val="0"/>
+              </a:spcAft>
+              <a:buClrTx/>
+              <a:buSzTx/>
+              <a:buFont typeface="Wingdings" panose="05000000000000000000" pitchFamily="2" charset="2"/>
+              <a:buChar char="Ø"/>
+              <a:tabLst/>
+            </a:pPr>
+            <a:r>
+              <a:rPr kumimoji="0" lang="en-US" altLang="en-US" sz="2800" b="0" i="0" u="none" strike="noStrike" cap="none" normalizeH="0" baseline="0" dirty="0">
+                <a:ln>
+                  <a:noFill/>
+                </a:ln>
+                <a:solidFill>
+                  <a:schemeClr val="tx1"/>
+                </a:solidFill>
+                <a:effectLst/>
                 <a:latin typeface="Times New Roman" panose="02020603050405020304" pitchFamily="18" charset="0"/>
                 <a:cs typeface="Times New Roman" panose="02020603050405020304" pitchFamily="18" charset="0"/>
               </a:rPr>
-              <a:t>                 </a:t>
-            </a:r>
-            <a:r>
-              <a:rPr lang="en-US" sz="2000" dirty="0" err="1">
+              <a:t>Faster and automated sales reporting</a:t>
+            </a:r>
+          </a:p>
+          <a:p>
+            <a:pPr marR="0" lvl="0" algn="l" defTabSz="914400" rtl="0" eaLnBrk="0" fontAlgn="base" latinLnBrk="0" hangingPunct="0">
+              <a:lnSpc>
+                <a:spcPct val="150000"/>
+              </a:lnSpc>
+              <a:spcBef>
+                <a:spcPct val="0"/>
+              </a:spcBef>
+              <a:spcAft>
+                <a:spcPct val="0"/>
+              </a:spcAft>
+              <a:buClrTx/>
+              <a:buSzTx/>
+              <a:buFont typeface="Wingdings" panose="05000000000000000000" pitchFamily="2" charset="2"/>
+              <a:buChar char="Ø"/>
+              <a:tabLst/>
+            </a:pPr>
+            <a:r>
+              <a:rPr kumimoji="0" lang="en-US" altLang="en-US" sz="2800" b="0" i="0" u="none" strike="noStrike" cap="none" normalizeH="0" baseline="0" dirty="0">
+                <a:ln>
+                  <a:noFill/>
+                </a:ln>
+                <a:solidFill>
+                  <a:schemeClr val="tx1"/>
+                </a:solidFill>
+                <a:effectLst/>
                 <a:latin typeface="Times New Roman" panose="02020603050405020304" pitchFamily="18" charset="0"/>
                 <a:cs typeface="Times New Roman" panose="02020603050405020304" pitchFamily="18" charset="0"/>
               </a:rPr>
-              <a:t>Fact_Sales</a:t>
-            </a:r>
-            <a:endParaRPr lang="en-IN" sz="2000" dirty="0">
-              <a:latin typeface="Times New Roman" panose="02020603050405020304" pitchFamily="18" charset="0"/>
-              <a:cs typeface="Times New Roman" panose="02020603050405020304" pitchFamily="18" charset="0"/>
-            </a:endParaRPr>
-          </a:p>
-        </p:txBody>
-      </p:sp>
-      <p:pic>
-        <p:nvPicPr>
-          <p:cNvPr id="9" name="Picture 8">
-            <a:extLst>
-              <a:ext uri="{FF2B5EF4-FFF2-40B4-BE49-F238E27FC236}">
-                <a16:creationId xmlns:a16="http://schemas.microsoft.com/office/drawing/2014/main" id="{1B7C9183-CC52-7A87-9A28-B05217F0A0F5}"/>
-              </a:ext>
-            </a:extLst>
-          </p:cNvPr>
-          <p:cNvPicPr>
-            <a:picLocks noChangeAspect="1"/>
-          </p:cNvPicPr>
-          <p:nvPr/>
-        </p:nvPicPr>
-        <p:blipFill>
-          <a:blip r:embed="rId2"/>
-          <a:stretch>
-            <a:fillRect/>
-          </a:stretch>
-        </p:blipFill>
-        <p:spPr>
-          <a:xfrm>
-            <a:off x="1058237" y="2234063"/>
-            <a:ext cx="9623461" cy="3499482"/>
-          </a:xfrm>
-          <a:prstGeom prst="rect">
-            <a:avLst/>
-          </a:prstGeom>
-        </p:spPr>
-      </p:pic>
+              <a:t>Improved inventory planning and reduced stockouts</a:t>
+            </a:r>
+          </a:p>
+          <a:p>
+            <a:pPr marR="0" lvl="0" algn="l" defTabSz="914400" rtl="0" eaLnBrk="0" fontAlgn="base" latinLnBrk="0" hangingPunct="0">
+              <a:lnSpc>
+                <a:spcPct val="150000"/>
+              </a:lnSpc>
+              <a:spcBef>
+                <a:spcPct val="0"/>
+              </a:spcBef>
+              <a:spcAft>
+                <a:spcPct val="0"/>
+              </a:spcAft>
+              <a:buClrTx/>
+              <a:buSzTx/>
+              <a:buFont typeface="Wingdings" panose="05000000000000000000" pitchFamily="2" charset="2"/>
+              <a:buChar char="Ø"/>
+              <a:tabLst/>
+            </a:pPr>
+            <a:r>
+              <a:rPr kumimoji="0" lang="en-US" altLang="en-US" sz="2800" b="0" i="0" u="none" strike="noStrike" cap="none" normalizeH="0" baseline="0" dirty="0">
+                <a:ln>
+                  <a:noFill/>
+                </a:ln>
+                <a:solidFill>
+                  <a:schemeClr val="tx1"/>
+                </a:solidFill>
+                <a:effectLst/>
+                <a:latin typeface="Times New Roman" panose="02020603050405020304" pitchFamily="18" charset="0"/>
+                <a:cs typeface="Times New Roman" panose="02020603050405020304" pitchFamily="18" charset="0"/>
+              </a:rPr>
+              <a:t>Better understanding of customer buying behavior</a:t>
+            </a:r>
+          </a:p>
+          <a:p>
+            <a:pPr marR="0" lvl="0" algn="l" defTabSz="914400" rtl="0" eaLnBrk="0" fontAlgn="base" latinLnBrk="0" hangingPunct="0">
+              <a:lnSpc>
+                <a:spcPct val="150000"/>
+              </a:lnSpc>
+              <a:spcBef>
+                <a:spcPct val="0"/>
+              </a:spcBef>
+              <a:spcAft>
+                <a:spcPct val="0"/>
+              </a:spcAft>
+              <a:buClrTx/>
+              <a:buSzTx/>
+              <a:buFont typeface="Wingdings" panose="05000000000000000000" pitchFamily="2" charset="2"/>
+              <a:buChar char="Ø"/>
+              <a:tabLst/>
+            </a:pPr>
+            <a:r>
+              <a:rPr kumimoji="0" lang="en-US" altLang="en-US" sz="2800" b="0" i="0" u="none" strike="noStrike" cap="none" normalizeH="0" baseline="0" dirty="0">
+                <a:ln>
+                  <a:noFill/>
+                </a:ln>
+                <a:solidFill>
+                  <a:schemeClr val="tx1"/>
+                </a:solidFill>
+                <a:effectLst/>
+                <a:latin typeface="Times New Roman" panose="02020603050405020304" pitchFamily="18" charset="0"/>
+                <a:cs typeface="Times New Roman" panose="02020603050405020304" pitchFamily="18" charset="0"/>
+              </a:rPr>
+              <a:t>Store and employee performance visibility</a:t>
+            </a:r>
+          </a:p>
+          <a:p>
+            <a:pPr marR="0" lvl="0" algn="l" defTabSz="914400" rtl="0" eaLnBrk="0" fontAlgn="base" latinLnBrk="0" hangingPunct="0">
+              <a:lnSpc>
+                <a:spcPct val="150000"/>
+              </a:lnSpc>
+              <a:spcBef>
+                <a:spcPct val="0"/>
+              </a:spcBef>
+              <a:spcAft>
+                <a:spcPct val="0"/>
+              </a:spcAft>
+              <a:buClrTx/>
+              <a:buSzTx/>
+              <a:buFont typeface="Wingdings" panose="05000000000000000000" pitchFamily="2" charset="2"/>
+              <a:buChar char="Ø"/>
+              <a:tabLst/>
+            </a:pPr>
+            <a:r>
+              <a:rPr kumimoji="0" lang="en-US" altLang="en-US" sz="2800" b="0" i="0" u="none" strike="noStrike" cap="none" normalizeH="0" baseline="0" dirty="0">
+                <a:ln>
+                  <a:noFill/>
+                </a:ln>
+                <a:solidFill>
+                  <a:schemeClr val="tx1"/>
+                </a:solidFill>
+                <a:effectLst/>
+                <a:latin typeface="Times New Roman" panose="02020603050405020304" pitchFamily="18" charset="0"/>
+                <a:cs typeface="Times New Roman" panose="02020603050405020304" pitchFamily="18" charset="0"/>
+              </a:rPr>
+              <a:t>Data-driven decision-making instead of manual analysis</a:t>
+            </a:r>
+          </a:p>
+        </p:txBody>
+      </p:sp>
     </p:spTree>
     <p:extLst>
       <p:ext uri="{BB962C8B-B14F-4D97-AF65-F5344CB8AC3E}">
-        <p14:creationId xmlns:p14="http://schemas.microsoft.com/office/powerpoint/2010/main" val="2544861665"/>
+        <p14:creationId xmlns:p14="http://schemas.microsoft.com/office/powerpoint/2010/main" val="1023275352"/>
       </p:ext>
     </p:extLst>
   </p:cSld>
@@ -8033,41 +8207,144 @@
         </p:nvSpPr>
         <p:spPr>
           <a:xfrm>
-            <a:off x="677334" y="1613043"/>
-            <a:ext cx="10264644" cy="4428319"/>
+            <a:off x="677333" y="1613043"/>
+            <a:ext cx="10870819" cy="4859676"/>
           </a:xfrm>
         </p:spPr>
         <p:txBody>
           <a:bodyPr>
-            <a:normAutofit fontScale="92500" lnSpcReduction="10000"/>
+            <a:normAutofit lnSpcReduction="10000"/>
           </a:bodyPr>
           <a:lstStyle/>
           <a:p>
-            <a:pPr>
-              <a:lnSpc>
-                <a:spcPct val="160000"/>
-              </a:lnSpc>
+            <a:pPr marL="0" indent="0">
+              <a:buNone/>
             </a:pPr>
+            <a:r>
+              <a:rPr lang="en-US" sz="2600" dirty="0">
+                <a:latin typeface="Times New Roman" panose="02020603050405020304" pitchFamily="18" charset="0"/>
+                <a:cs typeface="Times New Roman" panose="02020603050405020304" pitchFamily="18" charset="0"/>
+              </a:rPr>
+              <a:t>Offline fashion retailers like </a:t>
+            </a:r>
+            <a:r>
+              <a:rPr lang="en-US" sz="2600" b="1" dirty="0" err="1">
+                <a:latin typeface="Times New Roman" panose="02020603050405020304" pitchFamily="18" charset="0"/>
+                <a:cs typeface="Times New Roman" panose="02020603050405020304" pitchFamily="18" charset="0"/>
+              </a:rPr>
+              <a:t>Fabindia</a:t>
+            </a:r>
+            <a:r>
+              <a:rPr lang="en-US" sz="2600" b="1" dirty="0">
+                <a:latin typeface="Times New Roman" panose="02020603050405020304" pitchFamily="18" charset="0"/>
+                <a:cs typeface="Times New Roman" panose="02020603050405020304" pitchFamily="18" charset="0"/>
+              </a:rPr>
+              <a:t>-style stores</a:t>
+            </a:r>
+            <a:r>
+              <a:rPr lang="en-US" sz="2600" dirty="0">
+                <a:latin typeface="Times New Roman" panose="02020603050405020304" pitchFamily="18" charset="0"/>
+                <a:cs typeface="Times New Roman" panose="02020603050405020304" pitchFamily="18" charset="0"/>
+              </a:rPr>
+              <a:t> operate through physical outlets and rely heavily on:</a:t>
+            </a:r>
+          </a:p>
+          <a:p>
+            <a:pPr lvl="1"/>
             <a:r>
               <a:rPr lang="en-US" sz="2400" dirty="0">
                 <a:latin typeface="Times New Roman" panose="02020603050405020304" pitchFamily="18" charset="0"/>
                 <a:cs typeface="Times New Roman" panose="02020603050405020304" pitchFamily="18" charset="0"/>
               </a:rPr>
-              <a:t>A large offline fashion retail shop generates high volumes of POS and operational data across multiple stores but lacks a centralized analytics platform. As a result, data remains fragmented and manually processed, leading to poor visibility into sales performance, inventory levels, seasonal trends, and customer preferences.</a:t>
-            </a:r>
-          </a:p>
-          <a:p>
-            <a:pPr>
-              <a:lnSpc>
-                <a:spcPct val="160000"/>
-              </a:lnSpc>
-            </a:pPr>
+              <a:t>POS billing systems</a:t>
+            </a:r>
+          </a:p>
+          <a:p>
+            <a:pPr lvl="1"/>
             <a:r>
               <a:rPr lang="en-US" sz="2400" dirty="0">
                 <a:latin typeface="Times New Roman" panose="02020603050405020304" pitchFamily="18" charset="0"/>
                 <a:cs typeface="Times New Roman" panose="02020603050405020304" pitchFamily="18" charset="0"/>
               </a:rPr>
-              <a:t>This inefficiency causes stock imbalances, delayed performance evaluation, revenue loss, and missed data-driven opportunities. A scalable data engineering and analytics solution is required to transform raw POS data into actionable insights for informed decision-making and business growth.</a:t>
+              <a:t>Manual inventory tracking</a:t>
+            </a:r>
+          </a:p>
+          <a:p>
+            <a:pPr lvl="1"/>
+            <a:r>
+              <a:rPr lang="en-US" sz="2400" dirty="0">
+                <a:latin typeface="Times New Roman" panose="02020603050405020304" pitchFamily="18" charset="0"/>
+                <a:cs typeface="Times New Roman" panose="02020603050405020304" pitchFamily="18" charset="0"/>
+              </a:rPr>
+              <a:t>Periodic Excel-based reports</a:t>
+            </a:r>
+          </a:p>
+          <a:p>
+            <a:pPr marL="0" indent="0">
+              <a:buNone/>
+            </a:pPr>
+            <a:r>
+              <a:rPr lang="en-US" sz="2600" dirty="0">
+                <a:latin typeface="Times New Roman" panose="02020603050405020304" pitchFamily="18" charset="0"/>
+                <a:cs typeface="Times New Roman" panose="02020603050405020304" pitchFamily="18" charset="0"/>
+              </a:rPr>
+              <a:t>Unlike e-commerce, offline stores </a:t>
+            </a:r>
+            <a:r>
+              <a:rPr lang="en-US" sz="2600" b="1" dirty="0">
+                <a:latin typeface="Times New Roman" panose="02020603050405020304" pitchFamily="18" charset="0"/>
+                <a:cs typeface="Times New Roman" panose="02020603050405020304" pitchFamily="18" charset="0"/>
+              </a:rPr>
+              <a:t>lack real-time visibility</a:t>
+            </a:r>
+            <a:r>
+              <a:rPr lang="en-US" sz="2600" dirty="0">
+                <a:latin typeface="Times New Roman" panose="02020603050405020304" pitchFamily="18" charset="0"/>
+                <a:cs typeface="Times New Roman" panose="02020603050405020304" pitchFamily="18" charset="0"/>
+              </a:rPr>
+              <a:t> into:</a:t>
+            </a:r>
+          </a:p>
+          <a:p>
+            <a:pPr lvl="1"/>
+            <a:r>
+              <a:rPr lang="en-US" sz="2400" dirty="0">
+                <a:latin typeface="Times New Roman" panose="02020603050405020304" pitchFamily="18" charset="0"/>
+                <a:cs typeface="Times New Roman" panose="02020603050405020304" pitchFamily="18" charset="0"/>
+              </a:rPr>
+              <a:t>What is selling fast</a:t>
+            </a:r>
+          </a:p>
+          <a:p>
+            <a:pPr lvl="1"/>
+            <a:r>
+              <a:rPr lang="en-US" sz="2400" dirty="0">
+                <a:latin typeface="Times New Roman" panose="02020603050405020304" pitchFamily="18" charset="0"/>
+                <a:cs typeface="Times New Roman" panose="02020603050405020304" pitchFamily="18" charset="0"/>
+              </a:rPr>
+              <a:t>Which sizes/colors are failing</a:t>
+            </a:r>
+          </a:p>
+          <a:p>
+            <a:pPr lvl="1"/>
+            <a:r>
+              <a:rPr lang="en-US" sz="2400" dirty="0">
+                <a:latin typeface="Times New Roman" panose="02020603050405020304" pitchFamily="18" charset="0"/>
+                <a:cs typeface="Times New Roman" panose="02020603050405020304" pitchFamily="18" charset="0"/>
+              </a:rPr>
+              <a:t>Which store or employee performs better</a:t>
+            </a:r>
+          </a:p>
+          <a:p>
+            <a:pPr marL="0" indent="0">
+              <a:buNone/>
+            </a:pPr>
+            <a:r>
+              <a:rPr lang="en-US" sz="2600" dirty="0">
+                <a:latin typeface="Times New Roman" panose="02020603050405020304" pitchFamily="18" charset="0"/>
+                <a:cs typeface="Times New Roman" panose="02020603050405020304" pitchFamily="18" charset="0"/>
+              </a:rPr>
+              <a:t>Most decisions are based on experience, not data.</a:t>
             </a:r>
           </a:p>
           <a:p>
@@ -8206,7 +8483,21 @@
                 <a:latin typeface="Times New Roman" panose="02020603050405020304" pitchFamily="18" charset="0"/>
                 <a:cs typeface="Times New Roman" panose="02020603050405020304" pitchFamily="18" charset="0"/>
               </a:rPr>
-              <a:t>The focus of this project is to design and implement a scalable data engineering and analytics solution for a large offline fashion retailer. The project emphasizes integrating raw POS and operational data from multiple physical stores into a centralized data warehouse.</a:t>
+              <a:t>The focus of this project is to design and implement a scalable data engineering and analytics solution for a </a:t>
+            </a:r>
+            <a:r>
+              <a:rPr lang="en-US" sz="2400" dirty="0" err="1">
+                <a:latin typeface="Times New Roman" panose="02020603050405020304" pitchFamily="18" charset="0"/>
+                <a:cs typeface="Times New Roman" panose="02020603050405020304" pitchFamily="18" charset="0"/>
+              </a:rPr>
+              <a:t>fabindia</a:t>
+            </a:r>
+            <a:r>
+              <a:rPr lang="en-US" sz="2400" dirty="0">
+                <a:latin typeface="Times New Roman" panose="02020603050405020304" pitchFamily="18" charset="0"/>
+                <a:cs typeface="Times New Roman" panose="02020603050405020304" pitchFamily="18" charset="0"/>
+              </a:rPr>
+              <a:t> fashion retailer. The project emphasizes integrating raw POS and operational data from multiple physical stores into a centralized data warehouse.</a:t>
             </a:r>
           </a:p>
           <a:p>
@@ -8579,8 +8870,8 @@
         </p:nvSpPr>
         <p:spPr>
           <a:xfrm>
-            <a:off x="686276" y="1799533"/>
-            <a:ext cx="10819448" cy="4428319"/>
+            <a:off x="871210" y="2570095"/>
+            <a:ext cx="10819448" cy="1632035"/>
           </a:xfrm>
         </p:spPr>
         <p:txBody>
@@ -8594,75 +8885,12 @@
               <a:buChar char="Ø"/>
             </a:pPr>
             <a:r>
-              <a:rPr lang="en-IN" sz="3200" dirty="0">
+              <a:rPr lang="en-US" sz="2800" dirty="0">
                 <a:latin typeface="Times New Roman" panose="02020603050405020304" pitchFamily="18" charset="0"/>
                 <a:cs typeface="Times New Roman" panose="02020603050405020304" pitchFamily="18" charset="0"/>
               </a:rPr>
-              <a:t>Point-of-Sale (POS) Transactions</a:t>
-            </a:r>
-          </a:p>
-          <a:p>
-            <a:pPr>
-              <a:buFont typeface="Wingdings" panose="05000000000000000000" pitchFamily="2" charset="2"/>
-              <a:buChar char="Ø"/>
-            </a:pPr>
-            <a:r>
-              <a:rPr lang="en-IN" sz="3200" dirty="0">
-                <a:latin typeface="Times New Roman" panose="02020603050405020304" pitchFamily="18" charset="0"/>
-                <a:cs typeface="Times New Roman" panose="02020603050405020304" pitchFamily="18" charset="0"/>
-              </a:rPr>
-              <a:t>Inventory Updates</a:t>
-            </a:r>
-          </a:p>
-          <a:p>
-            <a:pPr>
-              <a:buFont typeface="Wingdings" panose="05000000000000000000" pitchFamily="2" charset="2"/>
-              <a:buChar char="Ø"/>
-            </a:pPr>
-            <a:r>
-              <a:rPr lang="en-IN" sz="3200" dirty="0">
-                <a:latin typeface="Times New Roman" panose="02020603050405020304" pitchFamily="18" charset="0"/>
-                <a:cs typeface="Times New Roman" panose="02020603050405020304" pitchFamily="18" charset="0"/>
-              </a:rPr>
-              <a:t>Product &amp; Supplier Records</a:t>
-            </a:r>
-          </a:p>
-          <a:p>
-            <a:r>
-              <a:rPr lang="en-US" sz="3200" dirty="0">
-                <a:latin typeface="Times New Roman" panose="02020603050405020304" pitchFamily="18" charset="0"/>
-                <a:cs typeface="Times New Roman" panose="02020603050405020304" pitchFamily="18" charset="0"/>
-              </a:rPr>
-              <a:t>Customer Information</a:t>
-            </a:r>
-          </a:p>
-          <a:p>
-            <a:r>
-              <a:rPr lang="en-IN" sz="3200" dirty="0">
-                <a:latin typeface="Times New Roman" panose="02020603050405020304" pitchFamily="18" charset="0"/>
-                <a:cs typeface="Times New Roman" panose="02020603050405020304" pitchFamily="18" charset="0"/>
-              </a:rPr>
-              <a:t>Employee &amp; Store Data</a:t>
-            </a:r>
-          </a:p>
-          <a:p>
-            <a:r>
-              <a:rPr lang="en-IN" sz="3200" dirty="0">
-                <a:latin typeface="Times New Roman" panose="02020603050405020304" pitchFamily="18" charset="0"/>
-                <a:cs typeface="Times New Roman" panose="02020603050405020304" pitchFamily="18" charset="0"/>
-              </a:rPr>
-              <a:t>Promotion &amp; Discount Data</a:t>
-            </a:r>
-            <a:endParaRPr lang="en-US" sz="3200" dirty="0">
-              <a:latin typeface="Times New Roman" panose="02020603050405020304" pitchFamily="18" charset="0"/>
-              <a:cs typeface="Times New Roman" panose="02020603050405020304" pitchFamily="18" charset="0"/>
-            </a:endParaRPr>
-          </a:p>
-          <a:p>
-            <a:pPr>
-              <a:buFont typeface="Wingdings" panose="05000000000000000000" pitchFamily="2" charset="2"/>
-              <a:buChar char="Ø"/>
-            </a:pPr>
+              <a:t>Data is generated daily from POS billing systems, inventory updates, customer interactions, and promotional activities across multiple offline stores.</a:t>
+            </a:r>
             <a:endParaRPr lang="en-IN" sz="2800" b="1" dirty="0">
               <a:latin typeface="Times New Roman" panose="02020603050405020304" pitchFamily="18" charset="0"/>
               <a:cs typeface="Times New Roman" panose="02020603050405020304" pitchFamily="18" charset="0"/>
@@ -8782,7 +9010,7 @@
         </p:blipFill>
         <p:spPr>
           <a:xfrm>
-            <a:off x="267553" y="1109365"/>
+            <a:off x="267553" y="1147881"/>
             <a:ext cx="2193505" cy="1752845"/>
           </a:xfrm>
           <a:prstGeom prst="rect">
@@ -9241,7 +9469,7 @@
         </p:nvCxnSpPr>
         <p:spPr>
           <a:xfrm>
-            <a:off x="1364306" y="2862210"/>
+            <a:off x="1364306" y="2900726"/>
             <a:ext cx="0" cy="421018"/>
           </a:xfrm>
           <a:prstGeom prst="line">
@@ -9328,7 +9556,7 @@
         <p:spPr>
           <a:xfrm>
             <a:off x="503434" y="3626778"/>
-            <a:ext cx="1632141" cy="369332"/>
+            <a:ext cx="1849347" cy="646331"/>
           </a:xfrm>
           <a:prstGeom prst="rect">
             <a:avLst/>
@@ -9346,7 +9574,21 @@
                 <a:latin typeface="Times New Roman" panose="02020603050405020304" pitchFamily="18" charset="0"/>
                 <a:cs typeface="Times New Roman" panose="02020603050405020304" pitchFamily="18" charset="0"/>
               </a:rPr>
-              <a:t>Offline Store</a:t>
+              <a:t>      </a:t>
+            </a:r>
+            <a:r>
+              <a:rPr lang="en-US" b="1" dirty="0" err="1">
+                <a:latin typeface="Times New Roman" panose="02020603050405020304" pitchFamily="18" charset="0"/>
+                <a:cs typeface="Times New Roman" panose="02020603050405020304" pitchFamily="18" charset="0"/>
+              </a:rPr>
+              <a:t>FabIndia</a:t>
+            </a:r>
+            <a:r>
+              <a:rPr lang="en-US" b="1" dirty="0">
+                <a:latin typeface="Times New Roman" panose="02020603050405020304" pitchFamily="18" charset="0"/>
+                <a:cs typeface="Times New Roman" panose="02020603050405020304" pitchFamily="18" charset="0"/>
+              </a:rPr>
+              <a:t>    Fashion Store</a:t>
             </a:r>
             <a:endParaRPr lang="en-IN" b="1" dirty="0">
               <a:latin typeface="Times New Roman" panose="02020603050405020304" pitchFamily="18" charset="0"/>

--- a/Smart Retail Analytics for Fashion Sales (1).pptx
+++ b/Smart Retail Analytics for Fashion Sales (1).pptx
@@ -10,18 +10,35 @@
     <p:sldId id="257" r:id="rId4"/>
     <p:sldId id="279" r:id="rId5"/>
     <p:sldId id="280" r:id="rId6"/>
-    <p:sldId id="281" r:id="rId7"/>
-    <p:sldId id="259" r:id="rId8"/>
-    <p:sldId id="258" r:id="rId9"/>
-    <p:sldId id="260" r:id="rId10"/>
-    <p:sldId id="273" r:id="rId11"/>
+    <p:sldId id="259" r:id="rId7"/>
+    <p:sldId id="258" r:id="rId8"/>
+    <p:sldId id="260" r:id="rId9"/>
+    <p:sldId id="273" r:id="rId10"/>
+    <p:sldId id="285" r:id="rId11"/>
     <p:sldId id="276" r:id="rId12"/>
     <p:sldId id="277" r:id="rId13"/>
     <p:sldId id="278" r:id="rId14"/>
-    <p:sldId id="261" r:id="rId15"/>
-    <p:sldId id="262" r:id="rId16"/>
-    <p:sldId id="282" r:id="rId17"/>
-    <p:sldId id="274" r:id="rId18"/>
+    <p:sldId id="286" r:id="rId15"/>
+    <p:sldId id="287" r:id="rId16"/>
+    <p:sldId id="261" r:id="rId17"/>
+    <p:sldId id="284" r:id="rId18"/>
+    <p:sldId id="288" r:id="rId19"/>
+    <p:sldId id="289" r:id="rId20"/>
+    <p:sldId id="290" r:id="rId21"/>
+    <p:sldId id="283" r:id="rId22"/>
+    <p:sldId id="282" r:id="rId23"/>
+    <p:sldId id="291" r:id="rId24"/>
+    <p:sldId id="292" r:id="rId25"/>
+    <p:sldId id="293" r:id="rId26"/>
+    <p:sldId id="294" r:id="rId27"/>
+    <p:sldId id="295" r:id="rId28"/>
+    <p:sldId id="296" r:id="rId29"/>
+    <p:sldId id="297" r:id="rId30"/>
+    <p:sldId id="301" r:id="rId31"/>
+    <p:sldId id="298" r:id="rId32"/>
+    <p:sldId id="299" r:id="rId33"/>
+    <p:sldId id="300" r:id="rId34"/>
+    <p:sldId id="274" r:id="rId35"/>
   </p:sldIdLst>
   <p:sldSz cx="12192000" cy="6858000"/>
   <p:notesSz cx="6858000" cy="9144000"/>
@@ -929,7 +946,7 @@
           <a:p>
             <a:fld id="{DF37364F-89AB-4B95-98E5-867F7745783F}" type="datetimeFigureOut">
               <a:rPr lang="en-IN" smtClean="0"/>
-              <a:t>06-02-2026</a:t>
+              <a:t>23-02-2026</a:t>
             </a:fld>
             <a:endParaRPr lang="en-IN"/>
           </a:p>
@@ -1180,7 +1197,7 @@
           <a:p>
             <a:fld id="{DF37364F-89AB-4B95-98E5-867F7745783F}" type="datetimeFigureOut">
               <a:rPr lang="en-IN" smtClean="0"/>
-              <a:t>06-02-2026</a:t>
+              <a:t>23-02-2026</a:t>
             </a:fld>
             <a:endParaRPr lang="en-IN"/>
           </a:p>
@@ -1494,7 +1511,7 @@
           <a:p>
             <a:fld id="{DF37364F-89AB-4B95-98E5-867F7745783F}" type="datetimeFigureOut">
               <a:rPr lang="en-IN" smtClean="0"/>
-              <a:t>06-02-2026</a:t>
+              <a:t>23-02-2026</a:t>
             </a:fld>
             <a:endParaRPr lang="en-IN"/>
           </a:p>
@@ -1827,7 +1844,7 @@
           <a:p>
             <a:fld id="{DF37364F-89AB-4B95-98E5-867F7745783F}" type="datetimeFigureOut">
               <a:rPr lang="en-IN" smtClean="0"/>
-              <a:t>06-02-2026</a:t>
+              <a:t>23-02-2026</a:t>
             </a:fld>
             <a:endParaRPr lang="en-IN"/>
           </a:p>
@@ -2141,7 +2158,7 @@
           <a:p>
             <a:fld id="{DF37364F-89AB-4B95-98E5-867F7745783F}" type="datetimeFigureOut">
               <a:rPr lang="en-IN" smtClean="0"/>
-              <a:t>06-02-2026</a:t>
+              <a:t>23-02-2026</a:t>
             </a:fld>
             <a:endParaRPr lang="en-IN"/>
           </a:p>
@@ -2534,7 +2551,7 @@
           <a:p>
             <a:fld id="{DF37364F-89AB-4B95-98E5-867F7745783F}" type="datetimeFigureOut">
               <a:rPr lang="en-IN" smtClean="0"/>
-              <a:t>06-02-2026</a:t>
+              <a:t>23-02-2026</a:t>
             </a:fld>
             <a:endParaRPr lang="en-IN"/>
           </a:p>
@@ -2704,7 +2721,7 @@
           <a:p>
             <a:fld id="{DF37364F-89AB-4B95-98E5-867F7745783F}" type="datetimeFigureOut">
               <a:rPr lang="en-IN" smtClean="0"/>
-              <a:t>06-02-2026</a:t>
+              <a:t>23-02-2026</a:t>
             </a:fld>
             <a:endParaRPr lang="en-IN"/>
           </a:p>
@@ -2884,7 +2901,7 @@
           <a:p>
             <a:fld id="{DF37364F-89AB-4B95-98E5-867F7745783F}" type="datetimeFigureOut">
               <a:rPr lang="en-IN" smtClean="0"/>
-              <a:t>06-02-2026</a:t>
+              <a:t>23-02-2026</a:t>
             </a:fld>
             <a:endParaRPr lang="en-IN"/>
           </a:p>
@@ -3054,7 +3071,7 @@
           <a:p>
             <a:fld id="{DF37364F-89AB-4B95-98E5-867F7745783F}" type="datetimeFigureOut">
               <a:rPr lang="en-IN" smtClean="0"/>
-              <a:t>06-02-2026</a:t>
+              <a:t>23-02-2026</a:t>
             </a:fld>
             <a:endParaRPr lang="en-IN"/>
           </a:p>
@@ -3301,7 +3318,7 @@
           <a:p>
             <a:fld id="{DF37364F-89AB-4B95-98E5-867F7745783F}" type="datetimeFigureOut">
               <a:rPr lang="en-IN" smtClean="0"/>
-              <a:t>06-02-2026</a:t>
+              <a:t>23-02-2026</a:t>
             </a:fld>
             <a:endParaRPr lang="en-IN"/>
           </a:p>
@@ -3533,7 +3550,7 @@
           <a:p>
             <a:fld id="{DF37364F-89AB-4B95-98E5-867F7745783F}" type="datetimeFigureOut">
               <a:rPr lang="en-IN" smtClean="0"/>
-              <a:t>06-02-2026</a:t>
+              <a:t>23-02-2026</a:t>
             </a:fld>
             <a:endParaRPr lang="en-IN"/>
           </a:p>
@@ -3907,7 +3924,7 @@
           <a:p>
             <a:fld id="{DF37364F-89AB-4B95-98E5-867F7745783F}" type="datetimeFigureOut">
               <a:rPr lang="en-IN" smtClean="0"/>
-              <a:t>06-02-2026</a:t>
+              <a:t>23-02-2026</a:t>
             </a:fld>
             <a:endParaRPr lang="en-IN"/>
           </a:p>
@@ -4030,7 +4047,7 @@
           <a:p>
             <a:fld id="{DF37364F-89AB-4B95-98E5-867F7745783F}" type="datetimeFigureOut">
               <a:rPr lang="en-IN" smtClean="0"/>
-              <a:t>06-02-2026</a:t>
+              <a:t>23-02-2026</a:t>
             </a:fld>
             <a:endParaRPr lang="en-IN"/>
           </a:p>
@@ -4125,7 +4142,7 @@
           <a:p>
             <a:fld id="{DF37364F-89AB-4B95-98E5-867F7745783F}" type="datetimeFigureOut">
               <a:rPr lang="en-IN" smtClean="0"/>
-              <a:t>06-02-2026</a:t>
+              <a:t>23-02-2026</a:t>
             </a:fld>
             <a:endParaRPr lang="en-IN"/>
           </a:p>
@@ -4380,7 +4397,7 @@
           <a:p>
             <a:fld id="{DF37364F-89AB-4B95-98E5-867F7745783F}" type="datetimeFigureOut">
               <a:rPr lang="en-IN" smtClean="0"/>
-              <a:t>06-02-2026</a:t>
+              <a:t>23-02-2026</a:t>
             </a:fld>
             <a:endParaRPr lang="en-IN"/>
           </a:p>
@@ -4685,7 +4702,7 @@
           <a:p>
             <a:fld id="{DF37364F-89AB-4B95-98E5-867F7745783F}" type="datetimeFigureOut">
               <a:rPr lang="en-IN" smtClean="0"/>
-              <a:t>06-02-2026</a:t>
+              <a:t>23-02-2026</a:t>
             </a:fld>
             <a:endParaRPr lang="en-IN"/>
           </a:p>
@@ -5443,7 +5460,7 @@
           <a:p>
             <a:fld id="{DF37364F-89AB-4B95-98E5-867F7745783F}" type="datetimeFigureOut">
               <a:rPr lang="en-IN" smtClean="0"/>
-              <a:t>06-02-2026</a:t>
+              <a:t>23-02-2026</a:t>
             </a:fld>
             <a:endParaRPr lang="en-IN"/>
           </a:p>
@@ -6088,7 +6105,7 @@
         <p:cNvPr id="1" name="">
           <a:extLst>
             <a:ext uri="{FF2B5EF4-FFF2-40B4-BE49-F238E27FC236}">
-              <a16:creationId xmlns:a16="http://schemas.microsoft.com/office/drawing/2014/main" id="{DE30BC4B-6F0F-57AE-9CC0-53A77CAC35F4}"/>
+              <a16:creationId xmlns:a16="http://schemas.microsoft.com/office/drawing/2014/main" id="{57DE1D82-6511-79EA-CC6A-E79EBB94B924}"/>
             </a:ext>
           </a:extLst>
         </p:cNvPr>
@@ -6108,7 +6125,7 @@
           <p:cNvPr id="2" name="Title 1">
             <a:extLst>
               <a:ext uri="{FF2B5EF4-FFF2-40B4-BE49-F238E27FC236}">
-                <a16:creationId xmlns:a16="http://schemas.microsoft.com/office/drawing/2014/main" id="{65D7A437-235A-F498-D31D-650015EC6D1C}"/>
+                <a16:creationId xmlns:a16="http://schemas.microsoft.com/office/drawing/2014/main" id="{EC8B6A8C-348A-8B08-B8BC-A30879F952A9}"/>
               </a:ext>
             </a:extLst>
           </p:cNvPr>
@@ -6155,7 +6172,7 @@
           <p:cNvPr id="3" name="Content Placeholder 2">
             <a:extLst>
               <a:ext uri="{FF2B5EF4-FFF2-40B4-BE49-F238E27FC236}">
-                <a16:creationId xmlns:a16="http://schemas.microsoft.com/office/drawing/2014/main" id="{6CB875A2-9D90-ED18-378B-0C1F1EA3152B}"/>
+                <a16:creationId xmlns:a16="http://schemas.microsoft.com/office/drawing/2014/main" id="{3D413641-0ECB-EA33-A655-5CC5DD4C7A5D}"/>
               </a:ext>
             </a:extLst>
           </p:cNvPr>
@@ -6168,63 +6185,36 @@
         </p:nvSpPr>
         <p:spPr>
           <a:xfrm>
-            <a:off x="1089061" y="1369478"/>
-            <a:ext cx="10531011" cy="4743646"/>
+            <a:off x="976045" y="1369478"/>
+            <a:ext cx="10171416" cy="5010774"/>
           </a:xfrm>
         </p:spPr>
         <p:txBody>
           <a:bodyPr>
-            <a:normAutofit fontScale="70000" lnSpcReduction="20000"/>
+            <a:normAutofit fontScale="92500" lnSpcReduction="20000"/>
           </a:bodyPr>
           <a:lstStyle/>
-          <a:p>
-            <a:pPr marL="0" indent="0">
-              <a:lnSpc>
-                <a:spcPct val="120000"/>
-              </a:lnSpc>
-              <a:buNone/>
-            </a:pPr>
-            <a:r>
-              <a:rPr lang="en-IN" sz="3100" dirty="0">
-                <a:latin typeface="Times New Roman" panose="02020603050405020304" pitchFamily="18" charset="0"/>
-                <a:cs typeface="Times New Roman" panose="02020603050405020304" pitchFamily="18" charset="0"/>
-              </a:rPr>
-              <a:t>The dataset is divided into </a:t>
-            </a:r>
-            <a:r>
-              <a:rPr lang="en-IN" sz="3100" b="1" dirty="0">
-                <a:latin typeface="Times New Roman" panose="02020603050405020304" pitchFamily="18" charset="0"/>
-                <a:cs typeface="Times New Roman" panose="02020603050405020304" pitchFamily="18" charset="0"/>
-              </a:rPr>
-              <a:t>one fact table and multiple dimension tables</a:t>
-            </a:r>
-            <a:r>
-              <a:rPr lang="en-IN" sz="3100" dirty="0">
-                <a:latin typeface="Times New Roman" panose="02020603050405020304" pitchFamily="18" charset="0"/>
-                <a:cs typeface="Times New Roman" panose="02020603050405020304" pitchFamily="18" charset="0"/>
-              </a:rPr>
-              <a:t>.</a:t>
-            </a:r>
-          </a:p>
           <a:p>
             <a:pPr>
               <a:lnSpc>
                 <a:spcPct val="120000"/>
               </a:lnSpc>
+              <a:buFont typeface="Wingdings" panose="05000000000000000000" pitchFamily="2" charset="2"/>
+              <a:buChar char="Ø"/>
             </a:pPr>
             <a:r>
-              <a:rPr lang="en-IN" sz="3100" b="1" dirty="0" err="1">
-                <a:latin typeface="Times New Roman" panose="02020603050405020304" pitchFamily="18" charset="0"/>
-                <a:cs typeface="Times New Roman" panose="02020603050405020304" pitchFamily="18" charset="0"/>
-              </a:rPr>
-              <a:t>Fact_Sales</a:t>
-            </a:r>
-            <a:r>
-              <a:rPr lang="en-IN" sz="3100" dirty="0">
-                <a:latin typeface="Times New Roman" panose="02020603050405020304" pitchFamily="18" charset="0"/>
-                <a:cs typeface="Times New Roman" panose="02020603050405020304" pitchFamily="18" charset="0"/>
-              </a:rPr>
-              <a:t> → Central transactional table</a:t>
+              <a:rPr lang="en-IN" sz="2600" b="1" dirty="0" err="1">
+                <a:latin typeface="Times New Roman" panose="02020603050405020304" pitchFamily="18" charset="0"/>
+                <a:cs typeface="Times New Roman" panose="02020603050405020304" pitchFamily="18" charset="0"/>
+              </a:rPr>
+              <a:t>Dim_Store</a:t>
+            </a:r>
+            <a:r>
+              <a:rPr lang="en-IN" sz="2600" dirty="0">
+                <a:latin typeface="Times New Roman" panose="02020603050405020304" pitchFamily="18" charset="0"/>
+                <a:cs typeface="Times New Roman" panose="02020603050405020304" pitchFamily="18" charset="0"/>
+              </a:rPr>
+              <a:t> → Store master details.</a:t>
             </a:r>
           </a:p>
           <a:p>
@@ -6232,20 +6222,22 @@
               <a:lnSpc>
                 <a:spcPct val="120000"/>
               </a:lnSpc>
+              <a:buFont typeface="Wingdings" panose="05000000000000000000" pitchFamily="2" charset="2"/>
+              <a:buChar char="Ø"/>
             </a:pPr>
             <a:r>
-              <a:rPr lang="en-IN" sz="3100" b="1" dirty="0" err="1">
-                <a:latin typeface="Times New Roman" panose="02020603050405020304" pitchFamily="18" charset="0"/>
-                <a:cs typeface="Times New Roman" panose="02020603050405020304" pitchFamily="18" charset="0"/>
-              </a:rPr>
-              <a:t>Dim_Date</a:t>
-            </a:r>
-            <a:r>
-              <a:rPr lang="en-IN" sz="3100" dirty="0">
-                <a:latin typeface="Times New Roman" panose="02020603050405020304" pitchFamily="18" charset="0"/>
-                <a:cs typeface="Times New Roman" panose="02020603050405020304" pitchFamily="18" charset="0"/>
-              </a:rPr>
-              <a:t> → Time-based analysis</a:t>
+              <a:rPr lang="en-IN" sz="2600" b="1" dirty="0" err="1">
+                <a:latin typeface="Times New Roman" panose="02020603050405020304" pitchFamily="18" charset="0"/>
+                <a:cs typeface="Times New Roman" panose="02020603050405020304" pitchFamily="18" charset="0"/>
+              </a:rPr>
+              <a:t>Dim_Supplier</a:t>
+            </a:r>
+            <a:r>
+              <a:rPr lang="en-IN" sz="2600" dirty="0">
+                <a:latin typeface="Times New Roman" panose="02020603050405020304" pitchFamily="18" charset="0"/>
+                <a:cs typeface="Times New Roman" panose="02020603050405020304" pitchFamily="18" charset="0"/>
+              </a:rPr>
+              <a:t> → Supplier information.</a:t>
             </a:r>
           </a:p>
           <a:p>
@@ -6253,34 +6245,22 @@
               <a:lnSpc>
                 <a:spcPct val="120000"/>
               </a:lnSpc>
+              <a:buFont typeface="Wingdings" panose="05000000000000000000" pitchFamily="2" charset="2"/>
+              <a:buChar char="Ø"/>
             </a:pPr>
             <a:r>
-              <a:rPr lang="en-IN" sz="3100" b="1" dirty="0" err="1">
+              <a:rPr lang="en-IN" sz="2600" b="1" dirty="0" err="1">
                 <a:latin typeface="Times New Roman" panose="02020603050405020304" pitchFamily="18" charset="0"/>
                 <a:cs typeface="Times New Roman" panose="02020603050405020304" pitchFamily="18" charset="0"/>
               </a:rPr>
               <a:t>Dim_Product</a:t>
             </a:r>
             <a:r>
-              <a:rPr lang="en-IN" sz="3100" dirty="0">
-                <a:latin typeface="Times New Roman" panose="02020603050405020304" pitchFamily="18" charset="0"/>
-                <a:cs typeface="Times New Roman" panose="02020603050405020304" pitchFamily="18" charset="0"/>
-              </a:rPr>
-              <a:t> → Category, size, </a:t>
-            </a:r>
-            <a:r>
-              <a:rPr lang="en-IN" sz="3100" dirty="0" err="1">
-                <a:latin typeface="Times New Roman" panose="02020603050405020304" pitchFamily="18" charset="0"/>
-                <a:cs typeface="Times New Roman" panose="02020603050405020304" pitchFamily="18" charset="0"/>
-              </a:rPr>
-              <a:t>color</a:t>
-            </a:r>
-            <a:r>
-              <a:rPr lang="en-IN" sz="3100" dirty="0">
-                <a:latin typeface="Times New Roman" panose="02020603050405020304" pitchFamily="18" charset="0"/>
-                <a:cs typeface="Times New Roman" panose="02020603050405020304" pitchFamily="18" charset="0"/>
-              </a:rPr>
-              <a:t>, brand</a:t>
+              <a:rPr lang="en-IN" sz="2600" dirty="0">
+                <a:latin typeface="Times New Roman" panose="02020603050405020304" pitchFamily="18" charset="0"/>
+                <a:cs typeface="Times New Roman" panose="02020603050405020304" pitchFamily="18" charset="0"/>
+              </a:rPr>
+              <a:t> → Product master data.</a:t>
             </a:r>
           </a:p>
           <a:p>
@@ -6288,34 +6268,22 @@
               <a:lnSpc>
                 <a:spcPct val="120000"/>
               </a:lnSpc>
+              <a:buFont typeface="Wingdings" panose="05000000000000000000" pitchFamily="2" charset="2"/>
+              <a:buChar char="Ø"/>
             </a:pPr>
             <a:r>
-              <a:rPr lang="en-IN" sz="3100" b="1" dirty="0" err="1">
-                <a:latin typeface="Times New Roman" panose="02020603050405020304" pitchFamily="18" charset="0"/>
-                <a:cs typeface="Times New Roman" panose="02020603050405020304" pitchFamily="18" charset="0"/>
-              </a:rPr>
-              <a:t>Dim_Customer</a:t>
-            </a:r>
-            <a:r>
-              <a:rPr lang="en-IN" sz="3100" dirty="0">
-                <a:latin typeface="Times New Roman" panose="02020603050405020304" pitchFamily="18" charset="0"/>
-                <a:cs typeface="Times New Roman" panose="02020603050405020304" pitchFamily="18" charset="0"/>
-              </a:rPr>
-              <a:t> → Customer </a:t>
-            </a:r>
-            <a:r>
-              <a:rPr lang="en-IN" sz="3100" dirty="0" err="1">
-                <a:latin typeface="Times New Roman" panose="02020603050405020304" pitchFamily="18" charset="0"/>
-                <a:cs typeface="Times New Roman" panose="02020603050405020304" pitchFamily="18" charset="0"/>
-              </a:rPr>
-              <a:t>behavior</a:t>
-            </a:r>
-            <a:r>
-              <a:rPr lang="en-IN" sz="3100" dirty="0">
-                <a:latin typeface="Times New Roman" panose="02020603050405020304" pitchFamily="18" charset="0"/>
-                <a:cs typeface="Times New Roman" panose="02020603050405020304" pitchFamily="18" charset="0"/>
-              </a:rPr>
-              <a:t> tracking</a:t>
+              <a:rPr lang="en-IN" sz="2600" b="1" dirty="0" err="1">
+                <a:latin typeface="Times New Roman" panose="02020603050405020304" pitchFamily="18" charset="0"/>
+                <a:cs typeface="Times New Roman" panose="02020603050405020304" pitchFamily="18" charset="0"/>
+              </a:rPr>
+              <a:t>Dim_Employee</a:t>
+            </a:r>
+            <a:r>
+              <a:rPr lang="en-IN" sz="2600" dirty="0">
+                <a:latin typeface="Times New Roman" panose="02020603050405020304" pitchFamily="18" charset="0"/>
+                <a:cs typeface="Times New Roman" panose="02020603050405020304" pitchFamily="18" charset="0"/>
+              </a:rPr>
+              <a:t> → Employee details.</a:t>
             </a:r>
           </a:p>
           <a:p>
@@ -6323,20 +6291,22 @@
               <a:lnSpc>
                 <a:spcPct val="120000"/>
               </a:lnSpc>
+              <a:buFont typeface="Wingdings" panose="05000000000000000000" pitchFamily="2" charset="2"/>
+              <a:buChar char="Ø"/>
             </a:pPr>
             <a:r>
-              <a:rPr lang="en-IN" sz="3100" b="1" dirty="0" err="1">
-                <a:latin typeface="Times New Roman" panose="02020603050405020304" pitchFamily="18" charset="0"/>
-                <a:cs typeface="Times New Roman" panose="02020603050405020304" pitchFamily="18" charset="0"/>
-              </a:rPr>
-              <a:t>Dim_Employee</a:t>
-            </a:r>
-            <a:r>
-              <a:rPr lang="en-IN" sz="3100" dirty="0">
-                <a:latin typeface="Times New Roman" panose="02020603050405020304" pitchFamily="18" charset="0"/>
-                <a:cs typeface="Times New Roman" panose="02020603050405020304" pitchFamily="18" charset="0"/>
-              </a:rPr>
-              <a:t> → Sales contribution per staff</a:t>
+              <a:rPr lang="en-IN" sz="2600" b="1" dirty="0" err="1">
+                <a:latin typeface="Times New Roman" panose="02020603050405020304" pitchFamily="18" charset="0"/>
+                <a:cs typeface="Times New Roman" panose="02020603050405020304" pitchFamily="18" charset="0"/>
+              </a:rPr>
+              <a:t>Dim_Promotion</a:t>
+            </a:r>
+            <a:r>
+              <a:rPr lang="en-IN" sz="2600" dirty="0">
+                <a:latin typeface="Times New Roman" panose="02020603050405020304" pitchFamily="18" charset="0"/>
+                <a:cs typeface="Times New Roman" panose="02020603050405020304" pitchFamily="18" charset="0"/>
+              </a:rPr>
+              <a:t> → Promotion details.</a:t>
             </a:r>
           </a:p>
           <a:p>
@@ -6344,34 +6314,22 @@
               <a:lnSpc>
                 <a:spcPct val="120000"/>
               </a:lnSpc>
+              <a:buFont typeface="Wingdings" panose="05000000000000000000" pitchFamily="2" charset="2"/>
+              <a:buChar char="Ø"/>
             </a:pPr>
             <a:r>
-              <a:rPr lang="en-IN" sz="3100" b="1" dirty="0" err="1">
-                <a:latin typeface="Times New Roman" panose="02020603050405020304" pitchFamily="18" charset="0"/>
-                <a:cs typeface="Times New Roman" panose="02020603050405020304" pitchFamily="18" charset="0"/>
-              </a:rPr>
-              <a:t>Dim_Store</a:t>
-            </a:r>
-            <a:r>
-              <a:rPr lang="en-IN" sz="3100" b="1" dirty="0">
-                <a:latin typeface="Times New Roman" panose="02020603050405020304" pitchFamily="18" charset="0"/>
-                <a:cs typeface="Times New Roman" panose="02020603050405020304" pitchFamily="18" charset="0"/>
-              </a:rPr>
-              <a:t> &amp; </a:t>
-            </a:r>
-            <a:r>
-              <a:rPr lang="en-IN" sz="3100" b="1" dirty="0" err="1">
-                <a:latin typeface="Times New Roman" panose="02020603050405020304" pitchFamily="18" charset="0"/>
-                <a:cs typeface="Times New Roman" panose="02020603050405020304" pitchFamily="18" charset="0"/>
-              </a:rPr>
-              <a:t>Dim_Branch</a:t>
-            </a:r>
-            <a:r>
-              <a:rPr lang="en-IN" sz="3100" dirty="0">
-                <a:latin typeface="Times New Roman" panose="02020603050405020304" pitchFamily="18" charset="0"/>
-                <a:cs typeface="Times New Roman" panose="02020603050405020304" pitchFamily="18" charset="0"/>
-              </a:rPr>
-              <a:t> → Location-based analysis</a:t>
+              <a:rPr lang="en-IN" sz="2600" b="1" dirty="0" err="1">
+                <a:latin typeface="Times New Roman" panose="02020603050405020304" pitchFamily="18" charset="0"/>
+                <a:cs typeface="Times New Roman" panose="02020603050405020304" pitchFamily="18" charset="0"/>
+              </a:rPr>
+              <a:t>Dim_Fabric</a:t>
+            </a:r>
+            <a:r>
+              <a:rPr lang="en-IN" sz="2600" dirty="0">
+                <a:latin typeface="Times New Roman" panose="02020603050405020304" pitchFamily="18" charset="0"/>
+                <a:cs typeface="Times New Roman" panose="02020603050405020304" pitchFamily="18" charset="0"/>
+              </a:rPr>
+              <a:t> → Fabric type reference.</a:t>
             </a:r>
           </a:p>
           <a:p>
@@ -6379,20 +6337,22 @@
               <a:lnSpc>
                 <a:spcPct val="120000"/>
               </a:lnSpc>
+              <a:buFont typeface="Wingdings" panose="05000000000000000000" pitchFamily="2" charset="2"/>
+              <a:buChar char="Ø"/>
             </a:pPr>
             <a:r>
-              <a:rPr lang="en-IN" sz="3100" b="1" dirty="0" err="1">
-                <a:latin typeface="Times New Roman" panose="02020603050405020304" pitchFamily="18" charset="0"/>
-                <a:cs typeface="Times New Roman" panose="02020603050405020304" pitchFamily="18" charset="0"/>
-              </a:rPr>
-              <a:t>Dim_Promotion</a:t>
-            </a:r>
-            <a:r>
-              <a:rPr lang="en-IN" sz="3100" dirty="0">
-                <a:latin typeface="Times New Roman" panose="02020603050405020304" pitchFamily="18" charset="0"/>
-                <a:cs typeface="Times New Roman" panose="02020603050405020304" pitchFamily="18" charset="0"/>
-              </a:rPr>
-              <a:t> → Discount effectiveness</a:t>
+              <a:rPr lang="en-IN" sz="2600" b="1" dirty="0" err="1">
+                <a:latin typeface="Times New Roman" panose="02020603050405020304" pitchFamily="18" charset="0"/>
+                <a:cs typeface="Times New Roman" panose="02020603050405020304" pitchFamily="18" charset="0"/>
+              </a:rPr>
+              <a:t>Dim_Channel</a:t>
+            </a:r>
+            <a:r>
+              <a:rPr lang="en-IN" sz="2600" dirty="0">
+                <a:latin typeface="Times New Roman" panose="02020603050405020304" pitchFamily="18" charset="0"/>
+                <a:cs typeface="Times New Roman" panose="02020603050405020304" pitchFamily="18" charset="0"/>
+              </a:rPr>
+              <a:t> → Sales channel types.</a:t>
             </a:r>
           </a:p>
           <a:p>
@@ -6400,20 +6360,22 @@
               <a:lnSpc>
                 <a:spcPct val="120000"/>
               </a:lnSpc>
+              <a:buFont typeface="Wingdings" panose="05000000000000000000" pitchFamily="2" charset="2"/>
+              <a:buChar char="Ø"/>
             </a:pPr>
             <a:r>
-              <a:rPr lang="en-IN" sz="3100" b="1" dirty="0" err="1">
+              <a:rPr lang="en-IN" sz="2600" b="1" dirty="0" err="1">
                 <a:latin typeface="Times New Roman" panose="02020603050405020304" pitchFamily="18" charset="0"/>
                 <a:cs typeface="Times New Roman" panose="02020603050405020304" pitchFamily="18" charset="0"/>
               </a:rPr>
               <a:t>Dim_Inventory</a:t>
             </a:r>
             <a:r>
-              <a:rPr lang="en-IN" sz="3100" dirty="0">
-                <a:latin typeface="Times New Roman" panose="02020603050405020304" pitchFamily="18" charset="0"/>
-                <a:cs typeface="Times New Roman" panose="02020603050405020304" pitchFamily="18" charset="0"/>
-              </a:rPr>
-              <a:t> → Stock level monitoring</a:t>
+              <a:rPr lang="en-IN" sz="2600" dirty="0">
+                <a:latin typeface="Times New Roman" panose="02020603050405020304" pitchFamily="18" charset="0"/>
+                <a:cs typeface="Times New Roman" panose="02020603050405020304" pitchFamily="18" charset="0"/>
+              </a:rPr>
+              <a:t> → Stock level records.</a:t>
             </a:r>
           </a:p>
           <a:p>
@@ -6421,20 +6383,45 @@
               <a:lnSpc>
                 <a:spcPct val="120000"/>
               </a:lnSpc>
+              <a:buFont typeface="Wingdings" panose="05000000000000000000" pitchFamily="2" charset="2"/>
+              <a:buChar char="Ø"/>
             </a:pPr>
             <a:r>
-              <a:rPr lang="en-IN" sz="3100" b="1" dirty="0" err="1">
-                <a:latin typeface="Times New Roman" panose="02020603050405020304" pitchFamily="18" charset="0"/>
-                <a:cs typeface="Times New Roman" panose="02020603050405020304" pitchFamily="18" charset="0"/>
-              </a:rPr>
-              <a:t>Dim_Supplier</a:t>
-            </a:r>
-            <a:r>
-              <a:rPr lang="en-IN" sz="3100" dirty="0">
-                <a:latin typeface="Times New Roman" panose="02020603050405020304" pitchFamily="18" charset="0"/>
-                <a:cs typeface="Times New Roman" panose="02020603050405020304" pitchFamily="18" charset="0"/>
-              </a:rPr>
-              <a:t> → Supply chain insights</a:t>
+              <a:rPr lang="en-IN" sz="2600" b="1" dirty="0" err="1">
+                <a:latin typeface="Times New Roman" panose="02020603050405020304" pitchFamily="18" charset="0"/>
+                <a:cs typeface="Times New Roman" panose="02020603050405020304" pitchFamily="18" charset="0"/>
+              </a:rPr>
+              <a:t>Dim_Payment_Method</a:t>
+            </a:r>
+            <a:r>
+              <a:rPr lang="en-IN" sz="2600" dirty="0">
+                <a:latin typeface="Times New Roman" panose="02020603050405020304" pitchFamily="18" charset="0"/>
+                <a:cs typeface="Times New Roman" panose="02020603050405020304" pitchFamily="18" charset="0"/>
+              </a:rPr>
+              <a:t> → Payment mode types.</a:t>
+            </a:r>
+          </a:p>
+          <a:p>
+            <a:pPr>
+              <a:lnSpc>
+                <a:spcPct val="120000"/>
+              </a:lnSpc>
+              <a:buFont typeface="Wingdings" panose="05000000000000000000" pitchFamily="2" charset="2"/>
+              <a:buChar char="Ø"/>
+            </a:pPr>
+            <a:r>
+              <a:rPr lang="en-IN" sz="2600" b="1" dirty="0" err="1">
+                <a:latin typeface="Times New Roman" panose="02020603050405020304" pitchFamily="18" charset="0"/>
+                <a:cs typeface="Times New Roman" panose="02020603050405020304" pitchFamily="18" charset="0"/>
+              </a:rPr>
+              <a:t>Dim_Return_Reason</a:t>
+            </a:r>
+            <a:r>
+              <a:rPr lang="en-IN" sz="2600" dirty="0">
+                <a:latin typeface="Times New Roman" panose="02020603050405020304" pitchFamily="18" charset="0"/>
+                <a:cs typeface="Times New Roman" panose="02020603050405020304" pitchFamily="18" charset="0"/>
+              </a:rPr>
+              <a:t> → Return reason categories.</a:t>
             </a:r>
           </a:p>
           <a:p>
@@ -6453,7 +6440,7 @@
           <p:cNvPr id="4" name="TextBox 3">
             <a:extLst>
               <a:ext uri="{FF2B5EF4-FFF2-40B4-BE49-F238E27FC236}">
-                <a16:creationId xmlns:a16="http://schemas.microsoft.com/office/drawing/2014/main" id="{2FBD1D8E-B808-7954-D35F-6DBF9B684F0D}"/>
+                <a16:creationId xmlns:a16="http://schemas.microsoft.com/office/drawing/2014/main" id="{F6E1B7FD-BC75-8DB0-302D-56EBE727291A}"/>
               </a:ext>
             </a:extLst>
           </p:cNvPr>
@@ -6493,7 +6480,7 @@
     </p:spTree>
     <p:extLst>
       <p:ext uri="{BB962C8B-B14F-4D97-AF65-F5344CB8AC3E}">
-        <p14:creationId xmlns:p14="http://schemas.microsoft.com/office/powerpoint/2010/main" val="1502903002"/>
+        <p14:creationId xmlns:p14="http://schemas.microsoft.com/office/powerpoint/2010/main" val="860124428"/>
       </p:ext>
     </p:extLst>
   </p:cSld>
@@ -7183,7 +7170,13 @@
   <p:cSld>
     <p:spTree>
       <p:nvGrpSpPr>
-        <p:cNvPr id="1" name=""/>
+        <p:cNvPr id="1" name="">
+          <a:extLst>
+            <a:ext uri="{FF2B5EF4-FFF2-40B4-BE49-F238E27FC236}">
+              <a16:creationId xmlns:a16="http://schemas.microsoft.com/office/drawing/2014/main" id="{42E555CA-9B42-EAA0-C9CD-F8D9C3CB8AD9}"/>
+            </a:ext>
+          </a:extLst>
+        </p:cNvPr>
         <p:cNvGrpSpPr/>
         <p:nvPr/>
       </p:nvGrpSpPr>
@@ -7200,7 +7193,7 @@
           <p:cNvPr id="2" name="Title 1">
             <a:extLst>
               <a:ext uri="{FF2B5EF4-FFF2-40B4-BE49-F238E27FC236}">
-                <a16:creationId xmlns:a16="http://schemas.microsoft.com/office/drawing/2014/main" id="{81D0188B-2233-E74A-4751-1978C8796FC9}"/>
+                <a16:creationId xmlns:a16="http://schemas.microsoft.com/office/drawing/2014/main" id="{CE0DC86D-EFFD-C788-3879-71DC5CCD2510}"/>
               </a:ext>
             </a:extLst>
           </p:cNvPr>
@@ -7213,14 +7206,15 @@
         </p:nvSpPr>
         <p:spPr>
           <a:xfrm>
-            <a:off x="677334" y="609600"/>
-            <a:ext cx="9750936" cy="1320800"/>
+            <a:off x="851995" y="301376"/>
+            <a:ext cx="8596668" cy="1320800"/>
           </a:xfrm>
         </p:spPr>
         <p:txBody>
           <a:bodyPr/>
           <a:lstStyle/>
           <a:p>
+            <a:pPr algn="ctr"/>
             <a:r>
               <a:rPr lang="en-US" b="1" dirty="0">
                 <a:solidFill>
@@ -7229,7 +7223,7 @@
                 <a:latin typeface="Times New Roman" panose="02020603050405020304" pitchFamily="18" charset="0"/>
                 <a:cs typeface="Times New Roman" panose="02020603050405020304" pitchFamily="18" charset="0"/>
               </a:rPr>
-              <a:t>                           Schema Modelling</a:t>
+              <a:t>                </a:t>
             </a:r>
             <a:endParaRPr lang="en-IN" b="1" dirty="0">
               <a:solidFill>
@@ -7241,45 +7235,172 @@
           </a:p>
         </p:txBody>
       </p:sp>
+      <p:sp>
+        <p:nvSpPr>
+          <p:cNvPr id="4" name="TextBox 3">
+            <a:extLst>
+              <a:ext uri="{FF2B5EF4-FFF2-40B4-BE49-F238E27FC236}">
+                <a16:creationId xmlns:a16="http://schemas.microsoft.com/office/drawing/2014/main" id="{8B0B4DEB-5083-55BB-E8AF-74A322771FA6}"/>
+              </a:ext>
+            </a:extLst>
+          </p:cNvPr>
+          <p:cNvSpPr txBox="1"/>
+          <p:nvPr/>
+        </p:nvSpPr>
+        <p:spPr>
+          <a:xfrm>
+            <a:off x="3311634" y="573817"/>
+            <a:ext cx="7222733" cy="523220"/>
+          </a:xfrm>
+          <a:prstGeom prst="rect">
+            <a:avLst/>
+          </a:prstGeom>
+          <a:noFill/>
+        </p:spPr>
+        <p:txBody>
+          <a:bodyPr wrap="square" rtlCol="0">
+            <a:spAutoFit/>
+          </a:bodyPr>
+          <a:lstStyle/>
+          <a:p>
+            <a:r>
+              <a:rPr lang="en-US" sz="2800" b="1" dirty="0">
+                <a:latin typeface="Times New Roman" panose="02020603050405020304" pitchFamily="18" charset="0"/>
+                <a:cs typeface="Times New Roman" panose="02020603050405020304" pitchFamily="18" charset="0"/>
+              </a:rPr>
+              <a:t>FACT AND DIMENSIONS TABLES</a:t>
+            </a:r>
+            <a:endParaRPr lang="en-IN" sz="2800" b="1" dirty="0">
+              <a:latin typeface="Times New Roman" panose="02020603050405020304" pitchFamily="18" charset="0"/>
+              <a:cs typeface="Times New Roman" panose="02020603050405020304" pitchFamily="18" charset="0"/>
+            </a:endParaRPr>
+          </a:p>
+        </p:txBody>
+      </p:sp>
       <p:pic>
         <p:nvPicPr>
-          <p:cNvPr id="7" name="Content Placeholder 6">
+          <p:cNvPr id="5" name="Picture 4">
             <a:extLst>
               <a:ext uri="{FF2B5EF4-FFF2-40B4-BE49-F238E27FC236}">
-                <a16:creationId xmlns:a16="http://schemas.microsoft.com/office/drawing/2014/main" id="{D43F1264-A6C1-DB15-618C-361C30637F88}"/>
+                <a16:creationId xmlns:a16="http://schemas.microsoft.com/office/drawing/2014/main" id="{CF2178AD-9D3D-9C8F-F8C2-0201C236E304}"/>
               </a:ext>
             </a:extLst>
           </p:cNvPr>
           <p:cNvPicPr>
-            <a:picLocks noGrp="1" noChangeAspect="1"/>
+            <a:picLocks noChangeAspect="1"/>
           </p:cNvPicPr>
-          <p:nvPr>
-            <p:ph idx="1"/>
-          </p:nvPr>
+          <p:nvPr/>
         </p:nvPicPr>
         <p:blipFill>
-          <a:blip r:embed="rId2">
-            <a:extLst>
-              <a:ext uri="{28A0092B-C50C-407E-A947-70E740481C1C}">
-                <a14:useLocalDpi xmlns:a14="http://schemas.microsoft.com/office/drawing/2010/main" val="0"/>
-              </a:ext>
-            </a:extLst>
-          </a:blip>
+          <a:blip r:embed="rId2"/>
           <a:stretch>
             <a:fillRect/>
           </a:stretch>
         </p:blipFill>
         <p:spPr>
           <a:xfrm>
-            <a:off x="677334" y="1703703"/>
-            <a:ext cx="10274918" cy="4892306"/>
-          </a:xfrm>
+            <a:off x="851995" y="1427689"/>
+            <a:ext cx="2152950" cy="2934109"/>
+          </a:xfrm>
+          <a:prstGeom prst="rect">
+            <a:avLst/>
+          </a:prstGeom>
+        </p:spPr>
+      </p:pic>
+      <p:pic>
+        <p:nvPicPr>
+          <p:cNvPr id="7" name="Picture 6">
+            <a:extLst>
+              <a:ext uri="{FF2B5EF4-FFF2-40B4-BE49-F238E27FC236}">
+                <a16:creationId xmlns:a16="http://schemas.microsoft.com/office/drawing/2014/main" id="{AD43D8F5-BD35-F7F6-23F9-B4B9253ED766}"/>
+              </a:ext>
+            </a:extLst>
+          </p:cNvPr>
+          <p:cNvPicPr>
+            <a:picLocks noChangeAspect="1"/>
+          </p:cNvPicPr>
+          <p:nvPr/>
+        </p:nvPicPr>
+        <p:blipFill>
+          <a:blip r:embed="rId3"/>
+          <a:stretch>
+            <a:fillRect/>
+          </a:stretch>
+        </p:blipFill>
+        <p:spPr>
+          <a:xfrm>
+            <a:off x="3993771" y="1369478"/>
+            <a:ext cx="1905266" cy="3082666"/>
+          </a:xfrm>
+          <a:prstGeom prst="rect">
+            <a:avLst/>
+          </a:prstGeom>
+        </p:spPr>
+      </p:pic>
+      <p:pic>
+        <p:nvPicPr>
+          <p:cNvPr id="9" name="Picture 8">
+            <a:extLst>
+              <a:ext uri="{FF2B5EF4-FFF2-40B4-BE49-F238E27FC236}">
+                <a16:creationId xmlns:a16="http://schemas.microsoft.com/office/drawing/2014/main" id="{9B32211E-B13F-2107-4309-0B35E2245F4A}"/>
+              </a:ext>
+            </a:extLst>
+          </p:cNvPr>
+          <p:cNvPicPr>
+            <a:picLocks noChangeAspect="1"/>
+          </p:cNvPicPr>
+          <p:nvPr/>
+        </p:nvPicPr>
+        <p:blipFill>
+          <a:blip r:embed="rId4"/>
+          <a:stretch>
+            <a:fillRect/>
+          </a:stretch>
+        </p:blipFill>
+        <p:spPr>
+          <a:xfrm>
+            <a:off x="7068620" y="1256462"/>
+            <a:ext cx="2280863" cy="1970683"/>
+          </a:xfrm>
+          <a:prstGeom prst="rect">
+            <a:avLst/>
+          </a:prstGeom>
+        </p:spPr>
+      </p:pic>
+      <p:pic>
+        <p:nvPicPr>
+          <p:cNvPr id="12" name="Picture 11">
+            <a:extLst>
+              <a:ext uri="{FF2B5EF4-FFF2-40B4-BE49-F238E27FC236}">
+                <a16:creationId xmlns:a16="http://schemas.microsoft.com/office/drawing/2014/main" id="{18F66C39-2485-F6CC-3F94-9BFEA46BCD60}"/>
+              </a:ext>
+            </a:extLst>
+          </p:cNvPr>
+          <p:cNvPicPr>
+            <a:picLocks noChangeAspect="1"/>
+          </p:cNvPicPr>
+          <p:nvPr/>
+        </p:nvPicPr>
+        <p:blipFill>
+          <a:blip r:embed="rId5"/>
+          <a:stretch>
+            <a:fillRect/>
+          </a:stretch>
+        </p:blipFill>
+        <p:spPr>
+          <a:xfrm>
+            <a:off x="7068619" y="3702775"/>
+            <a:ext cx="2280863" cy="992916"/>
+          </a:xfrm>
+          <a:prstGeom prst="rect">
+            <a:avLst/>
+          </a:prstGeom>
         </p:spPr>
       </p:pic>
     </p:spTree>
     <p:extLst>
       <p:ext uri="{BB962C8B-B14F-4D97-AF65-F5344CB8AC3E}">
-        <p14:creationId xmlns:p14="http://schemas.microsoft.com/office/powerpoint/2010/main" val="815895734"/>
+        <p14:creationId xmlns:p14="http://schemas.microsoft.com/office/powerpoint/2010/main" val="3594678503"/>
       </p:ext>
     </p:extLst>
   </p:cSld>
@@ -7290,6 +7411,281 @@
 </file>
 
 <file path=ppt/slides/slide15.xml><?xml version="1.0" encoding="utf-8"?>
+<p:sld xmlns:a="http://schemas.openxmlformats.org/drawingml/2006/main" xmlns:r="http://schemas.openxmlformats.org/officeDocument/2006/relationships" xmlns:p="http://schemas.openxmlformats.org/presentationml/2006/main">
+  <p:cSld>
+    <p:spTree>
+      <p:nvGrpSpPr>
+        <p:cNvPr id="1" name="">
+          <a:extLst>
+            <a:ext uri="{FF2B5EF4-FFF2-40B4-BE49-F238E27FC236}">
+              <a16:creationId xmlns:a16="http://schemas.microsoft.com/office/drawing/2014/main" id="{ED614F8F-80F1-5A59-6759-864060945EBE}"/>
+            </a:ext>
+          </a:extLst>
+        </p:cNvPr>
+        <p:cNvGrpSpPr/>
+        <p:nvPr/>
+      </p:nvGrpSpPr>
+      <p:grpSpPr>
+        <a:xfrm>
+          <a:off x="0" y="0"/>
+          <a:ext cx="0" cy="0"/>
+          <a:chOff x="0" y="0"/>
+          <a:chExt cx="0" cy="0"/>
+        </a:xfrm>
+      </p:grpSpPr>
+      <p:sp>
+        <p:nvSpPr>
+          <p:cNvPr id="2" name="Title 1">
+            <a:extLst>
+              <a:ext uri="{FF2B5EF4-FFF2-40B4-BE49-F238E27FC236}">
+                <a16:creationId xmlns:a16="http://schemas.microsoft.com/office/drawing/2014/main" id="{F554051B-A0F2-61AD-86A2-43597FE647DD}"/>
+              </a:ext>
+            </a:extLst>
+          </p:cNvPr>
+          <p:cNvSpPr>
+            <a:spLocks noGrp="1"/>
+          </p:cNvSpPr>
+          <p:nvPr>
+            <p:ph type="title"/>
+          </p:nvPr>
+        </p:nvSpPr>
+        <p:spPr>
+          <a:xfrm>
+            <a:off x="851995" y="301376"/>
+            <a:ext cx="8596668" cy="1320800"/>
+          </a:xfrm>
+        </p:spPr>
+        <p:txBody>
+          <a:bodyPr/>
+          <a:lstStyle/>
+          <a:p>
+            <a:pPr algn="ctr"/>
+            <a:r>
+              <a:rPr lang="en-US" b="1" dirty="0">
+                <a:solidFill>
+                  <a:schemeClr val="tx1"/>
+                </a:solidFill>
+                <a:latin typeface="Times New Roman" panose="02020603050405020304" pitchFamily="18" charset="0"/>
+                <a:cs typeface="Times New Roman" panose="02020603050405020304" pitchFamily="18" charset="0"/>
+              </a:rPr>
+              <a:t>                </a:t>
+            </a:r>
+            <a:endParaRPr lang="en-IN" b="1" dirty="0">
+              <a:solidFill>
+                <a:schemeClr val="tx1"/>
+              </a:solidFill>
+              <a:latin typeface="Times New Roman" panose="02020603050405020304" pitchFamily="18" charset="0"/>
+              <a:cs typeface="Times New Roman" panose="02020603050405020304" pitchFamily="18" charset="0"/>
+            </a:endParaRPr>
+          </a:p>
+        </p:txBody>
+      </p:sp>
+      <p:sp>
+        <p:nvSpPr>
+          <p:cNvPr id="4" name="TextBox 3">
+            <a:extLst>
+              <a:ext uri="{FF2B5EF4-FFF2-40B4-BE49-F238E27FC236}">
+                <a16:creationId xmlns:a16="http://schemas.microsoft.com/office/drawing/2014/main" id="{C62E45F4-5A9F-641A-3B96-73BF379E444B}"/>
+              </a:ext>
+            </a:extLst>
+          </p:cNvPr>
+          <p:cNvSpPr txBox="1"/>
+          <p:nvPr/>
+        </p:nvSpPr>
+        <p:spPr>
+          <a:xfrm>
+            <a:off x="3311634" y="573817"/>
+            <a:ext cx="7222733" cy="523220"/>
+          </a:xfrm>
+          <a:prstGeom prst="rect">
+            <a:avLst/>
+          </a:prstGeom>
+          <a:noFill/>
+        </p:spPr>
+        <p:txBody>
+          <a:bodyPr wrap="square" rtlCol="0">
+            <a:spAutoFit/>
+          </a:bodyPr>
+          <a:lstStyle/>
+          <a:p>
+            <a:r>
+              <a:rPr lang="en-US" sz="2800" b="1" dirty="0">
+                <a:latin typeface="Times New Roman" panose="02020603050405020304" pitchFamily="18" charset="0"/>
+                <a:cs typeface="Times New Roman" panose="02020603050405020304" pitchFamily="18" charset="0"/>
+              </a:rPr>
+              <a:t>FACT AND DIMENSIONS TABLES</a:t>
+            </a:r>
+            <a:endParaRPr lang="en-IN" sz="2800" b="1" dirty="0">
+              <a:latin typeface="Times New Roman" panose="02020603050405020304" pitchFamily="18" charset="0"/>
+              <a:cs typeface="Times New Roman" panose="02020603050405020304" pitchFamily="18" charset="0"/>
+            </a:endParaRPr>
+          </a:p>
+        </p:txBody>
+      </p:sp>
+      <p:pic>
+        <p:nvPicPr>
+          <p:cNvPr id="6" name="Picture 5">
+            <a:extLst>
+              <a:ext uri="{FF2B5EF4-FFF2-40B4-BE49-F238E27FC236}">
+                <a16:creationId xmlns:a16="http://schemas.microsoft.com/office/drawing/2014/main" id="{A8294E1E-1A05-4DF6-6E3D-63296DFD3598}"/>
+              </a:ext>
+            </a:extLst>
+          </p:cNvPr>
+          <p:cNvPicPr>
+            <a:picLocks noChangeAspect="1"/>
+          </p:cNvPicPr>
+          <p:nvPr/>
+        </p:nvPicPr>
+        <p:blipFill>
+          <a:blip r:embed="rId2"/>
+          <a:stretch>
+            <a:fillRect/>
+          </a:stretch>
+        </p:blipFill>
+        <p:spPr>
+          <a:xfrm>
+            <a:off x="5815256" y="1628742"/>
+            <a:ext cx="2424701" cy="2529415"/>
+          </a:xfrm>
+          <a:prstGeom prst="rect">
+            <a:avLst/>
+          </a:prstGeom>
+        </p:spPr>
+      </p:pic>
+      <p:pic>
+        <p:nvPicPr>
+          <p:cNvPr id="10" name="Picture 9">
+            <a:extLst>
+              <a:ext uri="{FF2B5EF4-FFF2-40B4-BE49-F238E27FC236}">
+                <a16:creationId xmlns:a16="http://schemas.microsoft.com/office/drawing/2014/main" id="{ACFEA294-76A9-2E7B-6DAD-E2C8A1926760}"/>
+              </a:ext>
+            </a:extLst>
+          </p:cNvPr>
+          <p:cNvPicPr>
+            <a:picLocks noChangeAspect="1"/>
+          </p:cNvPicPr>
+          <p:nvPr/>
+        </p:nvPicPr>
+        <p:blipFill>
+          <a:blip r:embed="rId3"/>
+          <a:stretch>
+            <a:fillRect/>
+          </a:stretch>
+        </p:blipFill>
+        <p:spPr>
+          <a:xfrm>
+            <a:off x="2958956" y="1628743"/>
+            <a:ext cx="2424701" cy="2488067"/>
+          </a:xfrm>
+          <a:prstGeom prst="rect">
+            <a:avLst/>
+          </a:prstGeom>
+        </p:spPr>
+      </p:pic>
+      <p:pic>
+        <p:nvPicPr>
+          <p:cNvPr id="13" name="Picture 12">
+            <a:extLst>
+              <a:ext uri="{FF2B5EF4-FFF2-40B4-BE49-F238E27FC236}">
+                <a16:creationId xmlns:a16="http://schemas.microsoft.com/office/drawing/2014/main" id="{6F181167-CDEB-81CB-7571-2981020DE836}"/>
+              </a:ext>
+            </a:extLst>
+          </p:cNvPr>
+          <p:cNvPicPr>
+            <a:picLocks noChangeAspect="1"/>
+          </p:cNvPicPr>
+          <p:nvPr/>
+        </p:nvPicPr>
+        <p:blipFill>
+          <a:blip r:embed="rId4"/>
+          <a:stretch>
+            <a:fillRect/>
+          </a:stretch>
+        </p:blipFill>
+        <p:spPr>
+          <a:xfrm>
+            <a:off x="8558373" y="1797978"/>
+            <a:ext cx="1975994" cy="2318831"/>
+          </a:xfrm>
+          <a:prstGeom prst="rect">
+            <a:avLst/>
+          </a:prstGeom>
+        </p:spPr>
+      </p:pic>
+      <p:pic>
+        <p:nvPicPr>
+          <p:cNvPr id="15" name="Picture 14">
+            <a:extLst>
+              <a:ext uri="{FF2B5EF4-FFF2-40B4-BE49-F238E27FC236}">
+                <a16:creationId xmlns:a16="http://schemas.microsoft.com/office/drawing/2014/main" id="{94C523AB-E2D0-8D7E-1006-2FEE27AB3C41}"/>
+              </a:ext>
+            </a:extLst>
+          </p:cNvPr>
+          <p:cNvPicPr>
+            <a:picLocks noChangeAspect="1"/>
+          </p:cNvPicPr>
+          <p:nvPr/>
+        </p:nvPicPr>
+        <p:blipFill>
+          <a:blip r:embed="rId5"/>
+          <a:stretch>
+            <a:fillRect/>
+          </a:stretch>
+        </p:blipFill>
+        <p:spPr>
+          <a:xfrm>
+            <a:off x="431515" y="1622176"/>
+            <a:ext cx="2095842" cy="2494633"/>
+          </a:xfrm>
+          <a:prstGeom prst="rect">
+            <a:avLst/>
+          </a:prstGeom>
+        </p:spPr>
+      </p:pic>
+      <p:pic>
+        <p:nvPicPr>
+          <p:cNvPr id="17" name="Picture 16">
+            <a:extLst>
+              <a:ext uri="{FF2B5EF4-FFF2-40B4-BE49-F238E27FC236}">
+                <a16:creationId xmlns:a16="http://schemas.microsoft.com/office/drawing/2014/main" id="{CEDC3B4F-98D0-DAA4-CD0E-C5674D1907F4}"/>
+              </a:ext>
+            </a:extLst>
+          </p:cNvPr>
+          <p:cNvPicPr>
+            <a:picLocks noChangeAspect="1"/>
+          </p:cNvPicPr>
+          <p:nvPr/>
+        </p:nvPicPr>
+        <p:blipFill>
+          <a:blip r:embed="rId6"/>
+          <a:stretch>
+            <a:fillRect/>
+          </a:stretch>
+        </p:blipFill>
+        <p:spPr>
+          <a:xfrm>
+            <a:off x="3131373" y="4823146"/>
+            <a:ext cx="2683883" cy="1057149"/>
+          </a:xfrm>
+          <a:prstGeom prst="rect">
+            <a:avLst/>
+          </a:prstGeom>
+        </p:spPr>
+      </p:pic>
+    </p:spTree>
+    <p:extLst>
+      <p:ext uri="{BB962C8B-B14F-4D97-AF65-F5344CB8AC3E}">
+        <p14:creationId xmlns:p14="http://schemas.microsoft.com/office/powerpoint/2010/main" val="2112066080"/>
+      </p:ext>
+    </p:extLst>
+  </p:cSld>
+  <p:clrMapOvr>
+    <a:masterClrMapping/>
+  </p:clrMapOvr>
+</p:sld>
+</file>
+
+<file path=ppt/slides/slide16.xml><?xml version="1.0" encoding="utf-8"?>
 <p:sld xmlns:a="http://schemas.openxmlformats.org/drawingml/2006/main" xmlns:r="http://schemas.openxmlformats.org/officeDocument/2006/relationships" xmlns:p="http://schemas.openxmlformats.org/presentationml/2006/main">
   <p:cSld>
     <p:spTree>
@@ -7311,7 +7707,7 @@
           <p:cNvPr id="2" name="Title 1">
             <a:extLst>
               <a:ext uri="{FF2B5EF4-FFF2-40B4-BE49-F238E27FC236}">
-                <a16:creationId xmlns:a16="http://schemas.microsoft.com/office/drawing/2014/main" id="{A31C3E90-41B9-0FD2-63B3-D34B0F9CCE51}"/>
+                <a16:creationId xmlns:a16="http://schemas.microsoft.com/office/drawing/2014/main" id="{81D0188B-2233-E74A-4751-1978C8796FC9}"/>
               </a:ext>
             </a:extLst>
           </p:cNvPr>
@@ -7324,15 +7720,14 @@
         </p:nvSpPr>
         <p:spPr>
           <a:xfrm>
-            <a:off x="646512" y="709078"/>
-            <a:ext cx="8596668" cy="1320800"/>
+            <a:off x="939325" y="547955"/>
+            <a:ext cx="9750936" cy="1320800"/>
           </a:xfrm>
         </p:spPr>
         <p:txBody>
           <a:bodyPr/>
           <a:lstStyle/>
           <a:p>
-            <a:pPr algn="ctr"/>
             <a:r>
               <a:rPr lang="en-US" b="1" dirty="0">
                 <a:solidFill>
@@ -7341,7 +7736,7 @@
                 <a:latin typeface="Times New Roman" panose="02020603050405020304" pitchFamily="18" charset="0"/>
                 <a:cs typeface="Times New Roman" panose="02020603050405020304" pitchFamily="18" charset="0"/>
               </a:rPr>
-              <a:t>                Key Performance Indicators</a:t>
+              <a:t>                           Data Modelling</a:t>
             </a:r>
             <a:endParaRPr lang="en-IN" b="1" dirty="0">
               <a:solidFill>
@@ -7353,151 +7748,45 @@
           </a:p>
         </p:txBody>
       </p:sp>
-      <p:sp>
-        <p:nvSpPr>
-          <p:cNvPr id="3" name="Content Placeholder 2">
+      <p:pic>
+        <p:nvPicPr>
+          <p:cNvPr id="7" name="Content Placeholder 6">
             <a:extLst>
               <a:ext uri="{FF2B5EF4-FFF2-40B4-BE49-F238E27FC236}">
-                <a16:creationId xmlns:a16="http://schemas.microsoft.com/office/drawing/2014/main" id="{C7372B3C-1407-FB62-0BC0-C2F0B0D6BF5E}"/>
+                <a16:creationId xmlns:a16="http://schemas.microsoft.com/office/drawing/2014/main" id="{D43F1264-A6C1-DB15-618C-361C30637F88}"/>
               </a:ext>
             </a:extLst>
           </p:cNvPr>
-          <p:cNvSpPr>
-            <a:spLocks noGrp="1"/>
-          </p:cNvSpPr>
+          <p:cNvPicPr>
+            <a:picLocks noGrp="1" noChangeAspect="1"/>
+          </p:cNvPicPr>
           <p:nvPr>
             <p:ph idx="1"/>
           </p:nvPr>
-        </p:nvSpPr>
-        <p:spPr>
-          <a:xfrm>
-            <a:off x="1089061" y="1369478"/>
-            <a:ext cx="10531011" cy="4743646"/>
-          </a:xfrm>
-        </p:spPr>
-        <p:txBody>
-          <a:bodyPr>
-            <a:normAutofit/>
-          </a:bodyPr>
-          <a:lstStyle/>
-          <a:p>
-            <a:pPr marL="0" indent="0">
-              <a:buNone/>
-            </a:pPr>
-            <a:endParaRPr lang="en-US" sz="3000" b="1" dirty="0">
-              <a:latin typeface="Times New Roman" panose="02020603050405020304" pitchFamily="18" charset="0"/>
-              <a:cs typeface="Times New Roman" panose="02020603050405020304" pitchFamily="18" charset="0"/>
-            </a:endParaRPr>
-          </a:p>
-          <a:p>
-            <a:pPr>
-              <a:buClr>
-                <a:schemeClr val="tx1">
-                  <a:lumMod val="95000"/>
-                  <a:lumOff val="5000"/>
-                </a:schemeClr>
-              </a:buClr>
-              <a:buFont typeface="Wingdings" panose="05000000000000000000" pitchFamily="2" charset="2"/>
-              <a:buChar char="Ø"/>
-            </a:pPr>
-            <a:r>
-              <a:rPr lang="en-IN" sz="2800" b="1" dirty="0">
-                <a:latin typeface="Times New Roman" panose="02020603050405020304" pitchFamily="18" charset="0"/>
-                <a:cs typeface="Times New Roman" panose="02020603050405020304" pitchFamily="18" charset="0"/>
-              </a:rPr>
-              <a:t>Total Revenue</a:t>
-            </a:r>
-          </a:p>
-          <a:p>
-            <a:pPr>
-              <a:buClr>
-                <a:schemeClr val="tx1">
-                  <a:lumMod val="95000"/>
-                  <a:lumOff val="5000"/>
-                </a:schemeClr>
-              </a:buClr>
-              <a:buFont typeface="Wingdings" panose="05000000000000000000" pitchFamily="2" charset="2"/>
-              <a:buChar char="Ø"/>
-            </a:pPr>
-            <a:r>
-              <a:rPr lang="en-IN" sz="2800" b="1" dirty="0">
-                <a:latin typeface="Times New Roman" panose="02020603050405020304" pitchFamily="18" charset="0"/>
-                <a:cs typeface="Times New Roman" panose="02020603050405020304" pitchFamily="18" charset="0"/>
-              </a:rPr>
-              <a:t>Branch-wise revenue share</a:t>
-            </a:r>
-          </a:p>
-          <a:p>
-            <a:pPr>
-              <a:buClr>
-                <a:schemeClr val="tx1">
-                  <a:lumMod val="95000"/>
-                  <a:lumOff val="5000"/>
-                </a:schemeClr>
-              </a:buClr>
-              <a:buFont typeface="Wingdings" panose="05000000000000000000" pitchFamily="2" charset="2"/>
-              <a:buChar char="Ø"/>
-            </a:pPr>
-            <a:r>
-              <a:rPr lang="en-IN" sz="2800" b="1" dirty="0">
-                <a:latin typeface="Times New Roman" panose="02020603050405020304" pitchFamily="18" charset="0"/>
-                <a:cs typeface="Times New Roman" panose="02020603050405020304" pitchFamily="18" charset="0"/>
-              </a:rPr>
-              <a:t>Employee Sales per Head</a:t>
-            </a:r>
-          </a:p>
-          <a:p>
-            <a:pPr>
-              <a:buClrTx/>
-              <a:buFont typeface="Wingdings" panose="05000000000000000000" pitchFamily="2" charset="2"/>
-              <a:buChar char="Ø"/>
-            </a:pPr>
-            <a:r>
-              <a:rPr lang="en-IN" sz="2800" b="1" dirty="0">
-                <a:latin typeface="Times New Roman" panose="02020603050405020304" pitchFamily="18" charset="0"/>
-                <a:cs typeface="Times New Roman" panose="02020603050405020304" pitchFamily="18" charset="0"/>
-              </a:rPr>
-              <a:t>Stockouts</a:t>
-            </a:r>
-          </a:p>
-          <a:p>
-            <a:pPr>
-              <a:buClrTx/>
-              <a:buFont typeface="Wingdings" panose="05000000000000000000" pitchFamily="2" charset="2"/>
-              <a:buChar char="Ø"/>
-            </a:pPr>
-            <a:r>
-              <a:rPr lang="en-IN" sz="2800" b="1" dirty="0">
-                <a:latin typeface="Times New Roman" panose="02020603050405020304" pitchFamily="18" charset="0"/>
-                <a:cs typeface="Times New Roman" panose="02020603050405020304" pitchFamily="18" charset="0"/>
-              </a:rPr>
-              <a:t>Discount Leakage</a:t>
-            </a:r>
-          </a:p>
-          <a:p>
-            <a:pPr>
-              <a:buClrTx/>
-              <a:buFont typeface="Wingdings" panose="05000000000000000000" pitchFamily="2" charset="2"/>
-              <a:buChar char="Ø"/>
-            </a:pPr>
-            <a:r>
-              <a:rPr lang="en-IN" sz="2800" b="1" dirty="0">
-                <a:latin typeface="Times New Roman" panose="02020603050405020304" pitchFamily="18" charset="0"/>
-                <a:cs typeface="Times New Roman" panose="02020603050405020304" pitchFamily="18" charset="0"/>
-              </a:rPr>
-              <a:t>Customer Churn</a:t>
-            </a:r>
-            <a:endParaRPr lang="en-IN" sz="2800" dirty="0">
-              <a:latin typeface="Times New Roman" panose="02020603050405020304" pitchFamily="18" charset="0"/>
-              <a:cs typeface="Times New Roman" panose="02020603050405020304" pitchFamily="18" charset="0"/>
-            </a:endParaRPr>
-          </a:p>
-        </p:txBody>
-      </p:sp>
+        </p:nvPicPr>
+        <p:blipFill>
+          <a:blip r:embed="rId2">
+            <a:extLst>
+              <a:ext uri="{28A0092B-C50C-407E-A947-70E740481C1C}">
+                <a14:useLocalDpi xmlns:a14="http://schemas.microsoft.com/office/drawing/2010/main" val="0"/>
+              </a:ext>
+            </a:extLst>
+          </a:blip>
+          <a:stretch>
+            <a:fillRect/>
+          </a:stretch>
+        </p:blipFill>
+        <p:spPr>
+          <a:xfrm>
+            <a:off x="113017" y="1376736"/>
+            <a:ext cx="12000214" cy="5383659"/>
+          </a:xfrm>
+        </p:spPr>
+      </p:pic>
     </p:spTree>
     <p:extLst>
       <p:ext uri="{BB962C8B-B14F-4D97-AF65-F5344CB8AC3E}">
-        <p14:creationId xmlns:p14="http://schemas.microsoft.com/office/powerpoint/2010/main" val="2413077751"/>
+        <p14:creationId xmlns:p14="http://schemas.microsoft.com/office/powerpoint/2010/main" val="815895734"/>
       </p:ext>
     </p:extLst>
   </p:cSld>
@@ -7507,7 +7796,1515 @@
 </p:sld>
 </file>
 
-<file path=ppt/slides/slide16.xml><?xml version="1.0" encoding="utf-8"?>
+<file path=ppt/slides/slide17.xml><?xml version="1.0" encoding="utf-8"?>
+<p:sld xmlns:a="http://schemas.openxmlformats.org/drawingml/2006/main" xmlns:r="http://schemas.openxmlformats.org/officeDocument/2006/relationships" xmlns:p="http://schemas.openxmlformats.org/presentationml/2006/main">
+  <p:cSld>
+    <p:spTree>
+      <p:nvGrpSpPr>
+        <p:cNvPr id="1" name=""/>
+        <p:cNvGrpSpPr/>
+        <p:nvPr/>
+      </p:nvGrpSpPr>
+      <p:grpSpPr>
+        <a:xfrm>
+          <a:off x="0" y="0"/>
+          <a:ext cx="0" cy="0"/>
+          <a:chOff x="0" y="0"/>
+          <a:chExt cx="0" cy="0"/>
+        </a:xfrm>
+      </p:grpSpPr>
+      <p:sp>
+        <p:nvSpPr>
+          <p:cNvPr id="2" name="Title 1">
+            <a:extLst>
+              <a:ext uri="{FF2B5EF4-FFF2-40B4-BE49-F238E27FC236}">
+                <a16:creationId xmlns:a16="http://schemas.microsoft.com/office/drawing/2014/main" id="{6FB7C9A9-EB47-C757-E3A4-9F8ED1CD3B21}"/>
+              </a:ext>
+            </a:extLst>
+          </p:cNvPr>
+          <p:cNvSpPr>
+            <a:spLocks noGrp="1"/>
+          </p:cNvSpPr>
+          <p:nvPr>
+            <p:ph type="title"/>
+          </p:nvPr>
+        </p:nvSpPr>
+        <p:spPr>
+          <a:xfrm>
+            <a:off x="1211590" y="116440"/>
+            <a:ext cx="8596668" cy="592476"/>
+          </a:xfrm>
+        </p:spPr>
+        <p:txBody>
+          <a:bodyPr>
+            <a:normAutofit fontScale="90000"/>
+          </a:bodyPr>
+          <a:lstStyle/>
+          <a:p>
+            <a:r>
+              <a:rPr lang="en-US" b="1" dirty="0">
+                <a:solidFill>
+                  <a:schemeClr val="tx1"/>
+                </a:solidFill>
+                <a:latin typeface="Times New Roman" panose="02020603050405020304" pitchFamily="18" charset="0"/>
+                <a:cs typeface="Times New Roman" panose="02020603050405020304" pitchFamily="18" charset="0"/>
+              </a:rPr>
+              <a:t>                         Data Modeling</a:t>
+            </a:r>
+            <a:endParaRPr lang="en-IN" b="1" dirty="0">
+              <a:solidFill>
+                <a:schemeClr val="tx1"/>
+              </a:solidFill>
+              <a:latin typeface="Times New Roman" panose="02020603050405020304" pitchFamily="18" charset="0"/>
+              <a:cs typeface="Times New Roman" panose="02020603050405020304" pitchFamily="18" charset="0"/>
+            </a:endParaRPr>
+          </a:p>
+        </p:txBody>
+      </p:sp>
+      <p:pic>
+        <p:nvPicPr>
+          <p:cNvPr id="5" name="Content Placeholder 4">
+            <a:extLst>
+              <a:ext uri="{FF2B5EF4-FFF2-40B4-BE49-F238E27FC236}">
+                <a16:creationId xmlns:a16="http://schemas.microsoft.com/office/drawing/2014/main" id="{B80E3B98-479B-9D35-B5C3-5C4687CA9C1C}"/>
+              </a:ext>
+            </a:extLst>
+          </p:cNvPr>
+          <p:cNvPicPr>
+            <a:picLocks noGrp="1" noChangeAspect="1"/>
+          </p:cNvPicPr>
+          <p:nvPr>
+            <p:ph idx="1"/>
+          </p:nvPr>
+        </p:nvPicPr>
+        <p:blipFill>
+          <a:blip r:embed="rId2">
+            <a:extLst>
+              <a:ext uri="{28A0092B-C50C-407E-A947-70E740481C1C}">
+                <a14:useLocalDpi xmlns:a14="http://schemas.microsoft.com/office/drawing/2010/main" val="0"/>
+              </a:ext>
+            </a:extLst>
+          </a:blip>
+          <a:stretch>
+            <a:fillRect/>
+          </a:stretch>
+        </p:blipFill>
+        <p:spPr>
+          <a:xfrm>
+            <a:off x="54795" y="1039403"/>
+            <a:ext cx="12082409" cy="5818597"/>
+          </a:xfrm>
+        </p:spPr>
+      </p:pic>
+    </p:spTree>
+    <p:extLst>
+      <p:ext uri="{BB962C8B-B14F-4D97-AF65-F5344CB8AC3E}">
+        <p14:creationId xmlns:p14="http://schemas.microsoft.com/office/powerpoint/2010/main" val="1412970422"/>
+      </p:ext>
+    </p:extLst>
+  </p:cSld>
+  <p:clrMapOvr>
+    <a:masterClrMapping/>
+  </p:clrMapOvr>
+</p:sld>
+</file>
+
+<file path=ppt/slides/slide18.xml><?xml version="1.0" encoding="utf-8"?>
+<p:sld xmlns:a="http://schemas.openxmlformats.org/drawingml/2006/main" xmlns:r="http://schemas.openxmlformats.org/officeDocument/2006/relationships" xmlns:p="http://schemas.openxmlformats.org/presentationml/2006/main">
+  <p:cSld>
+    <p:spTree>
+      <p:nvGrpSpPr>
+        <p:cNvPr id="1" name=""/>
+        <p:cNvGrpSpPr/>
+        <p:nvPr/>
+      </p:nvGrpSpPr>
+      <p:grpSpPr>
+        <a:xfrm>
+          <a:off x="0" y="0"/>
+          <a:ext cx="0" cy="0"/>
+          <a:chOff x="0" y="0"/>
+          <a:chExt cx="0" cy="0"/>
+        </a:xfrm>
+      </p:grpSpPr>
+      <p:sp>
+        <p:nvSpPr>
+          <p:cNvPr id="2" name="Title 1">
+            <a:extLst>
+              <a:ext uri="{FF2B5EF4-FFF2-40B4-BE49-F238E27FC236}">
+                <a16:creationId xmlns:a16="http://schemas.microsoft.com/office/drawing/2014/main" id="{146BDC59-46B8-4D56-FFAA-6DD42CEE82E4}"/>
+              </a:ext>
+            </a:extLst>
+          </p:cNvPr>
+          <p:cNvSpPr>
+            <a:spLocks noGrp="1"/>
+          </p:cNvSpPr>
+          <p:nvPr>
+            <p:ph type="title"/>
+          </p:nvPr>
+        </p:nvSpPr>
+        <p:spPr/>
+        <p:txBody>
+          <a:bodyPr/>
+          <a:lstStyle/>
+          <a:p>
+            <a:r>
+              <a:rPr lang="en-US" b="1" dirty="0">
+                <a:solidFill>
+                  <a:schemeClr val="tx1"/>
+                </a:solidFill>
+                <a:latin typeface="Times New Roman" panose="02020603050405020304" pitchFamily="18" charset="0"/>
+                <a:cs typeface="Times New Roman" panose="02020603050405020304" pitchFamily="18" charset="0"/>
+              </a:rPr>
+              <a:t>                Key Performance Indicators</a:t>
+            </a:r>
+            <a:endParaRPr lang="en-IN" dirty="0"/>
+          </a:p>
+        </p:txBody>
+      </p:sp>
+      <p:sp>
+        <p:nvSpPr>
+          <p:cNvPr id="3" name="Content Placeholder 2">
+            <a:extLst>
+              <a:ext uri="{FF2B5EF4-FFF2-40B4-BE49-F238E27FC236}">
+                <a16:creationId xmlns:a16="http://schemas.microsoft.com/office/drawing/2014/main" id="{6FABE576-90B0-81ED-C1B9-134E25DBD755}"/>
+              </a:ext>
+            </a:extLst>
+          </p:cNvPr>
+          <p:cNvSpPr>
+            <a:spLocks noGrp="1"/>
+          </p:cNvSpPr>
+          <p:nvPr>
+            <p:ph idx="1"/>
+          </p:nvPr>
+        </p:nvSpPr>
+        <p:spPr>
+          <a:xfrm>
+            <a:off x="1168401" y="1617134"/>
+            <a:ext cx="8906932" cy="4419600"/>
+          </a:xfrm>
+        </p:spPr>
+        <p:txBody>
+          <a:bodyPr>
+            <a:normAutofit fontScale="92500" lnSpcReduction="10000"/>
+          </a:bodyPr>
+          <a:lstStyle/>
+          <a:p>
+            <a:pPr marL="0" indent="0">
+              <a:buNone/>
+            </a:pPr>
+            <a:r>
+              <a:rPr lang="en-US" sz="2400" b="1" dirty="0">
+                <a:latin typeface="Times New Roman" panose="02020603050405020304" pitchFamily="18" charset="0"/>
+                <a:cs typeface="Times New Roman" panose="02020603050405020304" pitchFamily="18" charset="0"/>
+              </a:rPr>
+              <a:t>1. Total Revenue</a:t>
+            </a:r>
+          </a:p>
+          <a:p>
+            <a:pPr marL="0" indent="0">
+              <a:buNone/>
+            </a:pPr>
+            <a:r>
+              <a:rPr lang="en-US" sz="2400" b="1" dirty="0">
+                <a:latin typeface="Times New Roman" panose="02020603050405020304" pitchFamily="18" charset="0"/>
+                <a:cs typeface="Times New Roman" panose="02020603050405020304" pitchFamily="18" charset="0"/>
+              </a:rPr>
+              <a:t>Formula:</a:t>
+            </a:r>
+            <a:r>
+              <a:rPr lang="en-US" sz="2400" dirty="0">
+                <a:latin typeface="Times New Roman" panose="02020603050405020304" pitchFamily="18" charset="0"/>
+                <a:cs typeface="Times New Roman" panose="02020603050405020304" pitchFamily="18" charset="0"/>
+              </a:rPr>
+              <a:t> SUM(Sales Amount)</a:t>
+            </a:r>
+            <a:br>
+              <a:rPr lang="en-US" sz="2400" dirty="0">
+                <a:latin typeface="Times New Roman" panose="02020603050405020304" pitchFamily="18" charset="0"/>
+                <a:cs typeface="Times New Roman" panose="02020603050405020304" pitchFamily="18" charset="0"/>
+              </a:rPr>
+            </a:br>
+            <a:r>
+              <a:rPr lang="en-US" sz="2400" b="1" dirty="0">
+                <a:latin typeface="Times New Roman" panose="02020603050405020304" pitchFamily="18" charset="0"/>
+                <a:cs typeface="Times New Roman" panose="02020603050405020304" pitchFamily="18" charset="0"/>
+              </a:rPr>
+              <a:t>About:</a:t>
+            </a:r>
+            <a:r>
+              <a:rPr lang="en-US" sz="2400" dirty="0">
+                <a:latin typeface="Times New Roman" panose="02020603050405020304" pitchFamily="18" charset="0"/>
+                <a:cs typeface="Times New Roman" panose="02020603050405020304" pitchFamily="18" charset="0"/>
+              </a:rPr>
+              <a:t> Total income generated from all sales.</a:t>
+            </a:r>
+          </a:p>
+          <a:p>
+            <a:pPr marL="0" indent="0">
+              <a:buNone/>
+            </a:pPr>
+            <a:endParaRPr lang="en-US" sz="2400" dirty="0">
+              <a:latin typeface="Times New Roman" panose="02020603050405020304" pitchFamily="18" charset="0"/>
+              <a:cs typeface="Times New Roman" panose="02020603050405020304" pitchFamily="18" charset="0"/>
+            </a:endParaRPr>
+          </a:p>
+          <a:p>
+            <a:pPr marL="0" indent="0">
+              <a:buNone/>
+            </a:pPr>
+            <a:r>
+              <a:rPr lang="en-US" sz="2400" b="1" dirty="0">
+                <a:latin typeface="Times New Roman" panose="02020603050405020304" pitchFamily="18" charset="0"/>
+                <a:cs typeface="Times New Roman" panose="02020603050405020304" pitchFamily="18" charset="0"/>
+              </a:rPr>
+              <a:t>2.Net Profit Margin</a:t>
+            </a:r>
+          </a:p>
+          <a:p>
+            <a:pPr marL="0" indent="0">
+              <a:buNone/>
+            </a:pPr>
+            <a:r>
+              <a:rPr lang="en-US" sz="2400" b="1" dirty="0">
+                <a:latin typeface="Times New Roman" panose="02020603050405020304" pitchFamily="18" charset="0"/>
+                <a:cs typeface="Times New Roman" panose="02020603050405020304" pitchFamily="18" charset="0"/>
+              </a:rPr>
+              <a:t>Formula:</a:t>
+            </a:r>
+            <a:r>
+              <a:rPr lang="en-US" sz="2400" dirty="0">
+                <a:latin typeface="Times New Roman" panose="02020603050405020304" pitchFamily="18" charset="0"/>
+                <a:cs typeface="Times New Roman" panose="02020603050405020304" pitchFamily="18" charset="0"/>
+              </a:rPr>
+              <a:t> (Net Profit / Total Revenue) × 100</a:t>
+            </a:r>
+            <a:br>
+              <a:rPr lang="en-US" sz="2400" dirty="0">
+                <a:latin typeface="Times New Roman" panose="02020603050405020304" pitchFamily="18" charset="0"/>
+                <a:cs typeface="Times New Roman" panose="02020603050405020304" pitchFamily="18" charset="0"/>
+              </a:rPr>
+            </a:br>
+            <a:r>
+              <a:rPr lang="en-US" sz="2400" b="1" dirty="0">
+                <a:latin typeface="Times New Roman" panose="02020603050405020304" pitchFamily="18" charset="0"/>
+                <a:cs typeface="Times New Roman" panose="02020603050405020304" pitchFamily="18" charset="0"/>
+              </a:rPr>
+              <a:t>About:</a:t>
+            </a:r>
+            <a:r>
+              <a:rPr lang="en-US" sz="2400" dirty="0">
+                <a:latin typeface="Times New Roman" panose="02020603050405020304" pitchFamily="18" charset="0"/>
+                <a:cs typeface="Times New Roman" panose="02020603050405020304" pitchFamily="18" charset="0"/>
+              </a:rPr>
+              <a:t> Measures overall profitability percentage.</a:t>
+            </a:r>
+          </a:p>
+          <a:p>
+            <a:pPr marL="0" indent="0">
+              <a:buNone/>
+            </a:pPr>
+            <a:endParaRPr lang="en-US" sz="2400" dirty="0">
+              <a:latin typeface="Times New Roman" panose="02020603050405020304" pitchFamily="18" charset="0"/>
+              <a:cs typeface="Times New Roman" panose="02020603050405020304" pitchFamily="18" charset="0"/>
+            </a:endParaRPr>
+          </a:p>
+          <a:p>
+            <a:pPr marL="0" indent="0">
+              <a:buNone/>
+            </a:pPr>
+            <a:r>
+              <a:rPr lang="en-US" sz="2400" b="1" dirty="0">
+                <a:latin typeface="Times New Roman" panose="02020603050405020304" pitchFamily="18" charset="0"/>
+                <a:cs typeface="Times New Roman" panose="02020603050405020304" pitchFamily="18" charset="0"/>
+              </a:rPr>
+              <a:t>3.Gross Margin</a:t>
+            </a:r>
+          </a:p>
+          <a:p>
+            <a:pPr marL="0" indent="0">
+              <a:buNone/>
+            </a:pPr>
+            <a:r>
+              <a:rPr lang="en-US" sz="2400" b="1" dirty="0">
+                <a:latin typeface="Times New Roman" panose="02020603050405020304" pitchFamily="18" charset="0"/>
+                <a:cs typeface="Times New Roman" panose="02020603050405020304" pitchFamily="18" charset="0"/>
+              </a:rPr>
+              <a:t>Formula:</a:t>
+            </a:r>
+            <a:r>
+              <a:rPr lang="en-US" sz="2400" dirty="0">
+                <a:latin typeface="Times New Roman" panose="02020603050405020304" pitchFamily="18" charset="0"/>
+                <a:cs typeface="Times New Roman" panose="02020603050405020304" pitchFamily="18" charset="0"/>
+              </a:rPr>
+              <a:t> (Revenue – Cost of Goods Sold) / Revenue × 100</a:t>
+            </a:r>
+            <a:br>
+              <a:rPr lang="en-US" sz="2400" dirty="0">
+                <a:latin typeface="Times New Roman" panose="02020603050405020304" pitchFamily="18" charset="0"/>
+                <a:cs typeface="Times New Roman" panose="02020603050405020304" pitchFamily="18" charset="0"/>
+              </a:rPr>
+            </a:br>
+            <a:r>
+              <a:rPr lang="en-US" sz="2400" b="1" dirty="0">
+                <a:latin typeface="Times New Roman" panose="02020603050405020304" pitchFamily="18" charset="0"/>
+                <a:cs typeface="Times New Roman" panose="02020603050405020304" pitchFamily="18" charset="0"/>
+              </a:rPr>
+              <a:t>About:</a:t>
+            </a:r>
+            <a:r>
+              <a:rPr lang="en-US" sz="2400" dirty="0">
+                <a:latin typeface="Times New Roman" panose="02020603050405020304" pitchFamily="18" charset="0"/>
+                <a:cs typeface="Times New Roman" panose="02020603050405020304" pitchFamily="18" charset="0"/>
+              </a:rPr>
+              <a:t> Shows profit before operational expenses.</a:t>
+            </a:r>
+          </a:p>
+          <a:p>
+            <a:pPr marL="0" indent="0">
+              <a:buNone/>
+            </a:pPr>
+            <a:endParaRPr lang="en-US" dirty="0">
+              <a:latin typeface="Times New Roman" panose="02020603050405020304" pitchFamily="18" charset="0"/>
+              <a:cs typeface="Times New Roman" panose="02020603050405020304" pitchFamily="18" charset="0"/>
+            </a:endParaRPr>
+          </a:p>
+          <a:p>
+            <a:pPr marL="0" indent="0">
+              <a:buNone/>
+            </a:pPr>
+            <a:endParaRPr lang="en-IN" dirty="0"/>
+          </a:p>
+        </p:txBody>
+      </p:sp>
+    </p:spTree>
+    <p:extLst>
+      <p:ext uri="{BB962C8B-B14F-4D97-AF65-F5344CB8AC3E}">
+        <p14:creationId xmlns:p14="http://schemas.microsoft.com/office/powerpoint/2010/main" val="2377197372"/>
+      </p:ext>
+    </p:extLst>
+  </p:cSld>
+  <p:clrMapOvr>
+    <a:masterClrMapping/>
+  </p:clrMapOvr>
+</p:sld>
+</file>
+
+<file path=ppt/slides/slide19.xml><?xml version="1.0" encoding="utf-8"?>
+<p:sld xmlns:a="http://schemas.openxmlformats.org/drawingml/2006/main" xmlns:r="http://schemas.openxmlformats.org/officeDocument/2006/relationships" xmlns:p="http://schemas.openxmlformats.org/presentationml/2006/main">
+  <p:cSld>
+    <p:spTree>
+      <p:nvGrpSpPr>
+        <p:cNvPr id="1" name="">
+          <a:extLst>
+            <a:ext uri="{FF2B5EF4-FFF2-40B4-BE49-F238E27FC236}">
+              <a16:creationId xmlns:a16="http://schemas.microsoft.com/office/drawing/2014/main" id="{1D89B86C-4874-4698-E9D0-1EF858CBAB9B}"/>
+            </a:ext>
+          </a:extLst>
+        </p:cNvPr>
+        <p:cNvGrpSpPr/>
+        <p:nvPr/>
+      </p:nvGrpSpPr>
+      <p:grpSpPr>
+        <a:xfrm>
+          <a:off x="0" y="0"/>
+          <a:ext cx="0" cy="0"/>
+          <a:chOff x="0" y="0"/>
+          <a:chExt cx="0" cy="0"/>
+        </a:xfrm>
+      </p:grpSpPr>
+      <p:sp>
+        <p:nvSpPr>
+          <p:cNvPr id="2" name="Title 1">
+            <a:extLst>
+              <a:ext uri="{FF2B5EF4-FFF2-40B4-BE49-F238E27FC236}">
+                <a16:creationId xmlns:a16="http://schemas.microsoft.com/office/drawing/2014/main" id="{9FCFF3E8-24C6-3B2C-8107-D8B0C7DF37C1}"/>
+              </a:ext>
+            </a:extLst>
+          </p:cNvPr>
+          <p:cNvSpPr>
+            <a:spLocks noGrp="1"/>
+          </p:cNvSpPr>
+          <p:nvPr>
+            <p:ph type="title"/>
+          </p:nvPr>
+        </p:nvSpPr>
+        <p:spPr/>
+        <p:txBody>
+          <a:bodyPr/>
+          <a:lstStyle/>
+          <a:p>
+            <a:r>
+              <a:rPr lang="en-US" b="1" dirty="0">
+                <a:solidFill>
+                  <a:schemeClr val="tx1"/>
+                </a:solidFill>
+                <a:latin typeface="Times New Roman" panose="02020603050405020304" pitchFamily="18" charset="0"/>
+                <a:cs typeface="Times New Roman" panose="02020603050405020304" pitchFamily="18" charset="0"/>
+              </a:rPr>
+              <a:t>                Key Performance Indicators</a:t>
+            </a:r>
+            <a:endParaRPr lang="en-IN" dirty="0"/>
+          </a:p>
+        </p:txBody>
+      </p:sp>
+      <p:sp>
+        <p:nvSpPr>
+          <p:cNvPr id="3" name="Content Placeholder 2">
+            <a:extLst>
+              <a:ext uri="{FF2B5EF4-FFF2-40B4-BE49-F238E27FC236}">
+                <a16:creationId xmlns:a16="http://schemas.microsoft.com/office/drawing/2014/main" id="{84EF65BC-06B4-3EE1-9D08-2246DBCA37A9}"/>
+              </a:ext>
+            </a:extLst>
+          </p:cNvPr>
+          <p:cNvSpPr>
+            <a:spLocks noGrp="1"/>
+          </p:cNvSpPr>
+          <p:nvPr>
+            <p:ph idx="1"/>
+          </p:nvPr>
+        </p:nvSpPr>
+        <p:spPr>
+          <a:xfrm>
+            <a:off x="677333" y="1617133"/>
+            <a:ext cx="11269133" cy="4424229"/>
+          </a:xfrm>
+        </p:spPr>
+        <p:txBody>
+          <a:bodyPr>
+            <a:noAutofit/>
+          </a:bodyPr>
+          <a:lstStyle/>
+          <a:p>
+            <a:pPr marL="0" indent="0">
+              <a:buNone/>
+            </a:pPr>
+            <a:r>
+              <a:rPr lang="en-US" sz="2200" b="1" dirty="0">
+                <a:latin typeface="Times New Roman" panose="02020603050405020304" pitchFamily="18" charset="0"/>
+                <a:cs typeface="Times New Roman" panose="02020603050405020304" pitchFamily="18" charset="0"/>
+              </a:rPr>
+              <a:t>4. Sales per Store</a:t>
+            </a:r>
+          </a:p>
+          <a:p>
+            <a:pPr marL="0" indent="0">
+              <a:buNone/>
+            </a:pPr>
+            <a:r>
+              <a:rPr lang="en-US" sz="2200" b="1" dirty="0">
+                <a:latin typeface="Times New Roman" panose="02020603050405020304" pitchFamily="18" charset="0"/>
+                <a:cs typeface="Times New Roman" panose="02020603050405020304" pitchFamily="18" charset="0"/>
+              </a:rPr>
+              <a:t>Formula:</a:t>
+            </a:r>
+            <a:r>
+              <a:rPr lang="en-US" sz="2200" dirty="0">
+                <a:latin typeface="Times New Roman" panose="02020603050405020304" pitchFamily="18" charset="0"/>
+                <a:cs typeface="Times New Roman" panose="02020603050405020304" pitchFamily="18" charset="0"/>
+              </a:rPr>
+              <a:t> Total Revenue / Number of Stores</a:t>
+            </a:r>
+            <a:br>
+              <a:rPr lang="en-US" sz="2200" dirty="0">
+                <a:latin typeface="Times New Roman" panose="02020603050405020304" pitchFamily="18" charset="0"/>
+                <a:cs typeface="Times New Roman" panose="02020603050405020304" pitchFamily="18" charset="0"/>
+              </a:rPr>
+            </a:br>
+            <a:r>
+              <a:rPr lang="en-US" sz="2200" b="1" dirty="0">
+                <a:latin typeface="Times New Roman" panose="02020603050405020304" pitchFamily="18" charset="0"/>
+                <a:cs typeface="Times New Roman" panose="02020603050405020304" pitchFamily="18" charset="0"/>
+              </a:rPr>
+              <a:t>About:</a:t>
+            </a:r>
+            <a:r>
+              <a:rPr lang="en-US" sz="2200" dirty="0">
+                <a:latin typeface="Times New Roman" panose="02020603050405020304" pitchFamily="18" charset="0"/>
+                <a:cs typeface="Times New Roman" panose="02020603050405020304" pitchFamily="18" charset="0"/>
+              </a:rPr>
+              <a:t> Measures store performance efficiency.</a:t>
+            </a:r>
+          </a:p>
+          <a:p>
+            <a:pPr marL="0" indent="0">
+              <a:buNone/>
+            </a:pPr>
+            <a:endParaRPr lang="en-US" sz="2200" dirty="0">
+              <a:latin typeface="Times New Roman" panose="02020603050405020304" pitchFamily="18" charset="0"/>
+              <a:cs typeface="Times New Roman" panose="02020603050405020304" pitchFamily="18" charset="0"/>
+            </a:endParaRPr>
+          </a:p>
+          <a:p>
+            <a:pPr marL="0" indent="0">
+              <a:buNone/>
+            </a:pPr>
+            <a:r>
+              <a:rPr lang="en-US" sz="2200" b="1" dirty="0">
+                <a:latin typeface="Times New Roman" panose="02020603050405020304" pitchFamily="18" charset="0"/>
+                <a:cs typeface="Times New Roman" panose="02020603050405020304" pitchFamily="18" charset="0"/>
+              </a:rPr>
+              <a:t>5. Sales per Employee</a:t>
+            </a:r>
+          </a:p>
+          <a:p>
+            <a:pPr marL="0" indent="0">
+              <a:buNone/>
+            </a:pPr>
+            <a:r>
+              <a:rPr lang="en-US" sz="2200" b="1" dirty="0">
+                <a:latin typeface="Times New Roman" panose="02020603050405020304" pitchFamily="18" charset="0"/>
+                <a:cs typeface="Times New Roman" panose="02020603050405020304" pitchFamily="18" charset="0"/>
+              </a:rPr>
+              <a:t>Formula:</a:t>
+            </a:r>
+            <a:r>
+              <a:rPr lang="en-US" sz="2200" dirty="0">
+                <a:latin typeface="Times New Roman" panose="02020603050405020304" pitchFamily="18" charset="0"/>
+                <a:cs typeface="Times New Roman" panose="02020603050405020304" pitchFamily="18" charset="0"/>
+              </a:rPr>
+              <a:t> Total Revenue / Number of Employees</a:t>
+            </a:r>
+            <a:br>
+              <a:rPr lang="en-US" sz="2200" dirty="0">
+                <a:latin typeface="Times New Roman" panose="02020603050405020304" pitchFamily="18" charset="0"/>
+                <a:cs typeface="Times New Roman" panose="02020603050405020304" pitchFamily="18" charset="0"/>
+              </a:rPr>
+            </a:br>
+            <a:r>
+              <a:rPr lang="en-US" sz="2200" b="1" dirty="0">
+                <a:latin typeface="Times New Roman" panose="02020603050405020304" pitchFamily="18" charset="0"/>
+                <a:cs typeface="Times New Roman" panose="02020603050405020304" pitchFamily="18" charset="0"/>
+              </a:rPr>
+              <a:t>About:</a:t>
+            </a:r>
+            <a:r>
+              <a:rPr lang="en-US" sz="2200" dirty="0">
+                <a:latin typeface="Times New Roman" panose="02020603050405020304" pitchFamily="18" charset="0"/>
+                <a:cs typeface="Times New Roman" panose="02020603050405020304" pitchFamily="18" charset="0"/>
+              </a:rPr>
+              <a:t> Evaluates employee productivity.</a:t>
+            </a:r>
+          </a:p>
+          <a:p>
+            <a:pPr marL="0" indent="0">
+              <a:buNone/>
+            </a:pPr>
+            <a:endParaRPr lang="en-US" sz="2200" dirty="0">
+              <a:latin typeface="Times New Roman" panose="02020603050405020304" pitchFamily="18" charset="0"/>
+              <a:cs typeface="Times New Roman" panose="02020603050405020304" pitchFamily="18" charset="0"/>
+            </a:endParaRPr>
+          </a:p>
+          <a:p>
+            <a:pPr marL="0" indent="0">
+              <a:buNone/>
+            </a:pPr>
+            <a:r>
+              <a:rPr lang="en-US" sz="2200" b="1" dirty="0">
+                <a:latin typeface="Times New Roman" panose="02020603050405020304" pitchFamily="18" charset="0"/>
+                <a:cs typeface="Times New Roman" panose="02020603050405020304" pitchFamily="18" charset="0"/>
+              </a:rPr>
+              <a:t>6. Month-over-Month (MoM) Growth</a:t>
+            </a:r>
+          </a:p>
+          <a:p>
+            <a:pPr marL="0" indent="0">
+              <a:buNone/>
+            </a:pPr>
+            <a:r>
+              <a:rPr lang="en-US" sz="2200" b="1" dirty="0">
+                <a:latin typeface="Times New Roman" panose="02020603050405020304" pitchFamily="18" charset="0"/>
+                <a:cs typeface="Times New Roman" panose="02020603050405020304" pitchFamily="18" charset="0"/>
+              </a:rPr>
+              <a:t>Formula:</a:t>
+            </a:r>
+            <a:r>
+              <a:rPr lang="en-US" sz="2200" dirty="0">
+                <a:latin typeface="Times New Roman" panose="02020603050405020304" pitchFamily="18" charset="0"/>
+                <a:cs typeface="Times New Roman" panose="02020603050405020304" pitchFamily="18" charset="0"/>
+              </a:rPr>
+              <a:t> ((Current Month Sales – Previous Month Sales) / Previous Month Sales) × 100</a:t>
+            </a:r>
+            <a:br>
+              <a:rPr lang="en-US" sz="2200" dirty="0">
+                <a:latin typeface="Times New Roman" panose="02020603050405020304" pitchFamily="18" charset="0"/>
+                <a:cs typeface="Times New Roman" panose="02020603050405020304" pitchFamily="18" charset="0"/>
+              </a:rPr>
+            </a:br>
+            <a:r>
+              <a:rPr lang="en-US" sz="2200" b="1" dirty="0">
+                <a:latin typeface="Times New Roman" panose="02020603050405020304" pitchFamily="18" charset="0"/>
+                <a:cs typeface="Times New Roman" panose="02020603050405020304" pitchFamily="18" charset="0"/>
+              </a:rPr>
+              <a:t>About:</a:t>
+            </a:r>
+            <a:r>
+              <a:rPr lang="en-US" sz="2200" dirty="0">
+                <a:latin typeface="Times New Roman" panose="02020603050405020304" pitchFamily="18" charset="0"/>
+                <a:cs typeface="Times New Roman" panose="02020603050405020304" pitchFamily="18" charset="0"/>
+              </a:rPr>
+              <a:t> Tracks monthly sales growth trend.</a:t>
+            </a:r>
+          </a:p>
+          <a:p>
+            <a:pPr marL="0" indent="0">
+              <a:buNone/>
+            </a:pPr>
+            <a:endParaRPr lang="en-US" sz="2200" dirty="0">
+              <a:latin typeface="Times New Roman" panose="02020603050405020304" pitchFamily="18" charset="0"/>
+              <a:cs typeface="Times New Roman" panose="02020603050405020304" pitchFamily="18" charset="0"/>
+            </a:endParaRPr>
+          </a:p>
+          <a:p>
+            <a:pPr marL="0" indent="0">
+              <a:buNone/>
+            </a:pPr>
+            <a:endParaRPr lang="en-IN" sz="2200" dirty="0"/>
+          </a:p>
+        </p:txBody>
+      </p:sp>
+    </p:spTree>
+    <p:extLst>
+      <p:ext uri="{BB962C8B-B14F-4D97-AF65-F5344CB8AC3E}">
+        <p14:creationId xmlns:p14="http://schemas.microsoft.com/office/powerpoint/2010/main" val="664525489"/>
+      </p:ext>
+    </p:extLst>
+  </p:cSld>
+  <p:clrMapOvr>
+    <a:masterClrMapping/>
+  </p:clrMapOvr>
+</p:sld>
+</file>
+
+<file path=ppt/slides/slide2.xml><?xml version="1.0" encoding="utf-8"?>
+<p:sld xmlns:a="http://schemas.openxmlformats.org/drawingml/2006/main" xmlns:r="http://schemas.openxmlformats.org/officeDocument/2006/relationships" xmlns:p="http://schemas.openxmlformats.org/presentationml/2006/main">
+  <p:cSld>
+    <p:spTree>
+      <p:nvGrpSpPr>
+        <p:cNvPr id="1" name=""/>
+        <p:cNvGrpSpPr/>
+        <p:nvPr/>
+      </p:nvGrpSpPr>
+      <p:grpSpPr>
+        <a:xfrm>
+          <a:off x="0" y="0"/>
+          <a:ext cx="0" cy="0"/>
+          <a:chOff x="0" y="0"/>
+          <a:chExt cx="0" cy="0"/>
+        </a:xfrm>
+      </p:grpSpPr>
+      <p:sp>
+        <p:nvSpPr>
+          <p:cNvPr id="2" name="Title 1">
+            <a:extLst>
+              <a:ext uri="{FF2B5EF4-FFF2-40B4-BE49-F238E27FC236}">
+                <a16:creationId xmlns:a16="http://schemas.microsoft.com/office/drawing/2014/main" id="{5C3E4E1F-FDC9-0338-A8EE-D3959935D3D6}"/>
+              </a:ext>
+            </a:extLst>
+          </p:cNvPr>
+          <p:cNvSpPr>
+            <a:spLocks noGrp="1"/>
+          </p:cNvSpPr>
+          <p:nvPr>
+            <p:ph type="title"/>
+          </p:nvPr>
+        </p:nvSpPr>
+        <p:spPr>
+          <a:xfrm>
+            <a:off x="2789162" y="511628"/>
+            <a:ext cx="8596668" cy="1320800"/>
+          </a:xfrm>
+        </p:spPr>
+        <p:txBody>
+          <a:bodyPr>
+            <a:normAutofit/>
+          </a:bodyPr>
+          <a:lstStyle/>
+          <a:p>
+            <a:r>
+              <a:rPr lang="en-US" sz="3800" b="1" dirty="0">
+                <a:solidFill>
+                  <a:schemeClr val="tx1"/>
+                </a:solidFill>
+                <a:latin typeface="Times New Roman" panose="02020603050405020304" pitchFamily="18" charset="0"/>
+                <a:cs typeface="Times New Roman" panose="02020603050405020304" pitchFamily="18" charset="0"/>
+              </a:rPr>
+              <a:t>TABLE OF CONTENTS</a:t>
+            </a:r>
+            <a:endParaRPr lang="en-IN" sz="3800" b="1" dirty="0">
+              <a:solidFill>
+                <a:schemeClr val="tx1"/>
+              </a:solidFill>
+              <a:latin typeface="Times New Roman" panose="02020603050405020304" pitchFamily="18" charset="0"/>
+              <a:cs typeface="Times New Roman" panose="02020603050405020304" pitchFamily="18" charset="0"/>
+            </a:endParaRPr>
+          </a:p>
+        </p:txBody>
+      </p:sp>
+      <p:sp>
+        <p:nvSpPr>
+          <p:cNvPr id="3" name="Content Placeholder 2">
+            <a:extLst>
+              <a:ext uri="{FF2B5EF4-FFF2-40B4-BE49-F238E27FC236}">
+                <a16:creationId xmlns:a16="http://schemas.microsoft.com/office/drawing/2014/main" id="{C1FC9FCD-9930-CA09-BE2A-F31C7250DCB1}"/>
+              </a:ext>
+            </a:extLst>
+          </p:cNvPr>
+          <p:cNvSpPr>
+            <a:spLocks noGrp="1"/>
+          </p:cNvSpPr>
+          <p:nvPr>
+            <p:ph idx="1"/>
+          </p:nvPr>
+        </p:nvSpPr>
+        <p:spPr>
+          <a:xfrm>
+            <a:off x="1101250" y="1335886"/>
+            <a:ext cx="10284580" cy="4756848"/>
+          </a:xfrm>
+        </p:spPr>
+        <p:txBody>
+          <a:bodyPr>
+            <a:normAutofit lnSpcReduction="10000"/>
+          </a:bodyPr>
+          <a:lstStyle/>
+          <a:p>
+            <a:r>
+              <a:rPr lang="en-US" sz="2400" dirty="0">
+                <a:latin typeface="Times New Roman" panose="02020603050405020304" pitchFamily="18" charset="0"/>
+                <a:cs typeface="Times New Roman" panose="02020603050405020304" pitchFamily="18" charset="0"/>
+              </a:rPr>
+              <a:t>Use Case</a:t>
+            </a:r>
+          </a:p>
+          <a:p>
+            <a:r>
+              <a:rPr lang="en-US" sz="2400" dirty="0">
+                <a:latin typeface="Times New Roman" panose="02020603050405020304" pitchFamily="18" charset="0"/>
+                <a:cs typeface="Times New Roman" panose="02020603050405020304" pitchFamily="18" charset="0"/>
+              </a:rPr>
+              <a:t>Project Focus</a:t>
+            </a:r>
+          </a:p>
+          <a:p>
+            <a:r>
+              <a:rPr lang="en-US" sz="2400" dirty="0">
+                <a:latin typeface="Times New Roman" panose="02020603050405020304" pitchFamily="18" charset="0"/>
+                <a:cs typeface="Times New Roman" panose="02020603050405020304" pitchFamily="18" charset="0"/>
+              </a:rPr>
+              <a:t>Project Objectives</a:t>
+            </a:r>
+          </a:p>
+          <a:p>
+            <a:r>
+              <a:rPr lang="en-US" sz="2400" dirty="0">
+                <a:latin typeface="Times New Roman" panose="02020603050405020304" pitchFamily="18" charset="0"/>
+                <a:cs typeface="Times New Roman" panose="02020603050405020304" pitchFamily="18" charset="0"/>
+              </a:rPr>
+              <a:t>Functional Diagram</a:t>
+            </a:r>
+          </a:p>
+          <a:p>
+            <a:r>
+              <a:rPr lang="en-US" sz="2400" dirty="0">
+                <a:latin typeface="Times New Roman" panose="02020603050405020304" pitchFamily="18" charset="0"/>
+                <a:cs typeface="Times New Roman" panose="02020603050405020304" pitchFamily="18" charset="0"/>
+              </a:rPr>
+              <a:t>Tools and Technologies</a:t>
+            </a:r>
+          </a:p>
+          <a:p>
+            <a:r>
+              <a:rPr lang="en-US" sz="2400" dirty="0">
+                <a:latin typeface="Times New Roman" panose="02020603050405020304" pitchFamily="18" charset="0"/>
+                <a:cs typeface="Times New Roman" panose="02020603050405020304" pitchFamily="18" charset="0"/>
+              </a:rPr>
+              <a:t>Technical Diagram</a:t>
+            </a:r>
+          </a:p>
+          <a:p>
+            <a:r>
+              <a:rPr lang="en-US" sz="2400" dirty="0">
+                <a:latin typeface="Times New Roman" panose="02020603050405020304" pitchFamily="18" charset="0"/>
+                <a:cs typeface="Times New Roman" panose="02020603050405020304" pitchFamily="18" charset="0"/>
+              </a:rPr>
+              <a:t>Dataset</a:t>
+            </a:r>
+          </a:p>
+          <a:p>
+            <a:r>
+              <a:rPr lang="en-US" sz="2400" dirty="0">
+                <a:latin typeface="Times New Roman" panose="02020603050405020304" pitchFamily="18" charset="0"/>
+                <a:cs typeface="Times New Roman" panose="02020603050405020304" pitchFamily="18" charset="0"/>
+              </a:rPr>
+              <a:t>Data Modeling</a:t>
+            </a:r>
+          </a:p>
+          <a:p>
+            <a:r>
+              <a:rPr lang="en-US" sz="2400" dirty="0">
+                <a:latin typeface="Times New Roman" panose="02020603050405020304" pitchFamily="18" charset="0"/>
+                <a:cs typeface="Times New Roman" panose="02020603050405020304" pitchFamily="18" charset="0"/>
+              </a:rPr>
+              <a:t>Key Performance Indicators</a:t>
+            </a:r>
+          </a:p>
+          <a:p>
+            <a:r>
+              <a:rPr lang="en-US" sz="2400" dirty="0">
+                <a:latin typeface="Times New Roman" panose="02020603050405020304" pitchFamily="18" charset="0"/>
+                <a:cs typeface="Times New Roman" panose="02020603050405020304" pitchFamily="18" charset="0"/>
+              </a:rPr>
+              <a:t>Business Impact and Value Delivered</a:t>
+            </a:r>
+          </a:p>
+          <a:p>
+            <a:endParaRPr lang="en-US" dirty="0"/>
+          </a:p>
+          <a:p>
+            <a:endParaRPr lang="en-IN" dirty="0"/>
+          </a:p>
+        </p:txBody>
+      </p:sp>
+    </p:spTree>
+    <p:extLst>
+      <p:ext uri="{BB962C8B-B14F-4D97-AF65-F5344CB8AC3E}">
+        <p14:creationId xmlns:p14="http://schemas.microsoft.com/office/powerpoint/2010/main" val="1388118647"/>
+      </p:ext>
+    </p:extLst>
+  </p:cSld>
+  <p:clrMapOvr>
+    <a:masterClrMapping/>
+  </p:clrMapOvr>
+</p:sld>
+</file>
+
+<file path=ppt/slides/slide20.xml><?xml version="1.0" encoding="utf-8"?>
+<p:sld xmlns:a="http://schemas.openxmlformats.org/drawingml/2006/main" xmlns:r="http://schemas.openxmlformats.org/officeDocument/2006/relationships" xmlns:p="http://schemas.openxmlformats.org/presentationml/2006/main">
+  <p:cSld>
+    <p:spTree>
+      <p:nvGrpSpPr>
+        <p:cNvPr id="1" name="">
+          <a:extLst>
+            <a:ext uri="{FF2B5EF4-FFF2-40B4-BE49-F238E27FC236}">
+              <a16:creationId xmlns:a16="http://schemas.microsoft.com/office/drawing/2014/main" id="{DCFCFA35-614A-0177-6748-ACA3C8CC1FFE}"/>
+            </a:ext>
+          </a:extLst>
+        </p:cNvPr>
+        <p:cNvGrpSpPr/>
+        <p:nvPr/>
+      </p:nvGrpSpPr>
+      <p:grpSpPr>
+        <a:xfrm>
+          <a:off x="0" y="0"/>
+          <a:ext cx="0" cy="0"/>
+          <a:chOff x="0" y="0"/>
+          <a:chExt cx="0" cy="0"/>
+        </a:xfrm>
+      </p:grpSpPr>
+      <p:sp>
+        <p:nvSpPr>
+          <p:cNvPr id="2" name="Title 1">
+            <a:extLst>
+              <a:ext uri="{FF2B5EF4-FFF2-40B4-BE49-F238E27FC236}">
+                <a16:creationId xmlns:a16="http://schemas.microsoft.com/office/drawing/2014/main" id="{625F62A6-77B8-2DA9-FDA3-AB0465358FDD}"/>
+              </a:ext>
+            </a:extLst>
+          </p:cNvPr>
+          <p:cNvSpPr>
+            <a:spLocks noGrp="1"/>
+          </p:cNvSpPr>
+          <p:nvPr>
+            <p:ph type="title"/>
+          </p:nvPr>
+        </p:nvSpPr>
+        <p:spPr/>
+        <p:txBody>
+          <a:bodyPr/>
+          <a:lstStyle/>
+          <a:p>
+            <a:r>
+              <a:rPr lang="en-US" b="1" dirty="0">
+                <a:solidFill>
+                  <a:schemeClr val="tx1"/>
+                </a:solidFill>
+                <a:latin typeface="Times New Roman" panose="02020603050405020304" pitchFamily="18" charset="0"/>
+                <a:cs typeface="Times New Roman" panose="02020603050405020304" pitchFamily="18" charset="0"/>
+              </a:rPr>
+              <a:t>                  Key Performance Indicators</a:t>
+            </a:r>
+            <a:endParaRPr lang="en-IN" dirty="0"/>
+          </a:p>
+        </p:txBody>
+      </p:sp>
+      <p:sp>
+        <p:nvSpPr>
+          <p:cNvPr id="3" name="Content Placeholder 2">
+            <a:extLst>
+              <a:ext uri="{FF2B5EF4-FFF2-40B4-BE49-F238E27FC236}">
+                <a16:creationId xmlns:a16="http://schemas.microsoft.com/office/drawing/2014/main" id="{4D8EEBFD-EF7D-1393-4A1A-C31840E8515D}"/>
+              </a:ext>
+            </a:extLst>
+          </p:cNvPr>
+          <p:cNvSpPr>
+            <a:spLocks noGrp="1"/>
+          </p:cNvSpPr>
+          <p:nvPr>
+            <p:ph idx="1"/>
+          </p:nvPr>
+        </p:nvSpPr>
+        <p:spPr>
+          <a:xfrm>
+            <a:off x="677333" y="1320801"/>
+            <a:ext cx="10473267" cy="4720562"/>
+          </a:xfrm>
+        </p:spPr>
+        <p:txBody>
+          <a:bodyPr>
+            <a:noAutofit/>
+          </a:bodyPr>
+          <a:lstStyle/>
+          <a:p>
+            <a:pPr marL="0" indent="0">
+              <a:buNone/>
+            </a:pPr>
+            <a:r>
+              <a:rPr lang="en-US" sz="2200" b="1" dirty="0">
+                <a:latin typeface="Times New Roman" panose="02020603050405020304" pitchFamily="18" charset="0"/>
+                <a:cs typeface="Times New Roman" panose="02020603050405020304" pitchFamily="18" charset="0"/>
+              </a:rPr>
+              <a:t>7. Inventory Turnover Ratio</a:t>
+            </a:r>
+          </a:p>
+          <a:p>
+            <a:pPr marL="0" indent="0">
+              <a:buNone/>
+            </a:pPr>
+            <a:r>
+              <a:rPr lang="en-US" sz="2200" b="1" dirty="0">
+                <a:latin typeface="Times New Roman" panose="02020603050405020304" pitchFamily="18" charset="0"/>
+                <a:cs typeface="Times New Roman" panose="02020603050405020304" pitchFamily="18" charset="0"/>
+              </a:rPr>
+              <a:t>Formula:</a:t>
+            </a:r>
+            <a:r>
+              <a:rPr lang="en-US" sz="2200" dirty="0">
+                <a:latin typeface="Times New Roman" panose="02020603050405020304" pitchFamily="18" charset="0"/>
+                <a:cs typeface="Times New Roman" panose="02020603050405020304" pitchFamily="18" charset="0"/>
+              </a:rPr>
+              <a:t> Cost of Goods Sold / Average Inventory</a:t>
+            </a:r>
+            <a:br>
+              <a:rPr lang="en-US" sz="2200" dirty="0">
+                <a:latin typeface="Times New Roman" panose="02020603050405020304" pitchFamily="18" charset="0"/>
+                <a:cs typeface="Times New Roman" panose="02020603050405020304" pitchFamily="18" charset="0"/>
+              </a:rPr>
+            </a:br>
+            <a:r>
+              <a:rPr lang="en-US" sz="2200" b="1" dirty="0">
+                <a:latin typeface="Times New Roman" panose="02020603050405020304" pitchFamily="18" charset="0"/>
+                <a:cs typeface="Times New Roman" panose="02020603050405020304" pitchFamily="18" charset="0"/>
+              </a:rPr>
+              <a:t>About:</a:t>
+            </a:r>
+            <a:r>
+              <a:rPr lang="en-US" sz="2200" dirty="0">
+                <a:latin typeface="Times New Roman" panose="02020603050405020304" pitchFamily="18" charset="0"/>
+                <a:cs typeface="Times New Roman" panose="02020603050405020304" pitchFamily="18" charset="0"/>
+              </a:rPr>
+              <a:t> Indicates how efficiently inventory is sold.</a:t>
+            </a:r>
+          </a:p>
+          <a:p>
+            <a:pPr marL="0" indent="0">
+              <a:buNone/>
+            </a:pPr>
+            <a:r>
+              <a:rPr lang="en-US" sz="2200" b="1" dirty="0">
+                <a:latin typeface="Times New Roman" panose="02020603050405020304" pitchFamily="18" charset="0"/>
+                <a:cs typeface="Times New Roman" panose="02020603050405020304" pitchFamily="18" charset="0"/>
+              </a:rPr>
+              <a:t>8. Stockout Rate</a:t>
+            </a:r>
+          </a:p>
+          <a:p>
+            <a:pPr marL="0" indent="0">
+              <a:buNone/>
+            </a:pPr>
+            <a:r>
+              <a:rPr lang="en-US" sz="2200" b="1" dirty="0">
+                <a:latin typeface="Times New Roman" panose="02020603050405020304" pitchFamily="18" charset="0"/>
+                <a:cs typeface="Times New Roman" panose="02020603050405020304" pitchFamily="18" charset="0"/>
+              </a:rPr>
+              <a:t>Formula:</a:t>
+            </a:r>
+            <a:r>
+              <a:rPr lang="en-US" sz="2200" dirty="0">
+                <a:latin typeface="Times New Roman" panose="02020603050405020304" pitchFamily="18" charset="0"/>
+                <a:cs typeface="Times New Roman" panose="02020603050405020304" pitchFamily="18" charset="0"/>
+              </a:rPr>
+              <a:t> (Stockout Days / Total Selling Days) × 100</a:t>
+            </a:r>
+            <a:br>
+              <a:rPr lang="en-US" sz="2200" dirty="0">
+                <a:latin typeface="Times New Roman" panose="02020603050405020304" pitchFamily="18" charset="0"/>
+                <a:cs typeface="Times New Roman" panose="02020603050405020304" pitchFamily="18" charset="0"/>
+              </a:rPr>
+            </a:br>
+            <a:r>
+              <a:rPr lang="en-US" sz="2200" b="1" dirty="0">
+                <a:latin typeface="Times New Roman" panose="02020603050405020304" pitchFamily="18" charset="0"/>
+                <a:cs typeface="Times New Roman" panose="02020603050405020304" pitchFamily="18" charset="0"/>
+              </a:rPr>
+              <a:t>About:</a:t>
+            </a:r>
+            <a:r>
+              <a:rPr lang="en-US" sz="2200" dirty="0">
+                <a:latin typeface="Times New Roman" panose="02020603050405020304" pitchFamily="18" charset="0"/>
+                <a:cs typeface="Times New Roman" panose="02020603050405020304" pitchFamily="18" charset="0"/>
+              </a:rPr>
+              <a:t> Measures frequency of product unavailability.</a:t>
+            </a:r>
+          </a:p>
+          <a:p>
+            <a:pPr marL="0" indent="0">
+              <a:buNone/>
+            </a:pPr>
+            <a:r>
+              <a:rPr lang="en-US" sz="2200" b="1" dirty="0">
+                <a:latin typeface="Times New Roman" panose="02020603050405020304" pitchFamily="18" charset="0"/>
+                <a:cs typeface="Times New Roman" panose="02020603050405020304" pitchFamily="18" charset="0"/>
+              </a:rPr>
+              <a:t>9. Customer Retention Rate</a:t>
+            </a:r>
+          </a:p>
+          <a:p>
+            <a:pPr marL="0" indent="0">
+              <a:buNone/>
+            </a:pPr>
+            <a:r>
+              <a:rPr lang="en-US" sz="2200" b="1" dirty="0">
+                <a:latin typeface="Times New Roman" panose="02020603050405020304" pitchFamily="18" charset="0"/>
+                <a:cs typeface="Times New Roman" panose="02020603050405020304" pitchFamily="18" charset="0"/>
+              </a:rPr>
+              <a:t>Formula:</a:t>
+            </a:r>
+            <a:r>
+              <a:rPr lang="en-US" sz="2200" dirty="0">
+                <a:latin typeface="Times New Roman" panose="02020603050405020304" pitchFamily="18" charset="0"/>
+                <a:cs typeface="Times New Roman" panose="02020603050405020304" pitchFamily="18" charset="0"/>
+              </a:rPr>
+              <a:t> ((Customers at End – New Customers) / Customers at Start) × 100</a:t>
+            </a:r>
+            <a:br>
+              <a:rPr lang="en-US" sz="2200" dirty="0">
+                <a:latin typeface="Times New Roman" panose="02020603050405020304" pitchFamily="18" charset="0"/>
+                <a:cs typeface="Times New Roman" panose="02020603050405020304" pitchFamily="18" charset="0"/>
+              </a:rPr>
+            </a:br>
+            <a:r>
+              <a:rPr lang="en-US" sz="2200" b="1" dirty="0">
+                <a:latin typeface="Times New Roman" panose="02020603050405020304" pitchFamily="18" charset="0"/>
+                <a:cs typeface="Times New Roman" panose="02020603050405020304" pitchFamily="18" charset="0"/>
+              </a:rPr>
+              <a:t>About:</a:t>
+            </a:r>
+            <a:r>
+              <a:rPr lang="en-US" sz="2200" dirty="0">
+                <a:latin typeface="Times New Roman" panose="02020603050405020304" pitchFamily="18" charset="0"/>
+                <a:cs typeface="Times New Roman" panose="02020603050405020304" pitchFamily="18" charset="0"/>
+              </a:rPr>
+              <a:t> Shows how well the business retains customers.</a:t>
+            </a:r>
+          </a:p>
+          <a:p>
+            <a:pPr marL="0" indent="0">
+              <a:buNone/>
+            </a:pPr>
+            <a:r>
+              <a:rPr lang="en-US" sz="2200" b="1" dirty="0">
+                <a:latin typeface="Times New Roman" panose="02020603050405020304" pitchFamily="18" charset="0"/>
+                <a:cs typeface="Times New Roman" panose="02020603050405020304" pitchFamily="18" charset="0"/>
+              </a:rPr>
+              <a:t>10. Return Rate</a:t>
+            </a:r>
+          </a:p>
+          <a:p>
+            <a:pPr marL="0" indent="0">
+              <a:buNone/>
+            </a:pPr>
+            <a:r>
+              <a:rPr lang="en-US" sz="2200" b="1" dirty="0">
+                <a:latin typeface="Times New Roman" panose="02020603050405020304" pitchFamily="18" charset="0"/>
+                <a:cs typeface="Times New Roman" panose="02020603050405020304" pitchFamily="18" charset="0"/>
+              </a:rPr>
+              <a:t>Formula:</a:t>
+            </a:r>
+            <a:r>
+              <a:rPr lang="en-US" sz="2200" dirty="0">
+                <a:latin typeface="Times New Roman" panose="02020603050405020304" pitchFamily="18" charset="0"/>
+                <a:cs typeface="Times New Roman" panose="02020603050405020304" pitchFamily="18" charset="0"/>
+              </a:rPr>
+              <a:t> (Returned Items / Total Items Sold) × 100</a:t>
+            </a:r>
+            <a:br>
+              <a:rPr lang="en-US" sz="2200" dirty="0">
+                <a:latin typeface="Times New Roman" panose="02020603050405020304" pitchFamily="18" charset="0"/>
+                <a:cs typeface="Times New Roman" panose="02020603050405020304" pitchFamily="18" charset="0"/>
+              </a:rPr>
+            </a:br>
+            <a:r>
+              <a:rPr lang="en-US" sz="2200" b="1" dirty="0">
+                <a:latin typeface="Times New Roman" panose="02020603050405020304" pitchFamily="18" charset="0"/>
+                <a:cs typeface="Times New Roman" panose="02020603050405020304" pitchFamily="18" charset="0"/>
+              </a:rPr>
+              <a:t>About:</a:t>
+            </a:r>
+            <a:r>
+              <a:rPr lang="en-US" sz="2200" dirty="0">
+                <a:latin typeface="Times New Roman" panose="02020603050405020304" pitchFamily="18" charset="0"/>
+                <a:cs typeface="Times New Roman" panose="02020603050405020304" pitchFamily="18" charset="0"/>
+              </a:rPr>
+              <a:t> Measures product return percentage.</a:t>
+            </a:r>
+          </a:p>
+          <a:p>
+            <a:pPr marL="0" indent="0">
+              <a:buNone/>
+            </a:pPr>
+            <a:endParaRPr lang="en-IN" sz="2200" dirty="0"/>
+          </a:p>
+        </p:txBody>
+      </p:sp>
+    </p:spTree>
+    <p:extLst>
+      <p:ext uri="{BB962C8B-B14F-4D97-AF65-F5344CB8AC3E}">
+        <p14:creationId xmlns:p14="http://schemas.microsoft.com/office/powerpoint/2010/main" val="2331430658"/>
+      </p:ext>
+    </p:extLst>
+  </p:cSld>
+  <p:clrMapOvr>
+    <a:masterClrMapping/>
+  </p:clrMapOvr>
+</p:sld>
+</file>
+
+<file path=ppt/slides/slide21.xml><?xml version="1.0" encoding="utf-8"?>
+<p:sld xmlns:a="http://schemas.openxmlformats.org/drawingml/2006/main" xmlns:r="http://schemas.openxmlformats.org/officeDocument/2006/relationships" xmlns:p="http://schemas.openxmlformats.org/presentationml/2006/main">
+  <p:cSld>
+    <p:spTree>
+      <p:nvGrpSpPr>
+        <p:cNvPr id="1" name=""/>
+        <p:cNvGrpSpPr/>
+        <p:nvPr/>
+      </p:nvGrpSpPr>
+      <p:grpSpPr>
+        <a:xfrm>
+          <a:off x="0" y="0"/>
+          <a:ext cx="0" cy="0"/>
+          <a:chOff x="0" y="0"/>
+          <a:chExt cx="0" cy="0"/>
+        </a:xfrm>
+      </p:grpSpPr>
+      <p:sp>
+        <p:nvSpPr>
+          <p:cNvPr id="2" name="Title 1">
+            <a:extLst>
+              <a:ext uri="{FF2B5EF4-FFF2-40B4-BE49-F238E27FC236}">
+                <a16:creationId xmlns:a16="http://schemas.microsoft.com/office/drawing/2014/main" id="{DCC3BB11-D03A-9500-A958-BD9C2203147D}"/>
+              </a:ext>
+            </a:extLst>
+          </p:cNvPr>
+          <p:cNvSpPr>
+            <a:spLocks noGrp="1"/>
+          </p:cNvSpPr>
+          <p:nvPr>
+            <p:ph type="title"/>
+          </p:nvPr>
+        </p:nvSpPr>
+        <p:spPr>
+          <a:xfrm>
+            <a:off x="1209686" y="260279"/>
+            <a:ext cx="8596668" cy="1320800"/>
+          </a:xfrm>
+        </p:spPr>
+        <p:txBody>
+          <a:bodyPr/>
+          <a:lstStyle/>
+          <a:p>
+            <a:r>
+              <a:rPr lang="en-US" b="1" dirty="0"/>
+              <a:t>                 </a:t>
+            </a:r>
+            <a:r>
+              <a:rPr lang="en-US" b="1" dirty="0">
+                <a:solidFill>
+                  <a:schemeClr val="tx1"/>
+                </a:solidFill>
+                <a:latin typeface="Times New Roman" panose="02020603050405020304" pitchFamily="18" charset="0"/>
+                <a:cs typeface="Times New Roman" panose="02020603050405020304" pitchFamily="18" charset="0"/>
+              </a:rPr>
+              <a:t>Reference Datasets</a:t>
+            </a:r>
+            <a:br>
+              <a:rPr lang="en-US" b="1" dirty="0"/>
+            </a:br>
+            <a:endParaRPr lang="en-IN" dirty="0"/>
+          </a:p>
+        </p:txBody>
+      </p:sp>
+      <p:sp>
+        <p:nvSpPr>
+          <p:cNvPr id="3" name="Content Placeholder 2">
+            <a:extLst>
+              <a:ext uri="{FF2B5EF4-FFF2-40B4-BE49-F238E27FC236}">
+                <a16:creationId xmlns:a16="http://schemas.microsoft.com/office/drawing/2014/main" id="{7D41203C-70E4-DD95-9E1E-D8F1D4DAC565}"/>
+              </a:ext>
+            </a:extLst>
+          </p:cNvPr>
+          <p:cNvSpPr>
+            <a:spLocks noGrp="1"/>
+          </p:cNvSpPr>
+          <p:nvPr>
+            <p:ph idx="1"/>
+          </p:nvPr>
+        </p:nvSpPr>
+        <p:spPr>
+          <a:xfrm>
+            <a:off x="677333" y="1109608"/>
+            <a:ext cx="11292059" cy="5578868"/>
+          </a:xfrm>
+        </p:spPr>
+        <p:txBody>
+          <a:bodyPr>
+            <a:normAutofit fontScale="55000" lnSpcReduction="20000"/>
+          </a:bodyPr>
+          <a:lstStyle/>
+          <a:p>
+            <a:pPr marL="0" indent="0">
+              <a:lnSpc>
+                <a:spcPct val="120000"/>
+              </a:lnSpc>
+              <a:buNone/>
+            </a:pPr>
+            <a:r>
+              <a:rPr lang="en-US" sz="3300" dirty="0">
+                <a:latin typeface="Times New Roman" panose="02020603050405020304" pitchFamily="18" charset="0"/>
+                <a:cs typeface="Times New Roman" panose="02020603050405020304" pitchFamily="18" charset="0"/>
+              </a:rPr>
+              <a:t>The following open-source datasets were referred to for understanding structure, attributes, and retail sales patterns:</a:t>
+            </a:r>
+          </a:p>
+          <a:p>
+            <a:pPr marL="0" indent="0">
+              <a:lnSpc>
+                <a:spcPct val="120000"/>
+              </a:lnSpc>
+              <a:buNone/>
+            </a:pPr>
+            <a:r>
+              <a:rPr lang="en-IN" sz="3300" dirty="0">
+                <a:latin typeface="Times New Roman" panose="02020603050405020304" pitchFamily="18" charset="0"/>
+                <a:cs typeface="Times New Roman" panose="02020603050405020304" pitchFamily="18" charset="0"/>
+              </a:rPr>
+              <a:t>1. Online Retail Dataset (Transactions)</a:t>
+            </a:r>
+          </a:p>
+          <a:p>
+            <a:pPr marL="0" indent="0">
+              <a:lnSpc>
+                <a:spcPct val="120000"/>
+              </a:lnSpc>
+              <a:buNone/>
+            </a:pPr>
+            <a:r>
+              <a:rPr lang="en-IN" sz="3300" dirty="0">
+                <a:latin typeface="Times New Roman" panose="02020603050405020304" pitchFamily="18" charset="0"/>
+                <a:cs typeface="Times New Roman" panose="02020603050405020304" pitchFamily="18" charset="0"/>
+              </a:rPr>
+              <a:t>Kaggle Link: </a:t>
+            </a:r>
+            <a:r>
+              <a:rPr lang="en-IN" sz="3300" dirty="0">
+                <a:latin typeface="Times New Roman" panose="02020603050405020304" pitchFamily="18" charset="0"/>
+                <a:cs typeface="Times New Roman" panose="02020603050405020304" pitchFamily="18" charset="0"/>
+                <a:hlinkClick r:id="rId2"/>
+              </a:rPr>
+              <a:t>https://www.kaggle.com/datasets/ulrikthygepedersen/online-retail-dataset</a:t>
+            </a:r>
+            <a:br>
+              <a:rPr lang="en-IN" sz="3300" dirty="0">
+                <a:latin typeface="Times New Roman" panose="02020603050405020304" pitchFamily="18" charset="0"/>
+                <a:cs typeface="Times New Roman" panose="02020603050405020304" pitchFamily="18" charset="0"/>
+              </a:rPr>
+            </a:br>
+            <a:r>
+              <a:rPr lang="en-IN" sz="3300" dirty="0">
+                <a:latin typeface="Times New Roman" panose="02020603050405020304" pitchFamily="18" charset="0"/>
+                <a:cs typeface="Times New Roman" panose="02020603050405020304" pitchFamily="18" charset="0"/>
+              </a:rPr>
+              <a:t>Includes transactional sales data such as product code, description, quantity, price, date/time, customer ID, and country — great for sales and inventory references. </a:t>
+            </a:r>
+            <a:br>
+              <a:rPr lang="en-IN" sz="3300" dirty="0">
+                <a:latin typeface="Times New Roman" panose="02020603050405020304" pitchFamily="18" charset="0"/>
+                <a:cs typeface="Times New Roman" panose="02020603050405020304" pitchFamily="18" charset="0"/>
+              </a:rPr>
+            </a:br>
+            <a:endParaRPr lang="en-IN" sz="3300" dirty="0">
+              <a:latin typeface="Times New Roman" panose="02020603050405020304" pitchFamily="18" charset="0"/>
+              <a:cs typeface="Times New Roman" panose="02020603050405020304" pitchFamily="18" charset="0"/>
+            </a:endParaRPr>
+          </a:p>
+          <a:p>
+            <a:pPr marL="0" indent="0">
+              <a:lnSpc>
+                <a:spcPct val="120000"/>
+              </a:lnSpc>
+              <a:buNone/>
+            </a:pPr>
+            <a:r>
+              <a:rPr lang="en-IN" sz="3300" dirty="0">
+                <a:latin typeface="Times New Roman" panose="02020603050405020304" pitchFamily="18" charset="0"/>
+                <a:cs typeface="Times New Roman" panose="02020603050405020304" pitchFamily="18" charset="0"/>
+              </a:rPr>
+              <a:t>2. H&amp;M Ecommerce Products Dataset (Enhanced Version on Hugging Face)</a:t>
+            </a:r>
+          </a:p>
+          <a:p>
+            <a:pPr marL="0" indent="0">
+              <a:lnSpc>
+                <a:spcPct val="120000"/>
+              </a:lnSpc>
+              <a:buNone/>
+            </a:pPr>
+            <a:r>
+              <a:rPr lang="en-IN" sz="3300" dirty="0">
+                <a:latin typeface="Times New Roman" panose="02020603050405020304" pitchFamily="18" charset="0"/>
+                <a:cs typeface="Times New Roman" panose="02020603050405020304" pitchFamily="18" charset="0"/>
+              </a:rPr>
+              <a:t>Hugging Face Link: </a:t>
+            </a:r>
+            <a:r>
+              <a:rPr lang="en-IN" sz="3300" dirty="0">
+                <a:latin typeface="Times New Roman" panose="02020603050405020304" pitchFamily="18" charset="0"/>
+                <a:cs typeface="Times New Roman" panose="02020603050405020304" pitchFamily="18" charset="0"/>
+                <a:hlinkClick r:id="rId3"/>
+              </a:rPr>
+              <a:t>https://huggingface.co/datasets/nleroy917/hm_ecommerce_products</a:t>
+            </a:r>
+            <a:br>
+              <a:rPr lang="en-IN" sz="3300" dirty="0">
+                <a:latin typeface="Times New Roman" panose="02020603050405020304" pitchFamily="18" charset="0"/>
+                <a:cs typeface="Times New Roman" panose="02020603050405020304" pitchFamily="18" charset="0"/>
+              </a:rPr>
+            </a:br>
+            <a:r>
+              <a:rPr lang="en-IN" sz="3300" dirty="0">
+                <a:latin typeface="Times New Roman" panose="02020603050405020304" pitchFamily="18" charset="0"/>
+                <a:cs typeface="Times New Roman" panose="02020603050405020304" pitchFamily="18" charset="0"/>
+              </a:rPr>
+              <a:t>Contains rich product metadata, customer info, sales transaction history and image URLs — useful for multi-attribute retail structure reference. </a:t>
+            </a:r>
+            <a:br>
+              <a:rPr lang="en-IN" sz="3300" dirty="0">
+                <a:latin typeface="Times New Roman" panose="02020603050405020304" pitchFamily="18" charset="0"/>
+                <a:cs typeface="Times New Roman" panose="02020603050405020304" pitchFamily="18" charset="0"/>
+              </a:rPr>
+            </a:br>
+            <a:endParaRPr lang="en-IN" sz="3300" dirty="0">
+              <a:latin typeface="Times New Roman" panose="02020603050405020304" pitchFamily="18" charset="0"/>
+              <a:cs typeface="Times New Roman" panose="02020603050405020304" pitchFamily="18" charset="0"/>
+            </a:endParaRPr>
+          </a:p>
+          <a:p>
+            <a:pPr marL="0" indent="0">
+              <a:lnSpc>
+                <a:spcPct val="120000"/>
+              </a:lnSpc>
+              <a:buNone/>
+            </a:pPr>
+            <a:r>
+              <a:rPr lang="en-IN" sz="3300" dirty="0">
+                <a:latin typeface="Times New Roman" panose="02020603050405020304" pitchFamily="18" charset="0"/>
+                <a:cs typeface="Times New Roman" panose="02020603050405020304" pitchFamily="18" charset="0"/>
+              </a:rPr>
+              <a:t>3. Women Fashion Trend Dataset (Kaggle)</a:t>
+            </a:r>
+          </a:p>
+          <a:p>
+            <a:pPr marL="0" indent="0">
+              <a:lnSpc>
+                <a:spcPct val="120000"/>
+              </a:lnSpc>
+              <a:buNone/>
+            </a:pPr>
+            <a:r>
+              <a:rPr lang="en-IN" sz="3300" dirty="0">
+                <a:latin typeface="Times New Roman" panose="02020603050405020304" pitchFamily="18" charset="0"/>
+                <a:cs typeface="Times New Roman" panose="02020603050405020304" pitchFamily="18" charset="0"/>
+              </a:rPr>
+              <a:t>Link : </a:t>
+            </a:r>
+            <a:r>
+              <a:rPr lang="en-IN" sz="3300" dirty="0">
+                <a:latin typeface="Times New Roman" panose="02020603050405020304" pitchFamily="18" charset="0"/>
+                <a:cs typeface="Times New Roman" panose="02020603050405020304" pitchFamily="18" charset="0"/>
+                <a:hlinkClick r:id="rId4"/>
+              </a:rPr>
+              <a:t>https://baselight.app/u/kaggle/dataset/durgeshrao9993_dataset</a:t>
+            </a:r>
+            <a:br>
+              <a:rPr lang="en-IN" sz="3300" dirty="0">
+                <a:latin typeface="Times New Roman" panose="02020603050405020304" pitchFamily="18" charset="0"/>
+                <a:cs typeface="Times New Roman" panose="02020603050405020304" pitchFamily="18" charset="0"/>
+              </a:rPr>
+            </a:br>
+            <a:r>
+              <a:rPr lang="en-IN" sz="3300" dirty="0">
+                <a:latin typeface="Times New Roman" panose="02020603050405020304" pitchFamily="18" charset="0"/>
+                <a:cs typeface="Times New Roman" panose="02020603050405020304" pitchFamily="18" charset="0"/>
+              </a:rPr>
+              <a:t>Includes ~43 columns covering price, ratings, inventory counts, </a:t>
+            </a:r>
+            <a:r>
+              <a:rPr lang="en-IN" sz="3300" dirty="0" err="1">
+                <a:latin typeface="Times New Roman" panose="02020603050405020304" pitchFamily="18" charset="0"/>
+                <a:cs typeface="Times New Roman" panose="02020603050405020304" pitchFamily="18" charset="0"/>
+              </a:rPr>
+              <a:t>colors</a:t>
+            </a:r>
+            <a:r>
+              <a:rPr lang="en-IN" sz="3300" dirty="0">
+                <a:latin typeface="Times New Roman" panose="02020603050405020304" pitchFamily="18" charset="0"/>
+                <a:cs typeface="Times New Roman" panose="02020603050405020304" pitchFamily="18" charset="0"/>
+              </a:rPr>
+              <a:t>, tags, merchant info, and trends — good for product and trend analysis reference. </a:t>
+            </a:r>
+          </a:p>
+          <a:p>
+            <a:pPr>
+              <a:lnSpc>
+                <a:spcPct val="170000"/>
+              </a:lnSpc>
+            </a:pPr>
+            <a:endParaRPr lang="en-IN" dirty="0"/>
+          </a:p>
+        </p:txBody>
+      </p:sp>
+    </p:spTree>
+    <p:extLst>
+      <p:ext uri="{BB962C8B-B14F-4D97-AF65-F5344CB8AC3E}">
+        <p14:creationId xmlns:p14="http://schemas.microsoft.com/office/powerpoint/2010/main" val="594854465"/>
+      </p:ext>
+    </p:extLst>
+  </p:cSld>
+  <p:clrMapOvr>
+    <a:masterClrMapping/>
+  </p:clrMapOvr>
+</p:sld>
+</file>
+
+<file path=ppt/slides/slide22.xml><?xml version="1.0" encoding="utf-8"?>
 <p:sld xmlns:a="http://schemas.openxmlformats.org/drawingml/2006/main" xmlns:r="http://schemas.openxmlformats.org/officeDocument/2006/relationships" xmlns:p="http://schemas.openxmlformats.org/presentationml/2006/main">
   <p:cSld>
     <p:spTree>
@@ -7836,12 +9633,18 @@
 </p:sld>
 </file>
 
-<file path=ppt/slides/slide17.xml><?xml version="1.0" encoding="utf-8"?>
+<file path=ppt/slides/slide23.xml><?xml version="1.0" encoding="utf-8"?>
 <p:sld xmlns:a="http://schemas.openxmlformats.org/drawingml/2006/main" xmlns:r="http://schemas.openxmlformats.org/officeDocument/2006/relationships" xmlns:p="http://schemas.openxmlformats.org/presentationml/2006/main">
   <p:cSld>
     <p:spTree>
       <p:nvGrpSpPr>
-        <p:cNvPr id="1" name=""/>
+        <p:cNvPr id="1" name="">
+          <a:extLst>
+            <a:ext uri="{FF2B5EF4-FFF2-40B4-BE49-F238E27FC236}">
+              <a16:creationId xmlns:a16="http://schemas.microsoft.com/office/drawing/2014/main" id="{1F42BF6F-1897-F8B4-D0B2-44E2B8A46F0A}"/>
+            </a:ext>
+          </a:extLst>
+        </p:cNvPr>
         <p:cNvGrpSpPr/>
         <p:nvPr/>
       </p:nvGrpSpPr>
@@ -7858,7 +9661,7 @@
           <p:cNvPr id="2" name="Title 1">
             <a:extLst>
               <a:ext uri="{FF2B5EF4-FFF2-40B4-BE49-F238E27FC236}">
-                <a16:creationId xmlns:a16="http://schemas.microsoft.com/office/drawing/2014/main" id="{AC40CC8D-59A4-E289-B568-FAC8683AD8F9}"/>
+                <a16:creationId xmlns:a16="http://schemas.microsoft.com/office/drawing/2014/main" id="{8DDC757B-D38F-DF03-D6F4-DD28E6A36127}"/>
               </a:ext>
             </a:extLst>
           </p:cNvPr>
@@ -7869,21 +9672,61 @@
             <p:ph type="title"/>
           </p:nvPr>
         </p:nvSpPr>
-        <p:spPr/>
-        <p:txBody>
-          <a:bodyPr/>
+        <p:spPr>
+          <a:xfrm>
+            <a:off x="1095245" y="378878"/>
+            <a:ext cx="8596668" cy="1320800"/>
+          </a:xfrm>
+        </p:spPr>
+        <p:txBody>
+          <a:bodyPr>
+            <a:normAutofit/>
+          </a:bodyPr>
           <a:lstStyle/>
           <a:p>
-            <a:endParaRPr lang="en-IN"/>
+            <a:pPr algn="ctr"/>
+            <a:r>
+              <a:rPr lang="en-US" b="1" dirty="0">
+                <a:solidFill>
+                  <a:schemeClr val="tx1"/>
+                </a:solidFill>
+                <a:latin typeface="Times New Roman" panose="02020603050405020304" pitchFamily="18" charset="0"/>
+                <a:cs typeface="Times New Roman" panose="02020603050405020304" pitchFamily="18" charset="0"/>
+              </a:rPr>
+              <a:t>                </a:t>
+            </a:r>
+            <a:r>
+              <a:rPr lang="en-IN" b="1" dirty="0">
+                <a:solidFill>
+                  <a:schemeClr val="tx1"/>
+                </a:solidFill>
+                <a:latin typeface="Times New Roman" panose="02020603050405020304" pitchFamily="18" charset="0"/>
+                <a:cs typeface="Times New Roman" panose="02020603050405020304" pitchFamily="18" charset="0"/>
+              </a:rPr>
+              <a:t>Copy Activity for all file formats</a:t>
+            </a:r>
+            <a:br>
+              <a:rPr lang="en-US" b="1" dirty="0">
+                <a:latin typeface="Times New Roman" panose="02020603050405020304" pitchFamily="18" charset="0"/>
+                <a:cs typeface="Times New Roman" panose="02020603050405020304" pitchFamily="18" charset="0"/>
+              </a:rPr>
+            </a:br>
+            <a:endParaRPr lang="en-IN" b="1" dirty="0">
+              <a:solidFill>
+                <a:schemeClr val="tx1"/>
+              </a:solidFill>
+              <a:latin typeface="Times New Roman" panose="02020603050405020304" pitchFamily="18" charset="0"/>
+              <a:cs typeface="Times New Roman" panose="02020603050405020304" pitchFamily="18" charset="0"/>
+            </a:endParaRPr>
           </a:p>
         </p:txBody>
       </p:sp>
       <p:pic>
         <p:nvPicPr>
-          <p:cNvPr id="7" name="Content Placeholder 6">
+          <p:cNvPr id="3" name="Content Placeholder 2">
             <a:extLst>
               <a:ext uri="{FF2B5EF4-FFF2-40B4-BE49-F238E27FC236}">
-                <a16:creationId xmlns:a16="http://schemas.microsoft.com/office/drawing/2014/main" id="{142092B4-461D-7419-E0C8-DEAC925F36CF}"/>
+                <a16:creationId xmlns:a16="http://schemas.microsoft.com/office/drawing/2014/main" id="{C8C051D0-98F0-A070-7415-3432D32FF7C5}"/>
               </a:ext>
             </a:extLst>
           </p:cNvPr>
@@ -7895,41 +9738,25 @@
           </p:nvPr>
         </p:nvPicPr>
         <p:blipFill>
-          <a:blip r:embed="rId2">
-            <a:extLst>
-              <a:ext uri="{28A0092B-C50C-407E-A947-70E740481C1C}">
-                <a14:useLocalDpi xmlns:a14="http://schemas.microsoft.com/office/drawing/2010/main" val="0"/>
-              </a:ext>
-            </a:extLst>
-          </a:blip>
+          <a:blip r:embed="rId2"/>
           <a:stretch>
             <a:fillRect/>
           </a:stretch>
         </p:blipFill>
-        <p:spPr bwMode="auto">
-          <a:xfrm>
-            <a:off x="0" y="0"/>
-            <a:ext cx="12191999" cy="6858000"/>
+        <p:spPr>
+          <a:xfrm>
+            <a:off x="0" y="1369477"/>
+            <a:ext cx="12192000" cy="5192189"/>
           </a:xfrm>
           <a:prstGeom prst="rect">
             <a:avLst/>
           </a:prstGeom>
-          <a:noFill/>
-          <a:extLst>
-            <a:ext uri="{909E8E84-426E-40DD-AFC4-6F175D3DCCD1}">
-              <a14:hiddenFill xmlns:a14="http://schemas.microsoft.com/office/drawing/2010/main">
-                <a:solidFill>
-                  <a:srgbClr val="FFFFFF"/>
-                </a:solidFill>
-              </a14:hiddenFill>
-            </a:ext>
-          </a:extLst>
         </p:spPr>
       </p:pic>
     </p:spTree>
     <p:extLst>
       <p:ext uri="{BB962C8B-B14F-4D97-AF65-F5344CB8AC3E}">
-        <p14:creationId xmlns:p14="http://schemas.microsoft.com/office/powerpoint/2010/main" val="336565014"/>
+        <p14:creationId xmlns:p14="http://schemas.microsoft.com/office/powerpoint/2010/main" val="90305939"/>
       </p:ext>
     </p:extLst>
   </p:cSld>
@@ -7939,12 +9766,18 @@
 </p:sld>
 </file>
 
-<file path=ppt/slides/slide2.xml><?xml version="1.0" encoding="utf-8"?>
+<file path=ppt/slides/slide24.xml><?xml version="1.0" encoding="utf-8"?>
 <p:sld xmlns:a="http://schemas.openxmlformats.org/drawingml/2006/main" xmlns:r="http://schemas.openxmlformats.org/officeDocument/2006/relationships" xmlns:p="http://schemas.openxmlformats.org/presentationml/2006/main">
   <p:cSld>
     <p:spTree>
       <p:nvGrpSpPr>
-        <p:cNvPr id="1" name=""/>
+        <p:cNvPr id="1" name="">
+          <a:extLst>
+            <a:ext uri="{FF2B5EF4-FFF2-40B4-BE49-F238E27FC236}">
+              <a16:creationId xmlns:a16="http://schemas.microsoft.com/office/drawing/2014/main" id="{178668EC-A059-B581-D4F8-AB7720EA4581}"/>
+            </a:ext>
+          </a:extLst>
+        </p:cNvPr>
         <p:cNvGrpSpPr/>
         <p:nvPr/>
       </p:nvGrpSpPr>
@@ -7961,7 +9794,7 @@
           <p:cNvPr id="2" name="Title 1">
             <a:extLst>
               <a:ext uri="{FF2B5EF4-FFF2-40B4-BE49-F238E27FC236}">
-                <a16:creationId xmlns:a16="http://schemas.microsoft.com/office/drawing/2014/main" id="{5C3E4E1F-FDC9-0338-A8EE-D3959935D3D6}"/>
+                <a16:creationId xmlns:a16="http://schemas.microsoft.com/office/drawing/2014/main" id="{DFC3E0D1-6AB4-E326-307B-29903C12C225}"/>
               </a:ext>
             </a:extLst>
           </p:cNvPr>
@@ -7974,7 +9807,7 @@
         </p:nvSpPr>
         <p:spPr>
           <a:xfrm>
-            <a:off x="2789162" y="511628"/>
+            <a:off x="1095245" y="378878"/>
             <a:ext cx="8596668" cy="1320800"/>
           </a:xfrm>
         </p:spPr>
@@ -7984,17 +9817,34 @@
           </a:bodyPr>
           <a:lstStyle/>
           <a:p>
-            <a:r>
-              <a:rPr lang="en-US" sz="3800" b="1" dirty="0">
+            <a:pPr algn="ctr"/>
+            <a:r>
+              <a:rPr lang="en-US" b="1" dirty="0">
                 <a:solidFill>
                   <a:schemeClr val="tx1"/>
                 </a:solidFill>
                 <a:latin typeface="Times New Roman" panose="02020603050405020304" pitchFamily="18" charset="0"/>
                 <a:cs typeface="Times New Roman" panose="02020603050405020304" pitchFamily="18" charset="0"/>
               </a:rPr>
-              <a:t>TABLE OF CONTENTS</a:t>
-            </a:r>
-            <a:endParaRPr lang="en-IN" sz="3800" b="1" dirty="0">
+              <a:t>                </a:t>
+            </a:r>
+            <a:r>
+              <a:rPr lang="en-IN" b="1" dirty="0">
+                <a:solidFill>
+                  <a:schemeClr val="tx1"/>
+                </a:solidFill>
+                <a:latin typeface="Times New Roman" panose="02020603050405020304" pitchFamily="18" charset="0"/>
+                <a:cs typeface="Times New Roman" panose="02020603050405020304" pitchFamily="18" charset="0"/>
+              </a:rPr>
+              <a:t>Pipeline to process Json file</a:t>
+            </a:r>
+            <a:br>
+              <a:rPr lang="en-US" b="1" dirty="0">
+                <a:latin typeface="Times New Roman" panose="02020603050405020304" pitchFamily="18" charset="0"/>
+                <a:cs typeface="Times New Roman" panose="02020603050405020304" pitchFamily="18" charset="0"/>
+              </a:rPr>
+            </a:br>
+            <a:endParaRPr lang="en-IN" b="1" dirty="0">
               <a:solidFill>
                 <a:schemeClr val="tx1"/>
               </a:solidFill>
@@ -8004,12 +9854,80 @@
           </a:p>
         </p:txBody>
       </p:sp>
-      <p:sp>
-        <p:nvSpPr>
-          <p:cNvPr id="3" name="Content Placeholder 2">
+      <p:pic>
+        <p:nvPicPr>
+          <p:cNvPr id="6" name="Content Placeholder 5">
             <a:extLst>
               <a:ext uri="{FF2B5EF4-FFF2-40B4-BE49-F238E27FC236}">
-                <a16:creationId xmlns:a16="http://schemas.microsoft.com/office/drawing/2014/main" id="{C1FC9FCD-9930-CA09-BE2A-F31C7250DCB1}"/>
+                <a16:creationId xmlns:a16="http://schemas.microsoft.com/office/drawing/2014/main" id="{221580C8-EDA4-6506-8A90-5A6628DC1773}"/>
+              </a:ext>
+            </a:extLst>
+          </p:cNvPr>
+          <p:cNvPicPr>
+            <a:picLocks noGrp="1" noChangeAspect="1"/>
+          </p:cNvPicPr>
+          <p:nvPr>
+            <p:ph idx="1"/>
+          </p:nvPr>
+        </p:nvPicPr>
+        <p:blipFill>
+          <a:blip r:embed="rId2"/>
+          <a:stretch>
+            <a:fillRect/>
+          </a:stretch>
+        </p:blipFill>
+        <p:spPr>
+          <a:xfrm>
+            <a:off x="0" y="1219200"/>
+            <a:ext cx="12192000" cy="5537200"/>
+          </a:xfrm>
+          <a:prstGeom prst="rect">
+            <a:avLst/>
+          </a:prstGeom>
+        </p:spPr>
+      </p:pic>
+    </p:spTree>
+    <p:extLst>
+      <p:ext uri="{BB962C8B-B14F-4D97-AF65-F5344CB8AC3E}">
+        <p14:creationId xmlns:p14="http://schemas.microsoft.com/office/powerpoint/2010/main" val="3604352671"/>
+      </p:ext>
+    </p:extLst>
+  </p:cSld>
+  <p:clrMapOvr>
+    <a:masterClrMapping/>
+  </p:clrMapOvr>
+</p:sld>
+</file>
+
+<file path=ppt/slides/slide25.xml><?xml version="1.0" encoding="utf-8"?>
+<p:sld xmlns:a="http://schemas.openxmlformats.org/drawingml/2006/main" xmlns:r="http://schemas.openxmlformats.org/officeDocument/2006/relationships" xmlns:p="http://schemas.openxmlformats.org/presentationml/2006/main">
+  <p:cSld>
+    <p:spTree>
+      <p:nvGrpSpPr>
+        <p:cNvPr id="1" name="">
+          <a:extLst>
+            <a:ext uri="{FF2B5EF4-FFF2-40B4-BE49-F238E27FC236}">
+              <a16:creationId xmlns:a16="http://schemas.microsoft.com/office/drawing/2014/main" id="{38CE7C16-710F-142C-BFDE-B00F410D2E1B}"/>
+            </a:ext>
+          </a:extLst>
+        </p:cNvPr>
+        <p:cNvGrpSpPr/>
+        <p:nvPr/>
+      </p:nvGrpSpPr>
+      <p:grpSpPr>
+        <a:xfrm>
+          <a:off x="0" y="0"/>
+          <a:ext cx="0" cy="0"/>
+          <a:chOff x="0" y="0"/>
+          <a:chExt cx="0" cy="0"/>
+        </a:xfrm>
+      </p:grpSpPr>
+      <p:sp>
+        <p:nvSpPr>
+          <p:cNvPr id="2" name="Title 1">
+            <a:extLst>
+              <a:ext uri="{FF2B5EF4-FFF2-40B4-BE49-F238E27FC236}">
+                <a16:creationId xmlns:a16="http://schemas.microsoft.com/office/drawing/2014/main" id="{2FA2BE23-A1B0-CFA0-E22F-154D45B9E2C9}"/>
               </a:ext>
             </a:extLst>
           </p:cNvPr>
@@ -8017,13 +9935,13 @@
             <a:spLocks noGrp="1"/>
           </p:cNvSpPr>
           <p:nvPr>
-            <p:ph idx="1"/>
-          </p:nvPr>
-        </p:nvSpPr>
-        <p:spPr>
-          <a:xfrm>
-            <a:off x="677334" y="1284515"/>
-            <a:ext cx="10284580" cy="4756848"/>
+            <p:ph type="title"/>
+          </p:nvPr>
+        </p:nvSpPr>
+        <p:spPr>
+          <a:xfrm>
+            <a:off x="1095245" y="378878"/>
+            <a:ext cx="8596668" cy="1320800"/>
           </a:xfrm>
         </p:spPr>
         <p:txBody>
@@ -8032,80 +9950,591 @@
           </a:bodyPr>
           <a:lstStyle/>
           <a:p>
-            <a:r>
-              <a:rPr lang="en-US" sz="3600" dirty="0">
-                <a:latin typeface="Times New Roman" panose="02020603050405020304" pitchFamily="18" charset="0"/>
-                <a:cs typeface="Times New Roman" panose="02020603050405020304" pitchFamily="18" charset="0"/>
-              </a:rPr>
-              <a:t>Problem Statement</a:t>
-            </a:r>
-          </a:p>
-          <a:p>
-            <a:r>
-              <a:rPr lang="en-US" sz="3600" dirty="0">
-                <a:latin typeface="Times New Roman" panose="02020603050405020304" pitchFamily="18" charset="0"/>
-                <a:cs typeface="Times New Roman" panose="02020603050405020304" pitchFamily="18" charset="0"/>
-              </a:rPr>
-              <a:t>Functional Diagram</a:t>
-            </a:r>
-          </a:p>
-          <a:p>
-            <a:r>
-              <a:rPr lang="en-US" sz="3600" dirty="0">
-                <a:latin typeface="Times New Roman" panose="02020603050405020304" pitchFamily="18" charset="0"/>
-                <a:cs typeface="Times New Roman" panose="02020603050405020304" pitchFamily="18" charset="0"/>
-              </a:rPr>
-              <a:t>Tools and Technologies</a:t>
-            </a:r>
-          </a:p>
-          <a:p>
-            <a:r>
-              <a:rPr lang="en-US" sz="3600" dirty="0">
-                <a:latin typeface="Times New Roman" panose="02020603050405020304" pitchFamily="18" charset="0"/>
-                <a:cs typeface="Times New Roman" panose="02020603050405020304" pitchFamily="18" charset="0"/>
-              </a:rPr>
-              <a:t>Technical Diagram</a:t>
-            </a:r>
-          </a:p>
-          <a:p>
-            <a:r>
-              <a:rPr lang="en-US" sz="3600" dirty="0">
-                <a:latin typeface="Times New Roman" panose="02020603050405020304" pitchFamily="18" charset="0"/>
-                <a:cs typeface="Times New Roman" panose="02020603050405020304" pitchFamily="18" charset="0"/>
-              </a:rPr>
-              <a:t>Dataset</a:t>
-            </a:r>
-          </a:p>
-          <a:p>
-            <a:r>
-              <a:rPr lang="en-US" sz="3600" dirty="0">
-                <a:latin typeface="Times New Roman" panose="02020603050405020304" pitchFamily="18" charset="0"/>
-                <a:cs typeface="Times New Roman" panose="02020603050405020304" pitchFamily="18" charset="0"/>
-              </a:rPr>
-              <a:t>Schema Modeling</a:t>
-            </a:r>
-          </a:p>
-          <a:p>
-            <a:r>
-              <a:rPr lang="en-US" sz="3600" dirty="0">
-                <a:latin typeface="Times New Roman" panose="02020603050405020304" pitchFamily="18" charset="0"/>
-                <a:cs typeface="Times New Roman" panose="02020603050405020304" pitchFamily="18" charset="0"/>
-              </a:rPr>
-              <a:t>Key Performance Indicators</a:t>
-            </a:r>
-          </a:p>
-          <a:p>
-            <a:endParaRPr lang="en-US" dirty="0"/>
-          </a:p>
-          <a:p>
-            <a:endParaRPr lang="en-IN" dirty="0"/>
-          </a:p>
-        </p:txBody>
-      </p:sp>
+            <a:pPr algn="ctr"/>
+            <a:r>
+              <a:rPr lang="en-US" b="1" dirty="0">
+                <a:solidFill>
+                  <a:schemeClr val="tx1"/>
+                </a:solidFill>
+                <a:latin typeface="Times New Roman" panose="02020603050405020304" pitchFamily="18" charset="0"/>
+                <a:cs typeface="Times New Roman" panose="02020603050405020304" pitchFamily="18" charset="0"/>
+              </a:rPr>
+              <a:t>                </a:t>
+            </a:r>
+            <a:r>
+              <a:rPr lang="en-IN" b="1" dirty="0">
+                <a:solidFill>
+                  <a:schemeClr val="tx1"/>
+                </a:solidFill>
+                <a:latin typeface="Times New Roman" panose="02020603050405020304" pitchFamily="18" charset="0"/>
+                <a:cs typeface="Times New Roman" panose="02020603050405020304" pitchFamily="18" charset="0"/>
+              </a:rPr>
+              <a:t>Pipeline to process CSV file</a:t>
+            </a:r>
+            <a:br>
+              <a:rPr lang="en-US" b="1" dirty="0">
+                <a:latin typeface="Times New Roman" panose="02020603050405020304" pitchFamily="18" charset="0"/>
+                <a:cs typeface="Times New Roman" panose="02020603050405020304" pitchFamily="18" charset="0"/>
+              </a:rPr>
+            </a:br>
+            <a:endParaRPr lang="en-IN" b="1" dirty="0">
+              <a:solidFill>
+                <a:schemeClr val="tx1"/>
+              </a:solidFill>
+              <a:latin typeface="Times New Roman" panose="02020603050405020304" pitchFamily="18" charset="0"/>
+              <a:cs typeface="Times New Roman" panose="02020603050405020304" pitchFamily="18" charset="0"/>
+            </a:endParaRPr>
+          </a:p>
+        </p:txBody>
+      </p:sp>
+      <p:pic>
+        <p:nvPicPr>
+          <p:cNvPr id="5" name="Content Placeholder 4">
+            <a:extLst>
+              <a:ext uri="{FF2B5EF4-FFF2-40B4-BE49-F238E27FC236}">
+                <a16:creationId xmlns:a16="http://schemas.microsoft.com/office/drawing/2014/main" id="{7DEBDDAE-F64E-8F7A-3CA1-C42D2E83C35E}"/>
+              </a:ext>
+            </a:extLst>
+          </p:cNvPr>
+          <p:cNvPicPr>
+            <a:picLocks noGrp="1" noChangeAspect="1"/>
+          </p:cNvPicPr>
+          <p:nvPr>
+            <p:ph idx="1"/>
+          </p:nvPr>
+        </p:nvPicPr>
+        <p:blipFill>
+          <a:blip r:embed="rId2"/>
+          <a:stretch>
+            <a:fillRect/>
+          </a:stretch>
+        </p:blipFill>
+        <p:spPr>
+          <a:xfrm>
+            <a:off x="0" y="1176867"/>
+            <a:ext cx="12191999" cy="5621866"/>
+          </a:xfrm>
+          <a:prstGeom prst="rect">
+            <a:avLst/>
+          </a:prstGeom>
+        </p:spPr>
+      </p:pic>
     </p:spTree>
     <p:extLst>
       <p:ext uri="{BB962C8B-B14F-4D97-AF65-F5344CB8AC3E}">
-        <p14:creationId xmlns:p14="http://schemas.microsoft.com/office/powerpoint/2010/main" val="1388118647"/>
+        <p14:creationId xmlns:p14="http://schemas.microsoft.com/office/powerpoint/2010/main" val="305513511"/>
+      </p:ext>
+    </p:extLst>
+  </p:cSld>
+  <p:clrMapOvr>
+    <a:masterClrMapping/>
+  </p:clrMapOvr>
+</p:sld>
+</file>
+
+<file path=ppt/slides/slide26.xml><?xml version="1.0" encoding="utf-8"?>
+<p:sld xmlns:a="http://schemas.openxmlformats.org/drawingml/2006/main" xmlns:r="http://schemas.openxmlformats.org/officeDocument/2006/relationships" xmlns:p="http://schemas.openxmlformats.org/presentationml/2006/main">
+  <p:cSld>
+    <p:spTree>
+      <p:nvGrpSpPr>
+        <p:cNvPr id="1" name="">
+          <a:extLst>
+            <a:ext uri="{FF2B5EF4-FFF2-40B4-BE49-F238E27FC236}">
+              <a16:creationId xmlns:a16="http://schemas.microsoft.com/office/drawing/2014/main" id="{1F79CB9C-C06A-8AA2-3B8E-2C9B81A12ADD}"/>
+            </a:ext>
+          </a:extLst>
+        </p:cNvPr>
+        <p:cNvGrpSpPr/>
+        <p:nvPr/>
+      </p:nvGrpSpPr>
+      <p:grpSpPr>
+        <a:xfrm>
+          <a:off x="0" y="0"/>
+          <a:ext cx="0" cy="0"/>
+          <a:chOff x="0" y="0"/>
+          <a:chExt cx="0" cy="0"/>
+        </a:xfrm>
+      </p:grpSpPr>
+      <p:sp>
+        <p:nvSpPr>
+          <p:cNvPr id="2" name="Title 1">
+            <a:extLst>
+              <a:ext uri="{FF2B5EF4-FFF2-40B4-BE49-F238E27FC236}">
+                <a16:creationId xmlns:a16="http://schemas.microsoft.com/office/drawing/2014/main" id="{ABFAD879-07FF-B3E1-098B-E3648BECA5E8}"/>
+              </a:ext>
+            </a:extLst>
+          </p:cNvPr>
+          <p:cNvSpPr>
+            <a:spLocks noGrp="1"/>
+          </p:cNvSpPr>
+          <p:nvPr>
+            <p:ph type="title"/>
+          </p:nvPr>
+        </p:nvSpPr>
+        <p:spPr>
+          <a:xfrm>
+            <a:off x="1095245" y="378878"/>
+            <a:ext cx="8596668" cy="1320800"/>
+          </a:xfrm>
+        </p:spPr>
+        <p:txBody>
+          <a:bodyPr>
+            <a:normAutofit/>
+          </a:bodyPr>
+          <a:lstStyle/>
+          <a:p>
+            <a:pPr algn="ctr"/>
+            <a:r>
+              <a:rPr lang="en-US" b="1" dirty="0">
+                <a:solidFill>
+                  <a:schemeClr val="tx1"/>
+                </a:solidFill>
+                <a:latin typeface="Times New Roman" panose="02020603050405020304" pitchFamily="18" charset="0"/>
+                <a:cs typeface="Times New Roman" panose="02020603050405020304" pitchFamily="18" charset="0"/>
+              </a:rPr>
+              <a:t>                </a:t>
+            </a:r>
+            <a:r>
+              <a:rPr lang="en-IN" b="1" dirty="0">
+                <a:solidFill>
+                  <a:schemeClr val="tx1"/>
+                </a:solidFill>
+                <a:latin typeface="Times New Roman" panose="02020603050405020304" pitchFamily="18" charset="0"/>
+                <a:cs typeface="Times New Roman" panose="02020603050405020304" pitchFamily="18" charset="0"/>
+              </a:rPr>
+              <a:t>Pipeline to process text file</a:t>
+            </a:r>
+            <a:br>
+              <a:rPr lang="en-US" b="1" dirty="0">
+                <a:latin typeface="Times New Roman" panose="02020603050405020304" pitchFamily="18" charset="0"/>
+                <a:cs typeface="Times New Roman" panose="02020603050405020304" pitchFamily="18" charset="0"/>
+              </a:rPr>
+            </a:br>
+            <a:endParaRPr lang="en-IN" b="1" dirty="0">
+              <a:solidFill>
+                <a:schemeClr val="tx1"/>
+              </a:solidFill>
+              <a:latin typeface="Times New Roman" panose="02020603050405020304" pitchFamily="18" charset="0"/>
+              <a:cs typeface="Times New Roman" panose="02020603050405020304" pitchFamily="18" charset="0"/>
+            </a:endParaRPr>
+          </a:p>
+        </p:txBody>
+      </p:sp>
+      <p:pic>
+        <p:nvPicPr>
+          <p:cNvPr id="6" name="Content Placeholder 5">
+            <a:extLst>
+              <a:ext uri="{FF2B5EF4-FFF2-40B4-BE49-F238E27FC236}">
+                <a16:creationId xmlns:a16="http://schemas.microsoft.com/office/drawing/2014/main" id="{82834F8B-BC31-119C-CD5D-549EFB86D9D0}"/>
+              </a:ext>
+            </a:extLst>
+          </p:cNvPr>
+          <p:cNvPicPr>
+            <a:picLocks noGrp="1" noChangeAspect="1"/>
+          </p:cNvPicPr>
+          <p:nvPr>
+            <p:ph idx="1"/>
+          </p:nvPr>
+        </p:nvPicPr>
+        <p:blipFill>
+          <a:blip r:embed="rId2"/>
+          <a:stretch>
+            <a:fillRect/>
+          </a:stretch>
+        </p:blipFill>
+        <p:spPr>
+          <a:xfrm>
+            <a:off x="0" y="1363133"/>
+            <a:ext cx="12192000" cy="5232400"/>
+          </a:xfrm>
+          <a:prstGeom prst="rect">
+            <a:avLst/>
+          </a:prstGeom>
+        </p:spPr>
+      </p:pic>
+    </p:spTree>
+    <p:extLst>
+      <p:ext uri="{BB962C8B-B14F-4D97-AF65-F5344CB8AC3E}">
+        <p14:creationId xmlns:p14="http://schemas.microsoft.com/office/powerpoint/2010/main" val="566099470"/>
+      </p:ext>
+    </p:extLst>
+  </p:cSld>
+  <p:clrMapOvr>
+    <a:masterClrMapping/>
+  </p:clrMapOvr>
+</p:sld>
+</file>
+
+<file path=ppt/slides/slide27.xml><?xml version="1.0" encoding="utf-8"?>
+<p:sld xmlns:a="http://schemas.openxmlformats.org/drawingml/2006/main" xmlns:r="http://schemas.openxmlformats.org/officeDocument/2006/relationships" xmlns:p="http://schemas.openxmlformats.org/presentationml/2006/main">
+  <p:cSld>
+    <p:spTree>
+      <p:nvGrpSpPr>
+        <p:cNvPr id="1" name="">
+          <a:extLst>
+            <a:ext uri="{FF2B5EF4-FFF2-40B4-BE49-F238E27FC236}">
+              <a16:creationId xmlns:a16="http://schemas.microsoft.com/office/drawing/2014/main" id="{3457F171-A010-546C-5934-8A4236333358}"/>
+            </a:ext>
+          </a:extLst>
+        </p:cNvPr>
+        <p:cNvGrpSpPr/>
+        <p:nvPr/>
+      </p:nvGrpSpPr>
+      <p:grpSpPr>
+        <a:xfrm>
+          <a:off x="0" y="0"/>
+          <a:ext cx="0" cy="0"/>
+          <a:chOff x="0" y="0"/>
+          <a:chExt cx="0" cy="0"/>
+        </a:xfrm>
+      </p:grpSpPr>
+      <p:sp>
+        <p:nvSpPr>
+          <p:cNvPr id="2" name="Title 1">
+            <a:extLst>
+              <a:ext uri="{FF2B5EF4-FFF2-40B4-BE49-F238E27FC236}">
+                <a16:creationId xmlns:a16="http://schemas.microsoft.com/office/drawing/2014/main" id="{57E8F39C-6508-E14C-A15E-141AEDF342ED}"/>
+              </a:ext>
+            </a:extLst>
+          </p:cNvPr>
+          <p:cNvSpPr>
+            <a:spLocks noGrp="1"/>
+          </p:cNvSpPr>
+          <p:nvPr>
+            <p:ph type="title"/>
+          </p:nvPr>
+        </p:nvSpPr>
+        <p:spPr>
+          <a:xfrm>
+            <a:off x="1095245" y="378878"/>
+            <a:ext cx="8596668" cy="1320800"/>
+          </a:xfrm>
+        </p:spPr>
+        <p:txBody>
+          <a:bodyPr>
+            <a:normAutofit/>
+          </a:bodyPr>
+          <a:lstStyle/>
+          <a:p>
+            <a:pPr algn="ctr"/>
+            <a:r>
+              <a:rPr lang="en-US" b="1" dirty="0">
+                <a:solidFill>
+                  <a:schemeClr val="tx1"/>
+                </a:solidFill>
+                <a:latin typeface="Times New Roman" panose="02020603050405020304" pitchFamily="18" charset="0"/>
+                <a:cs typeface="Times New Roman" panose="02020603050405020304" pitchFamily="18" charset="0"/>
+              </a:rPr>
+              <a:t>                </a:t>
+            </a:r>
+            <a:r>
+              <a:rPr lang="en-IN" b="1" dirty="0">
+                <a:solidFill>
+                  <a:schemeClr val="tx1"/>
+                </a:solidFill>
+                <a:latin typeface="Times New Roman" panose="02020603050405020304" pitchFamily="18" charset="0"/>
+                <a:cs typeface="Times New Roman" panose="02020603050405020304" pitchFamily="18" charset="0"/>
+              </a:rPr>
+              <a:t>Pipeline for Metadata processing</a:t>
+            </a:r>
+            <a:br>
+              <a:rPr lang="en-US" b="1" dirty="0">
+                <a:latin typeface="Times New Roman" panose="02020603050405020304" pitchFamily="18" charset="0"/>
+                <a:cs typeface="Times New Roman" panose="02020603050405020304" pitchFamily="18" charset="0"/>
+              </a:rPr>
+            </a:br>
+            <a:endParaRPr lang="en-IN" b="1" dirty="0">
+              <a:solidFill>
+                <a:schemeClr val="tx1"/>
+              </a:solidFill>
+              <a:latin typeface="Times New Roman" panose="02020603050405020304" pitchFamily="18" charset="0"/>
+              <a:cs typeface="Times New Roman" panose="02020603050405020304" pitchFamily="18" charset="0"/>
+            </a:endParaRPr>
+          </a:p>
+        </p:txBody>
+      </p:sp>
+      <p:pic>
+        <p:nvPicPr>
+          <p:cNvPr id="5" name="Content Placeholder 4">
+            <a:extLst>
+              <a:ext uri="{FF2B5EF4-FFF2-40B4-BE49-F238E27FC236}">
+                <a16:creationId xmlns:a16="http://schemas.microsoft.com/office/drawing/2014/main" id="{2D47E10E-12E7-413C-B6C3-6A5BD62E5344}"/>
+              </a:ext>
+            </a:extLst>
+          </p:cNvPr>
+          <p:cNvPicPr>
+            <a:picLocks noGrp="1" noChangeAspect="1"/>
+          </p:cNvPicPr>
+          <p:nvPr>
+            <p:ph idx="1"/>
+          </p:nvPr>
+        </p:nvPicPr>
+        <p:blipFill>
+          <a:blip r:embed="rId2"/>
+          <a:stretch>
+            <a:fillRect/>
+          </a:stretch>
+        </p:blipFill>
+        <p:spPr>
+          <a:xfrm>
+            <a:off x="0" y="1236133"/>
+            <a:ext cx="12192000" cy="5621867"/>
+          </a:xfrm>
+          <a:prstGeom prst="rect">
+            <a:avLst/>
+          </a:prstGeom>
+        </p:spPr>
+      </p:pic>
+    </p:spTree>
+    <p:extLst>
+      <p:ext uri="{BB962C8B-B14F-4D97-AF65-F5344CB8AC3E}">
+        <p14:creationId xmlns:p14="http://schemas.microsoft.com/office/powerpoint/2010/main" val="2597782462"/>
+      </p:ext>
+    </p:extLst>
+  </p:cSld>
+  <p:clrMapOvr>
+    <a:masterClrMapping/>
+  </p:clrMapOvr>
+</p:sld>
+</file>
+
+<file path=ppt/slides/slide28.xml><?xml version="1.0" encoding="utf-8"?>
+<p:sld xmlns:a="http://schemas.openxmlformats.org/drawingml/2006/main" xmlns:r="http://schemas.openxmlformats.org/officeDocument/2006/relationships" xmlns:p="http://schemas.openxmlformats.org/presentationml/2006/main">
+  <p:cSld>
+    <p:spTree>
+      <p:nvGrpSpPr>
+        <p:cNvPr id="1" name="">
+          <a:extLst>
+            <a:ext uri="{FF2B5EF4-FFF2-40B4-BE49-F238E27FC236}">
+              <a16:creationId xmlns:a16="http://schemas.microsoft.com/office/drawing/2014/main" id="{C6ED4018-96CD-380B-5BF2-8F759F44AB55}"/>
+            </a:ext>
+          </a:extLst>
+        </p:cNvPr>
+        <p:cNvGrpSpPr/>
+        <p:nvPr/>
+      </p:nvGrpSpPr>
+      <p:grpSpPr>
+        <a:xfrm>
+          <a:off x="0" y="0"/>
+          <a:ext cx="0" cy="0"/>
+          <a:chOff x="0" y="0"/>
+          <a:chExt cx="0" cy="0"/>
+        </a:xfrm>
+      </p:grpSpPr>
+      <p:sp>
+        <p:nvSpPr>
+          <p:cNvPr id="2" name="Title 1">
+            <a:extLst>
+              <a:ext uri="{FF2B5EF4-FFF2-40B4-BE49-F238E27FC236}">
+                <a16:creationId xmlns:a16="http://schemas.microsoft.com/office/drawing/2014/main" id="{8925F316-D739-E74F-164B-78AEF3097D76}"/>
+              </a:ext>
+            </a:extLst>
+          </p:cNvPr>
+          <p:cNvSpPr>
+            <a:spLocks noGrp="1"/>
+          </p:cNvSpPr>
+          <p:nvPr>
+            <p:ph type="title"/>
+          </p:nvPr>
+        </p:nvSpPr>
+        <p:spPr>
+          <a:xfrm>
+            <a:off x="1095245" y="378878"/>
+            <a:ext cx="8596668" cy="1320800"/>
+          </a:xfrm>
+        </p:spPr>
+        <p:txBody>
+          <a:bodyPr>
+            <a:normAutofit fontScale="90000"/>
+          </a:bodyPr>
+          <a:lstStyle/>
+          <a:p>
+            <a:pPr algn="ctr"/>
+            <a:r>
+              <a:rPr lang="en-US" b="1" dirty="0">
+                <a:solidFill>
+                  <a:schemeClr val="tx1"/>
+                </a:solidFill>
+                <a:latin typeface="Times New Roman" panose="02020603050405020304" pitchFamily="18" charset="0"/>
+                <a:cs typeface="Times New Roman" panose="02020603050405020304" pitchFamily="18" charset="0"/>
+              </a:rPr>
+              <a:t>                Data Transformation using Data flow</a:t>
+            </a:r>
+            <a:br>
+              <a:rPr lang="en-US" b="1" dirty="0">
+                <a:latin typeface="Times New Roman" panose="02020603050405020304" pitchFamily="18" charset="0"/>
+                <a:cs typeface="Times New Roman" panose="02020603050405020304" pitchFamily="18" charset="0"/>
+              </a:rPr>
+            </a:br>
+            <a:endParaRPr lang="en-IN" b="1" dirty="0">
+              <a:solidFill>
+                <a:schemeClr val="tx1"/>
+              </a:solidFill>
+              <a:latin typeface="Times New Roman" panose="02020603050405020304" pitchFamily="18" charset="0"/>
+              <a:cs typeface="Times New Roman" panose="02020603050405020304" pitchFamily="18" charset="0"/>
+            </a:endParaRPr>
+          </a:p>
+        </p:txBody>
+      </p:sp>
+      <p:pic>
+        <p:nvPicPr>
+          <p:cNvPr id="6" name="Content Placeholder 5">
+            <a:extLst>
+              <a:ext uri="{FF2B5EF4-FFF2-40B4-BE49-F238E27FC236}">
+                <a16:creationId xmlns:a16="http://schemas.microsoft.com/office/drawing/2014/main" id="{383FD0E7-E117-E29D-1D20-1523A3EDCA58}"/>
+              </a:ext>
+            </a:extLst>
+          </p:cNvPr>
+          <p:cNvPicPr>
+            <a:picLocks noGrp="1" noChangeAspect="1"/>
+          </p:cNvPicPr>
+          <p:nvPr>
+            <p:ph idx="1"/>
+          </p:nvPr>
+        </p:nvPicPr>
+        <p:blipFill>
+          <a:blip r:embed="rId2"/>
+          <a:stretch>
+            <a:fillRect/>
+          </a:stretch>
+        </p:blipFill>
+        <p:spPr>
+          <a:xfrm>
+            <a:off x="0" y="1278467"/>
+            <a:ext cx="12191999" cy="5579533"/>
+          </a:xfrm>
+          <a:prstGeom prst="rect">
+            <a:avLst/>
+          </a:prstGeom>
+        </p:spPr>
+      </p:pic>
+    </p:spTree>
+    <p:extLst>
+      <p:ext uri="{BB962C8B-B14F-4D97-AF65-F5344CB8AC3E}">
+        <p14:creationId xmlns:p14="http://schemas.microsoft.com/office/powerpoint/2010/main" val="2423362687"/>
+      </p:ext>
+    </p:extLst>
+  </p:cSld>
+  <p:clrMapOvr>
+    <a:masterClrMapping/>
+  </p:clrMapOvr>
+</p:sld>
+</file>
+
+<file path=ppt/slides/slide29.xml><?xml version="1.0" encoding="utf-8"?>
+<p:sld xmlns:a="http://schemas.openxmlformats.org/drawingml/2006/main" xmlns:r="http://schemas.openxmlformats.org/officeDocument/2006/relationships" xmlns:p="http://schemas.openxmlformats.org/presentationml/2006/main">
+  <p:cSld>
+    <p:spTree>
+      <p:nvGrpSpPr>
+        <p:cNvPr id="1" name="">
+          <a:extLst>
+            <a:ext uri="{FF2B5EF4-FFF2-40B4-BE49-F238E27FC236}">
+              <a16:creationId xmlns:a16="http://schemas.microsoft.com/office/drawing/2014/main" id="{23C7A7E0-BFC1-A438-C4F6-FDBFCAB521A6}"/>
+            </a:ext>
+          </a:extLst>
+        </p:cNvPr>
+        <p:cNvGrpSpPr/>
+        <p:nvPr/>
+      </p:nvGrpSpPr>
+      <p:grpSpPr>
+        <a:xfrm>
+          <a:off x="0" y="0"/>
+          <a:ext cx="0" cy="0"/>
+          <a:chOff x="0" y="0"/>
+          <a:chExt cx="0" cy="0"/>
+        </a:xfrm>
+      </p:grpSpPr>
+      <p:sp>
+        <p:nvSpPr>
+          <p:cNvPr id="2" name="Title 1">
+            <a:extLst>
+              <a:ext uri="{FF2B5EF4-FFF2-40B4-BE49-F238E27FC236}">
+                <a16:creationId xmlns:a16="http://schemas.microsoft.com/office/drawing/2014/main" id="{6DD2B93C-3F63-EDD7-6EF9-C2AB1CFC52CF}"/>
+              </a:ext>
+            </a:extLst>
+          </p:cNvPr>
+          <p:cNvSpPr>
+            <a:spLocks noGrp="1"/>
+          </p:cNvSpPr>
+          <p:nvPr>
+            <p:ph type="title"/>
+          </p:nvPr>
+        </p:nvSpPr>
+        <p:spPr>
+          <a:xfrm>
+            <a:off x="1095245" y="378878"/>
+            <a:ext cx="8596668" cy="1320800"/>
+          </a:xfrm>
+        </p:spPr>
+        <p:txBody>
+          <a:bodyPr>
+            <a:normAutofit fontScale="90000"/>
+          </a:bodyPr>
+          <a:lstStyle/>
+          <a:p>
+            <a:pPr algn="ctr"/>
+            <a:r>
+              <a:rPr lang="en-US" b="1" dirty="0">
+                <a:solidFill>
+                  <a:schemeClr val="tx1"/>
+                </a:solidFill>
+                <a:latin typeface="Times New Roman" panose="02020603050405020304" pitchFamily="18" charset="0"/>
+                <a:cs typeface="Times New Roman" panose="02020603050405020304" pitchFamily="18" charset="0"/>
+              </a:rPr>
+              <a:t>                Data Transformation using Data flow</a:t>
+            </a:r>
+            <a:br>
+              <a:rPr lang="en-US" b="1" dirty="0">
+                <a:latin typeface="Times New Roman" panose="02020603050405020304" pitchFamily="18" charset="0"/>
+                <a:cs typeface="Times New Roman" panose="02020603050405020304" pitchFamily="18" charset="0"/>
+              </a:rPr>
+            </a:br>
+            <a:endParaRPr lang="en-IN" b="1" dirty="0">
+              <a:solidFill>
+                <a:schemeClr val="tx1"/>
+              </a:solidFill>
+              <a:latin typeface="Times New Roman" panose="02020603050405020304" pitchFamily="18" charset="0"/>
+              <a:cs typeface="Times New Roman" panose="02020603050405020304" pitchFamily="18" charset="0"/>
+            </a:endParaRPr>
+          </a:p>
+        </p:txBody>
+      </p:sp>
+      <p:pic>
+        <p:nvPicPr>
+          <p:cNvPr id="5" name="Content Placeholder 4">
+            <a:extLst>
+              <a:ext uri="{FF2B5EF4-FFF2-40B4-BE49-F238E27FC236}">
+                <a16:creationId xmlns:a16="http://schemas.microsoft.com/office/drawing/2014/main" id="{0A7BC473-0FBE-83CF-89C2-A37ACDACCED0}"/>
+              </a:ext>
+            </a:extLst>
+          </p:cNvPr>
+          <p:cNvPicPr>
+            <a:picLocks noGrp="1" noChangeAspect="1"/>
+          </p:cNvPicPr>
+          <p:nvPr>
+            <p:ph idx="1"/>
+          </p:nvPr>
+        </p:nvPicPr>
+        <p:blipFill>
+          <a:blip r:embed="rId2"/>
+          <a:stretch>
+            <a:fillRect/>
+          </a:stretch>
+        </p:blipFill>
+        <p:spPr>
+          <a:xfrm>
+            <a:off x="0" y="1227667"/>
+            <a:ext cx="12192000" cy="5630333"/>
+          </a:xfrm>
+          <a:prstGeom prst="rect">
+            <a:avLst/>
+          </a:prstGeom>
+        </p:spPr>
+      </p:pic>
+    </p:spTree>
+    <p:extLst>
+      <p:ext uri="{BB962C8B-B14F-4D97-AF65-F5344CB8AC3E}">
+        <p14:creationId xmlns:p14="http://schemas.microsoft.com/office/powerpoint/2010/main" val="3031087994"/>
       </p:ext>
     </p:extLst>
   </p:cSld>
@@ -8150,7 +10579,7 @@
         </p:nvSpPr>
         <p:spPr>
           <a:xfrm>
-            <a:off x="0" y="630148"/>
+            <a:off x="368157" y="197493"/>
             <a:ext cx="9432437" cy="1320800"/>
           </a:xfrm>
         </p:spPr>
@@ -8167,7 +10596,7 @@
                   <a:schemeClr val="tx1"/>
                 </a:solidFill>
               </a:rPr>
-              <a:t>               </a:t>
+              <a:t>            </a:t>
             </a:r>
             <a:r>
               <a:rPr lang="en-US" sz="4000" b="1" dirty="0">
@@ -8177,7 +10606,7 @@
                 <a:latin typeface="Times New Roman" panose="02020603050405020304" pitchFamily="18" charset="0"/>
                 <a:cs typeface="Times New Roman" panose="02020603050405020304" pitchFamily="18" charset="0"/>
               </a:rPr>
-              <a:t>Problem Statement</a:t>
+              <a:t>Use Case Study</a:t>
             </a:r>
             <a:endParaRPr lang="en-IN" sz="4000" b="1" dirty="0">
               <a:solidFill>
@@ -8207,13 +10636,13 @@
         </p:nvSpPr>
         <p:spPr>
           <a:xfrm>
-            <a:off x="677333" y="1613043"/>
-            <a:ext cx="10870819" cy="4859676"/>
+            <a:off x="368157" y="999162"/>
+            <a:ext cx="11455685" cy="5278348"/>
           </a:xfrm>
         </p:spPr>
         <p:txBody>
           <a:bodyPr>
-            <a:normAutofit lnSpcReduction="10000"/>
+            <a:noAutofit/>
           </a:bodyPr>
           <a:lstStyle/>
           <a:p>
@@ -8221,62 +10650,73 @@
               <a:buNone/>
             </a:pPr>
             <a:r>
-              <a:rPr lang="en-US" sz="2600" dirty="0">
-                <a:latin typeface="Times New Roman" panose="02020603050405020304" pitchFamily="18" charset="0"/>
-                <a:cs typeface="Times New Roman" panose="02020603050405020304" pitchFamily="18" charset="0"/>
-              </a:rPr>
-              <a:t>Offline fashion retailers like </a:t>
-            </a:r>
-            <a:r>
-              <a:rPr lang="en-US" sz="2600" b="1" dirty="0" err="1">
-                <a:latin typeface="Times New Roman" panose="02020603050405020304" pitchFamily="18" charset="0"/>
-                <a:cs typeface="Times New Roman" panose="02020603050405020304" pitchFamily="18" charset="0"/>
-              </a:rPr>
-              <a:t>Fabindia</a:t>
-            </a:r>
-            <a:r>
-              <a:rPr lang="en-US" sz="2600" b="1" dirty="0">
-                <a:latin typeface="Times New Roman" panose="02020603050405020304" pitchFamily="18" charset="0"/>
-                <a:cs typeface="Times New Roman" panose="02020603050405020304" pitchFamily="18" charset="0"/>
-              </a:rPr>
-              <a:t>-style stores</a:t>
-            </a:r>
-            <a:r>
-              <a:rPr lang="en-US" sz="2600" dirty="0">
-                <a:latin typeface="Times New Roman" panose="02020603050405020304" pitchFamily="18" charset="0"/>
-                <a:cs typeface="Times New Roman" panose="02020603050405020304" pitchFamily="18" charset="0"/>
-              </a:rPr>
-              <a:t> operate through physical outlets and rely heavily on:</a:t>
-            </a:r>
-          </a:p>
-          <a:p>
-            <a:pPr lvl="1"/>
-            <a:r>
-              <a:rPr lang="en-US" sz="2400" dirty="0">
-                <a:latin typeface="Times New Roman" panose="02020603050405020304" pitchFamily="18" charset="0"/>
-                <a:cs typeface="Times New Roman" panose="02020603050405020304" pitchFamily="18" charset="0"/>
-              </a:rPr>
-              <a:t>POS billing systems</a:t>
-            </a:r>
-          </a:p>
-          <a:p>
-            <a:pPr lvl="1"/>
-            <a:r>
-              <a:rPr lang="en-US" sz="2400" dirty="0">
-                <a:latin typeface="Times New Roman" panose="02020603050405020304" pitchFamily="18" charset="0"/>
-                <a:cs typeface="Times New Roman" panose="02020603050405020304" pitchFamily="18" charset="0"/>
-              </a:rPr>
-              <a:t>Manual inventory tracking</a:t>
-            </a:r>
-          </a:p>
-          <a:p>
-            <a:pPr lvl="1"/>
-            <a:r>
-              <a:rPr lang="en-US" sz="2400" dirty="0">
-                <a:latin typeface="Times New Roman" panose="02020603050405020304" pitchFamily="18" charset="0"/>
-                <a:cs typeface="Times New Roman" panose="02020603050405020304" pitchFamily="18" charset="0"/>
-              </a:rPr>
-              <a:t>Periodic Excel-based reports</a:t>
+              <a:rPr lang="en-US" sz="2000" dirty="0">
+                <a:latin typeface="Times New Roman" panose="02020603050405020304" pitchFamily="18" charset="0"/>
+                <a:cs typeface="Times New Roman" panose="02020603050405020304" pitchFamily="18" charset="0"/>
+              </a:rPr>
+              <a:t>Fashion retailers – especially those operating in an ethnic and lifestyle segment similar to </a:t>
+            </a:r>
+            <a:r>
+              <a:rPr lang="en-US" sz="2000" dirty="0" err="1">
+                <a:latin typeface="Times New Roman" panose="02020603050405020304" pitchFamily="18" charset="0"/>
+                <a:cs typeface="Times New Roman" panose="02020603050405020304" pitchFamily="18" charset="0"/>
+              </a:rPr>
+              <a:t>FabIndia</a:t>
+            </a:r>
+            <a:r>
+              <a:rPr lang="en-US" sz="2000" dirty="0">
+                <a:latin typeface="Times New Roman" panose="02020603050405020304" pitchFamily="18" charset="0"/>
+                <a:cs typeface="Times New Roman" panose="02020603050405020304" pitchFamily="18" charset="0"/>
+              </a:rPr>
+              <a:t> – run both physical stores and online sales channels. However, their current operational ecosystem is still heavily dependent on :</a:t>
+            </a:r>
+          </a:p>
+          <a:p>
+            <a:pPr>
+              <a:buClr>
+                <a:schemeClr val="tx1"/>
+              </a:buClr>
+              <a:buFont typeface="Wingdings" panose="05000000000000000000" pitchFamily="2" charset="2"/>
+              <a:buChar char="Ø"/>
+            </a:pPr>
+            <a:r>
+              <a:rPr lang="en-US" sz="2000" dirty="0">
+                <a:latin typeface="Times New Roman" panose="02020603050405020304" pitchFamily="18" charset="0"/>
+                <a:cs typeface="Times New Roman" panose="02020603050405020304" pitchFamily="18" charset="0"/>
+              </a:rPr>
+              <a:t>POS billing systems in stores</a:t>
+            </a:r>
+          </a:p>
+          <a:p>
+            <a:pPr>
+              <a:buClr>
+                <a:schemeClr val="tx1"/>
+              </a:buClr>
+              <a:buFont typeface="Wingdings" panose="05000000000000000000" pitchFamily="2" charset="2"/>
+              <a:buChar char="Ø"/>
+            </a:pPr>
+            <a:r>
+              <a:rPr lang="en-US" sz="2000" dirty="0">
+                <a:latin typeface="Times New Roman" panose="02020603050405020304" pitchFamily="18" charset="0"/>
+                <a:cs typeface="Times New Roman" panose="02020603050405020304" pitchFamily="18" charset="0"/>
+              </a:rPr>
+              <a:t>Manual or semi-automated inventory tracking</a:t>
+            </a:r>
+          </a:p>
+          <a:p>
+            <a:pPr>
+              <a:buClr>
+                <a:schemeClr val="tx1"/>
+              </a:buClr>
+              <a:buFont typeface="Wingdings" panose="05000000000000000000" pitchFamily="2" charset="2"/>
+              <a:buChar char="Ø"/>
+            </a:pPr>
+            <a:r>
+              <a:rPr lang="en-US" sz="2000" dirty="0">
+                <a:latin typeface="Times New Roman" panose="02020603050405020304" pitchFamily="18" charset="0"/>
+                <a:cs typeface="Times New Roman" panose="02020603050405020304" pitchFamily="18" charset="0"/>
+              </a:rPr>
+              <a:t>Periodic Excel-based sales and stock reports</a:t>
             </a:r>
           </a:p>
           <a:p>
@@ -8284,55 +10724,59 @@
               <a:buNone/>
             </a:pPr>
             <a:r>
-              <a:rPr lang="en-US" sz="2600" dirty="0">
-                <a:latin typeface="Times New Roman" panose="02020603050405020304" pitchFamily="18" charset="0"/>
-                <a:cs typeface="Times New Roman" panose="02020603050405020304" pitchFamily="18" charset="0"/>
-              </a:rPr>
-              <a:t>Unlike e-commerce, offline stores </a:t>
-            </a:r>
-            <a:r>
-              <a:rPr lang="en-US" sz="2600" b="1" dirty="0">
-                <a:latin typeface="Times New Roman" panose="02020603050405020304" pitchFamily="18" charset="0"/>
-                <a:cs typeface="Times New Roman" panose="02020603050405020304" pitchFamily="18" charset="0"/>
-              </a:rPr>
-              <a:t>lack real-time visibility</a:t>
-            </a:r>
-            <a:r>
-              <a:rPr lang="en-US" sz="2600" dirty="0">
-                <a:latin typeface="Times New Roman" panose="02020603050405020304" pitchFamily="18" charset="0"/>
-                <a:cs typeface="Times New Roman" panose="02020603050405020304" pitchFamily="18" charset="0"/>
-              </a:rPr>
-              <a:t> into:</a:t>
-            </a:r>
-          </a:p>
-          <a:p>
-            <a:pPr lvl="1"/>
-            <a:r>
-              <a:rPr lang="en-US" sz="2400" dirty="0">
-                <a:latin typeface="Times New Roman" panose="02020603050405020304" pitchFamily="18" charset="0"/>
-                <a:cs typeface="Times New Roman" panose="02020603050405020304" pitchFamily="18" charset="0"/>
-              </a:rPr>
-              <a:t>What is selling fast</a:t>
-            </a:r>
-          </a:p>
-          <a:p>
-            <a:pPr lvl="1"/>
-            <a:r>
-              <a:rPr lang="en-US" sz="2400" dirty="0">
-                <a:latin typeface="Times New Roman" panose="02020603050405020304" pitchFamily="18" charset="0"/>
-                <a:cs typeface="Times New Roman" panose="02020603050405020304" pitchFamily="18" charset="0"/>
-              </a:rPr>
-              <a:t>Which sizes/colors are failing</a:t>
-            </a:r>
-          </a:p>
-          <a:p>
-            <a:pPr lvl="1"/>
-            <a:r>
-              <a:rPr lang="en-US" sz="2400" dirty="0">
-                <a:latin typeface="Times New Roman" panose="02020603050405020304" pitchFamily="18" charset="0"/>
-                <a:cs typeface="Times New Roman" panose="02020603050405020304" pitchFamily="18" charset="0"/>
-              </a:rPr>
-              <a:t>Which store or employee performs better</a:t>
+              <a:rPr lang="en-US" sz="2000" dirty="0">
+                <a:latin typeface="Times New Roman" panose="02020603050405020304" pitchFamily="18" charset="0"/>
+                <a:cs typeface="Times New Roman" panose="02020603050405020304" pitchFamily="18" charset="0"/>
+              </a:rPr>
+              <a:t>While online channels provide better analytics, offline stores continue to lack real-time visibility into critical business metrics such as:</a:t>
+            </a:r>
+          </a:p>
+          <a:p>
+            <a:pPr>
+              <a:buClr>
+                <a:schemeClr val="tx1"/>
+              </a:buClr>
+              <a:buFont typeface="Wingdings" panose="05000000000000000000" pitchFamily="2" charset="2"/>
+              <a:buChar char="Ø"/>
+            </a:pPr>
+            <a:r>
+              <a:rPr lang="en-US" sz="2000" dirty="0">
+                <a:latin typeface="Times New Roman" panose="02020603050405020304" pitchFamily="18" charset="0"/>
+                <a:cs typeface="Times New Roman" panose="02020603050405020304" pitchFamily="18" charset="0"/>
+              </a:rPr>
+              <a:t>Which product, sizes or colors are selling fast</a:t>
+            </a:r>
+          </a:p>
+          <a:p>
+            <a:pPr>
+              <a:buClr>
+                <a:schemeClr val="tx1"/>
+              </a:buClr>
+              <a:buFont typeface="Wingdings" panose="05000000000000000000" pitchFamily="2" charset="2"/>
+              <a:buChar char="Ø"/>
+            </a:pPr>
+            <a:r>
+              <a:rPr lang="en-US" sz="2000" dirty="0">
+                <a:latin typeface="Times New Roman" panose="02020603050405020304" pitchFamily="18" charset="0"/>
+                <a:cs typeface="Times New Roman" panose="02020603050405020304" pitchFamily="18" charset="0"/>
+              </a:rPr>
+              <a:t>Which items are underperforming or stagnating</a:t>
+            </a:r>
+          </a:p>
+          <a:p>
+            <a:pPr>
+              <a:buClr>
+                <a:schemeClr val="tx1"/>
+              </a:buClr>
+              <a:buFont typeface="Wingdings" panose="05000000000000000000" pitchFamily="2" charset="2"/>
+              <a:buChar char="Ø"/>
+            </a:pPr>
+            <a:r>
+              <a:rPr lang="en-US" sz="2000" dirty="0">
+                <a:latin typeface="Times New Roman" panose="02020603050405020304" pitchFamily="18" charset="0"/>
+                <a:cs typeface="Times New Roman" panose="02020603050405020304" pitchFamily="18" charset="0"/>
+              </a:rPr>
+              <a:t>Real-time stock availability across locations</a:t>
             </a:r>
           </a:p>
           <a:p>
@@ -8340,15 +10784,16 @@
               <a:buNone/>
             </a:pPr>
             <a:r>
-              <a:rPr lang="en-US" sz="2600" dirty="0">
-                <a:latin typeface="Times New Roman" panose="02020603050405020304" pitchFamily="18" charset="0"/>
-                <a:cs typeface="Times New Roman" panose="02020603050405020304" pitchFamily="18" charset="0"/>
-              </a:rPr>
-              <a:t>Most decisions are based on experience, not data.</a:t>
-            </a:r>
-          </a:p>
-          <a:p>
-            <a:endParaRPr lang="en-IN" dirty="0"/>
+              <a:rPr lang="en-US" sz="2000" dirty="0">
+                <a:latin typeface="Times New Roman" panose="02020603050405020304" pitchFamily="18" charset="0"/>
+                <a:cs typeface="Times New Roman" panose="02020603050405020304" pitchFamily="18" charset="0"/>
+              </a:rPr>
+              <a:t>As a result, retailers often struggle to build a unified view of overall business performance across online and offline channels. Decisions around procurement, replenishment, pricing, and promotions continue to rely more on intuition and experience rather than integrated, data-driven insights.</a:t>
+            </a:r>
+            <a:endParaRPr lang="en-IN" sz="2000" dirty="0">
+              <a:latin typeface="Times New Roman" panose="02020603050405020304" pitchFamily="18" charset="0"/>
+              <a:cs typeface="Times New Roman" panose="02020603050405020304" pitchFamily="18" charset="0"/>
+            </a:endParaRPr>
           </a:p>
         </p:txBody>
       </p:sp>
@@ -8356,6 +10801,601 @@
     <p:extLst>
       <p:ext uri="{BB962C8B-B14F-4D97-AF65-F5344CB8AC3E}">
         <p14:creationId xmlns:p14="http://schemas.microsoft.com/office/powerpoint/2010/main" val="3112919578"/>
+      </p:ext>
+    </p:extLst>
+  </p:cSld>
+  <p:clrMapOvr>
+    <a:masterClrMapping/>
+  </p:clrMapOvr>
+</p:sld>
+</file>
+
+<file path=ppt/slides/slide30.xml><?xml version="1.0" encoding="utf-8"?>
+<p:sld xmlns:a="http://schemas.openxmlformats.org/drawingml/2006/main" xmlns:r="http://schemas.openxmlformats.org/officeDocument/2006/relationships" xmlns:p="http://schemas.openxmlformats.org/presentationml/2006/main">
+  <p:cSld>
+    <p:spTree>
+      <p:nvGrpSpPr>
+        <p:cNvPr id="1" name="">
+          <a:extLst>
+            <a:ext uri="{FF2B5EF4-FFF2-40B4-BE49-F238E27FC236}">
+              <a16:creationId xmlns:a16="http://schemas.microsoft.com/office/drawing/2014/main" id="{99319D16-46A5-7587-7CAA-3F5978F8219A}"/>
+            </a:ext>
+          </a:extLst>
+        </p:cNvPr>
+        <p:cNvGrpSpPr/>
+        <p:nvPr/>
+      </p:nvGrpSpPr>
+      <p:grpSpPr>
+        <a:xfrm>
+          <a:off x="0" y="0"/>
+          <a:ext cx="0" cy="0"/>
+          <a:chOff x="0" y="0"/>
+          <a:chExt cx="0" cy="0"/>
+        </a:xfrm>
+      </p:grpSpPr>
+      <p:sp>
+        <p:nvSpPr>
+          <p:cNvPr id="2" name="Title 1">
+            <a:extLst>
+              <a:ext uri="{FF2B5EF4-FFF2-40B4-BE49-F238E27FC236}">
+                <a16:creationId xmlns:a16="http://schemas.microsoft.com/office/drawing/2014/main" id="{05F35C67-78F1-CEF1-63F8-1325985F2592}"/>
+              </a:ext>
+            </a:extLst>
+          </p:cNvPr>
+          <p:cNvSpPr>
+            <a:spLocks noGrp="1"/>
+          </p:cNvSpPr>
+          <p:nvPr>
+            <p:ph type="title"/>
+          </p:nvPr>
+        </p:nvSpPr>
+        <p:spPr>
+          <a:xfrm>
+            <a:off x="-59267" y="378878"/>
+            <a:ext cx="10337800" cy="1320800"/>
+          </a:xfrm>
+        </p:spPr>
+        <p:txBody>
+          <a:bodyPr>
+            <a:normAutofit fontScale="90000"/>
+          </a:bodyPr>
+          <a:lstStyle/>
+          <a:p>
+            <a:pPr algn="ctr"/>
+            <a:r>
+              <a:rPr lang="en-US" b="1" dirty="0">
+                <a:solidFill>
+                  <a:schemeClr val="tx1"/>
+                </a:solidFill>
+                <a:latin typeface="Times New Roman" panose="02020603050405020304" pitchFamily="18" charset="0"/>
+                <a:cs typeface="Times New Roman" panose="02020603050405020304" pitchFamily="18" charset="0"/>
+              </a:rPr>
+              <a:t>                Data loaded after transformation to the sink</a:t>
+            </a:r>
+            <a:br>
+              <a:rPr lang="en-US" b="1" dirty="0">
+                <a:latin typeface="Times New Roman" panose="02020603050405020304" pitchFamily="18" charset="0"/>
+                <a:cs typeface="Times New Roman" panose="02020603050405020304" pitchFamily="18" charset="0"/>
+              </a:rPr>
+            </a:br>
+            <a:endParaRPr lang="en-IN" b="1" dirty="0">
+              <a:solidFill>
+                <a:schemeClr val="tx1"/>
+              </a:solidFill>
+              <a:latin typeface="Times New Roman" panose="02020603050405020304" pitchFamily="18" charset="0"/>
+              <a:cs typeface="Times New Roman" panose="02020603050405020304" pitchFamily="18" charset="0"/>
+            </a:endParaRPr>
+          </a:p>
+        </p:txBody>
+      </p:sp>
+      <p:pic>
+        <p:nvPicPr>
+          <p:cNvPr id="6" name="Content Placeholder 5">
+            <a:extLst>
+              <a:ext uri="{FF2B5EF4-FFF2-40B4-BE49-F238E27FC236}">
+                <a16:creationId xmlns:a16="http://schemas.microsoft.com/office/drawing/2014/main" id="{9A533132-188E-3DC0-1D67-3EEC9684D3D8}"/>
+              </a:ext>
+            </a:extLst>
+          </p:cNvPr>
+          <p:cNvPicPr>
+            <a:picLocks noGrp="1" noChangeAspect="1"/>
+          </p:cNvPicPr>
+          <p:nvPr>
+            <p:ph idx="1"/>
+          </p:nvPr>
+        </p:nvPicPr>
+        <p:blipFill>
+          <a:blip r:embed="rId2"/>
+          <a:stretch>
+            <a:fillRect/>
+          </a:stretch>
+        </p:blipFill>
+        <p:spPr>
+          <a:xfrm>
+            <a:off x="0" y="1312333"/>
+            <a:ext cx="12192000" cy="5545667"/>
+          </a:xfrm>
+          <a:prstGeom prst="rect">
+            <a:avLst/>
+          </a:prstGeom>
+        </p:spPr>
+      </p:pic>
+    </p:spTree>
+    <p:extLst>
+      <p:ext uri="{BB962C8B-B14F-4D97-AF65-F5344CB8AC3E}">
+        <p14:creationId xmlns:p14="http://schemas.microsoft.com/office/powerpoint/2010/main" val="2467769406"/>
+      </p:ext>
+    </p:extLst>
+  </p:cSld>
+  <p:clrMapOvr>
+    <a:masterClrMapping/>
+  </p:clrMapOvr>
+</p:sld>
+</file>
+
+<file path=ppt/slides/slide31.xml><?xml version="1.0" encoding="utf-8"?>
+<p:sld xmlns:a="http://schemas.openxmlformats.org/drawingml/2006/main" xmlns:r="http://schemas.openxmlformats.org/officeDocument/2006/relationships" xmlns:p="http://schemas.openxmlformats.org/presentationml/2006/main">
+  <p:cSld>
+    <p:spTree>
+      <p:nvGrpSpPr>
+        <p:cNvPr id="1" name="">
+          <a:extLst>
+            <a:ext uri="{FF2B5EF4-FFF2-40B4-BE49-F238E27FC236}">
+              <a16:creationId xmlns:a16="http://schemas.microsoft.com/office/drawing/2014/main" id="{2451D9DC-EF93-62AB-BACD-9E70DB87EFFA}"/>
+            </a:ext>
+          </a:extLst>
+        </p:cNvPr>
+        <p:cNvGrpSpPr/>
+        <p:nvPr/>
+      </p:nvGrpSpPr>
+      <p:grpSpPr>
+        <a:xfrm>
+          <a:off x="0" y="0"/>
+          <a:ext cx="0" cy="0"/>
+          <a:chOff x="0" y="0"/>
+          <a:chExt cx="0" cy="0"/>
+        </a:xfrm>
+      </p:grpSpPr>
+      <p:sp>
+        <p:nvSpPr>
+          <p:cNvPr id="2" name="Title 1">
+            <a:extLst>
+              <a:ext uri="{FF2B5EF4-FFF2-40B4-BE49-F238E27FC236}">
+                <a16:creationId xmlns:a16="http://schemas.microsoft.com/office/drawing/2014/main" id="{74FF3EC5-7A92-85DC-0ADB-08E84F88F427}"/>
+              </a:ext>
+            </a:extLst>
+          </p:cNvPr>
+          <p:cNvSpPr>
+            <a:spLocks noGrp="1"/>
+          </p:cNvSpPr>
+          <p:nvPr>
+            <p:ph type="title"/>
+          </p:nvPr>
+        </p:nvSpPr>
+        <p:spPr>
+          <a:xfrm>
+            <a:off x="1095245" y="378878"/>
+            <a:ext cx="8596668" cy="1320800"/>
+          </a:xfrm>
+        </p:spPr>
+        <p:txBody>
+          <a:bodyPr>
+            <a:normAutofit/>
+          </a:bodyPr>
+          <a:lstStyle/>
+          <a:p>
+            <a:pPr algn="ctr"/>
+            <a:r>
+              <a:rPr lang="en-US" b="1" dirty="0">
+                <a:solidFill>
+                  <a:schemeClr val="tx1"/>
+                </a:solidFill>
+                <a:latin typeface="Times New Roman" panose="02020603050405020304" pitchFamily="18" charset="0"/>
+                <a:cs typeface="Times New Roman" panose="02020603050405020304" pitchFamily="18" charset="0"/>
+              </a:rPr>
+              <a:t>                Creating new trigger</a:t>
+            </a:r>
+            <a:br>
+              <a:rPr lang="en-US" b="1" dirty="0">
+                <a:latin typeface="Times New Roman" panose="02020603050405020304" pitchFamily="18" charset="0"/>
+                <a:cs typeface="Times New Roman" panose="02020603050405020304" pitchFamily="18" charset="0"/>
+              </a:rPr>
+            </a:br>
+            <a:endParaRPr lang="en-IN" b="1" dirty="0">
+              <a:solidFill>
+                <a:schemeClr val="tx1"/>
+              </a:solidFill>
+              <a:latin typeface="Times New Roman" panose="02020603050405020304" pitchFamily="18" charset="0"/>
+              <a:cs typeface="Times New Roman" panose="02020603050405020304" pitchFamily="18" charset="0"/>
+            </a:endParaRPr>
+          </a:p>
+        </p:txBody>
+      </p:sp>
+      <p:pic>
+        <p:nvPicPr>
+          <p:cNvPr id="6" name="Content Placeholder 5">
+            <a:extLst>
+              <a:ext uri="{FF2B5EF4-FFF2-40B4-BE49-F238E27FC236}">
+                <a16:creationId xmlns:a16="http://schemas.microsoft.com/office/drawing/2014/main" id="{BBAD458C-8F7E-764E-6983-C52041F93298}"/>
+              </a:ext>
+            </a:extLst>
+          </p:cNvPr>
+          <p:cNvPicPr>
+            <a:picLocks noGrp="1" noChangeAspect="1"/>
+          </p:cNvPicPr>
+          <p:nvPr>
+            <p:ph idx="1"/>
+          </p:nvPr>
+        </p:nvPicPr>
+        <p:blipFill>
+          <a:blip r:embed="rId2"/>
+          <a:stretch>
+            <a:fillRect/>
+          </a:stretch>
+        </p:blipFill>
+        <p:spPr>
+          <a:xfrm>
+            <a:off x="0" y="1151467"/>
+            <a:ext cx="12192000" cy="5706533"/>
+          </a:xfrm>
+          <a:prstGeom prst="rect">
+            <a:avLst/>
+          </a:prstGeom>
+        </p:spPr>
+      </p:pic>
+    </p:spTree>
+    <p:extLst>
+      <p:ext uri="{BB962C8B-B14F-4D97-AF65-F5344CB8AC3E}">
+        <p14:creationId xmlns:p14="http://schemas.microsoft.com/office/powerpoint/2010/main" val="2862540798"/>
+      </p:ext>
+    </p:extLst>
+  </p:cSld>
+  <p:clrMapOvr>
+    <a:masterClrMapping/>
+  </p:clrMapOvr>
+</p:sld>
+</file>
+
+<file path=ppt/slides/slide32.xml><?xml version="1.0" encoding="utf-8"?>
+<p:sld xmlns:a="http://schemas.openxmlformats.org/drawingml/2006/main" xmlns:r="http://schemas.openxmlformats.org/officeDocument/2006/relationships" xmlns:p="http://schemas.openxmlformats.org/presentationml/2006/main">
+  <p:cSld>
+    <p:spTree>
+      <p:nvGrpSpPr>
+        <p:cNvPr id="1" name="">
+          <a:extLst>
+            <a:ext uri="{FF2B5EF4-FFF2-40B4-BE49-F238E27FC236}">
+              <a16:creationId xmlns:a16="http://schemas.microsoft.com/office/drawing/2014/main" id="{B84ED28C-7F32-9903-D9B5-AE45341D124A}"/>
+            </a:ext>
+          </a:extLst>
+        </p:cNvPr>
+        <p:cNvGrpSpPr/>
+        <p:nvPr/>
+      </p:nvGrpSpPr>
+      <p:grpSpPr>
+        <a:xfrm>
+          <a:off x="0" y="0"/>
+          <a:ext cx="0" cy="0"/>
+          <a:chOff x="0" y="0"/>
+          <a:chExt cx="0" cy="0"/>
+        </a:xfrm>
+      </p:grpSpPr>
+      <p:sp>
+        <p:nvSpPr>
+          <p:cNvPr id="2" name="Title 1">
+            <a:extLst>
+              <a:ext uri="{FF2B5EF4-FFF2-40B4-BE49-F238E27FC236}">
+                <a16:creationId xmlns:a16="http://schemas.microsoft.com/office/drawing/2014/main" id="{76112661-9FE1-894B-155D-06A74E2669E5}"/>
+              </a:ext>
+            </a:extLst>
+          </p:cNvPr>
+          <p:cNvSpPr>
+            <a:spLocks noGrp="1"/>
+          </p:cNvSpPr>
+          <p:nvPr>
+            <p:ph type="title"/>
+          </p:nvPr>
+        </p:nvSpPr>
+        <p:spPr>
+          <a:xfrm>
+            <a:off x="1095245" y="378878"/>
+            <a:ext cx="8596668" cy="1320800"/>
+          </a:xfrm>
+        </p:spPr>
+        <p:txBody>
+          <a:bodyPr>
+            <a:normAutofit/>
+          </a:bodyPr>
+          <a:lstStyle/>
+          <a:p>
+            <a:pPr algn="ctr"/>
+            <a:r>
+              <a:rPr lang="en-US" b="1" dirty="0">
+                <a:solidFill>
+                  <a:schemeClr val="tx1"/>
+                </a:solidFill>
+                <a:latin typeface="Times New Roman" panose="02020603050405020304" pitchFamily="18" charset="0"/>
+                <a:cs typeface="Times New Roman" panose="02020603050405020304" pitchFamily="18" charset="0"/>
+              </a:rPr>
+              <a:t>                Pipeline Run using Trigger</a:t>
+            </a:r>
+            <a:br>
+              <a:rPr lang="en-US" b="1" dirty="0">
+                <a:latin typeface="Times New Roman" panose="02020603050405020304" pitchFamily="18" charset="0"/>
+                <a:cs typeface="Times New Roman" panose="02020603050405020304" pitchFamily="18" charset="0"/>
+              </a:rPr>
+            </a:br>
+            <a:endParaRPr lang="en-IN" b="1" dirty="0">
+              <a:solidFill>
+                <a:schemeClr val="tx1"/>
+              </a:solidFill>
+              <a:latin typeface="Times New Roman" panose="02020603050405020304" pitchFamily="18" charset="0"/>
+              <a:cs typeface="Times New Roman" panose="02020603050405020304" pitchFamily="18" charset="0"/>
+            </a:endParaRPr>
+          </a:p>
+        </p:txBody>
+      </p:sp>
+      <p:pic>
+        <p:nvPicPr>
+          <p:cNvPr id="5" name="Content Placeholder 4">
+            <a:extLst>
+              <a:ext uri="{FF2B5EF4-FFF2-40B4-BE49-F238E27FC236}">
+                <a16:creationId xmlns:a16="http://schemas.microsoft.com/office/drawing/2014/main" id="{9A0058CB-3E9B-C334-8F88-E656ABE72A12}"/>
+              </a:ext>
+            </a:extLst>
+          </p:cNvPr>
+          <p:cNvPicPr>
+            <a:picLocks noGrp="1" noChangeAspect="1"/>
+          </p:cNvPicPr>
+          <p:nvPr>
+            <p:ph idx="1"/>
+          </p:nvPr>
+        </p:nvPicPr>
+        <p:blipFill>
+          <a:blip r:embed="rId2"/>
+          <a:stretch>
+            <a:fillRect/>
+          </a:stretch>
+        </p:blipFill>
+        <p:spPr>
+          <a:xfrm>
+            <a:off x="0" y="1515533"/>
+            <a:ext cx="12132733" cy="5401733"/>
+          </a:xfrm>
+          <a:prstGeom prst="rect">
+            <a:avLst/>
+          </a:prstGeom>
+        </p:spPr>
+      </p:pic>
+    </p:spTree>
+    <p:extLst>
+      <p:ext uri="{BB962C8B-B14F-4D97-AF65-F5344CB8AC3E}">
+        <p14:creationId xmlns:p14="http://schemas.microsoft.com/office/powerpoint/2010/main" val="2229084283"/>
+      </p:ext>
+    </p:extLst>
+  </p:cSld>
+  <p:clrMapOvr>
+    <a:masterClrMapping/>
+  </p:clrMapOvr>
+</p:sld>
+</file>
+
+<file path=ppt/slides/slide33.xml><?xml version="1.0" encoding="utf-8"?>
+<p:sld xmlns:a="http://schemas.openxmlformats.org/drawingml/2006/main" xmlns:r="http://schemas.openxmlformats.org/officeDocument/2006/relationships" xmlns:p="http://schemas.openxmlformats.org/presentationml/2006/main">
+  <p:cSld>
+    <p:spTree>
+      <p:nvGrpSpPr>
+        <p:cNvPr id="1" name="">
+          <a:extLst>
+            <a:ext uri="{FF2B5EF4-FFF2-40B4-BE49-F238E27FC236}">
+              <a16:creationId xmlns:a16="http://schemas.microsoft.com/office/drawing/2014/main" id="{385F265E-4120-DA27-26E7-CA39EFCCFC03}"/>
+            </a:ext>
+          </a:extLst>
+        </p:cNvPr>
+        <p:cNvGrpSpPr/>
+        <p:nvPr/>
+      </p:nvGrpSpPr>
+      <p:grpSpPr>
+        <a:xfrm>
+          <a:off x="0" y="0"/>
+          <a:ext cx="0" cy="0"/>
+          <a:chOff x="0" y="0"/>
+          <a:chExt cx="0" cy="0"/>
+        </a:xfrm>
+      </p:grpSpPr>
+      <p:sp>
+        <p:nvSpPr>
+          <p:cNvPr id="2" name="Title 1">
+            <a:extLst>
+              <a:ext uri="{FF2B5EF4-FFF2-40B4-BE49-F238E27FC236}">
+                <a16:creationId xmlns:a16="http://schemas.microsoft.com/office/drawing/2014/main" id="{BE246954-E8EF-C2B1-13BA-82D26369B308}"/>
+              </a:ext>
+            </a:extLst>
+          </p:cNvPr>
+          <p:cNvSpPr>
+            <a:spLocks noGrp="1"/>
+          </p:cNvSpPr>
+          <p:nvPr>
+            <p:ph type="title"/>
+          </p:nvPr>
+        </p:nvSpPr>
+        <p:spPr>
+          <a:xfrm>
+            <a:off x="1095245" y="378878"/>
+            <a:ext cx="8596668" cy="1320800"/>
+          </a:xfrm>
+        </p:spPr>
+        <p:txBody>
+          <a:bodyPr>
+            <a:normAutofit/>
+          </a:bodyPr>
+          <a:lstStyle/>
+          <a:p>
+            <a:pPr algn="ctr"/>
+            <a:r>
+              <a:rPr lang="en-US" b="1" dirty="0">
+                <a:solidFill>
+                  <a:schemeClr val="tx1"/>
+                </a:solidFill>
+                <a:latin typeface="Times New Roman" panose="02020603050405020304" pitchFamily="18" charset="0"/>
+                <a:cs typeface="Times New Roman" panose="02020603050405020304" pitchFamily="18" charset="0"/>
+              </a:rPr>
+              <a:t>                Pipeline Run using Trigger</a:t>
+            </a:r>
+            <a:br>
+              <a:rPr lang="en-US" b="1" dirty="0">
+                <a:latin typeface="Times New Roman" panose="02020603050405020304" pitchFamily="18" charset="0"/>
+                <a:cs typeface="Times New Roman" panose="02020603050405020304" pitchFamily="18" charset="0"/>
+              </a:rPr>
+            </a:br>
+            <a:endParaRPr lang="en-IN" b="1" dirty="0">
+              <a:solidFill>
+                <a:schemeClr val="tx1"/>
+              </a:solidFill>
+              <a:latin typeface="Times New Roman" panose="02020603050405020304" pitchFamily="18" charset="0"/>
+              <a:cs typeface="Times New Roman" panose="02020603050405020304" pitchFamily="18" charset="0"/>
+            </a:endParaRPr>
+          </a:p>
+        </p:txBody>
+      </p:sp>
+      <p:pic>
+        <p:nvPicPr>
+          <p:cNvPr id="8" name="Content Placeholder 7">
+            <a:extLst>
+              <a:ext uri="{FF2B5EF4-FFF2-40B4-BE49-F238E27FC236}">
+                <a16:creationId xmlns:a16="http://schemas.microsoft.com/office/drawing/2014/main" id="{E69B10B0-440E-AB5F-823E-1255AD6D4F30}"/>
+              </a:ext>
+            </a:extLst>
+          </p:cNvPr>
+          <p:cNvPicPr>
+            <a:picLocks noGrp="1" noChangeAspect="1"/>
+          </p:cNvPicPr>
+          <p:nvPr>
+            <p:ph idx="1"/>
+          </p:nvPr>
+        </p:nvPicPr>
+        <p:blipFill>
+          <a:blip r:embed="rId2"/>
+          <a:stretch>
+            <a:fillRect/>
+          </a:stretch>
+        </p:blipFill>
+        <p:spPr>
+          <a:xfrm>
+            <a:off x="0" y="1405467"/>
+            <a:ext cx="12192000" cy="5452533"/>
+          </a:xfrm>
+          <a:prstGeom prst="rect">
+            <a:avLst/>
+          </a:prstGeom>
+        </p:spPr>
+      </p:pic>
+    </p:spTree>
+    <p:extLst>
+      <p:ext uri="{BB962C8B-B14F-4D97-AF65-F5344CB8AC3E}">
+        <p14:creationId xmlns:p14="http://schemas.microsoft.com/office/powerpoint/2010/main" val="3644347991"/>
+      </p:ext>
+    </p:extLst>
+  </p:cSld>
+  <p:clrMapOvr>
+    <a:masterClrMapping/>
+  </p:clrMapOvr>
+</p:sld>
+</file>
+
+<file path=ppt/slides/slide34.xml><?xml version="1.0" encoding="utf-8"?>
+<p:sld xmlns:a="http://schemas.openxmlformats.org/drawingml/2006/main" xmlns:r="http://schemas.openxmlformats.org/officeDocument/2006/relationships" xmlns:p="http://schemas.openxmlformats.org/presentationml/2006/main">
+  <p:cSld>
+    <p:spTree>
+      <p:nvGrpSpPr>
+        <p:cNvPr id="1" name=""/>
+        <p:cNvGrpSpPr/>
+        <p:nvPr/>
+      </p:nvGrpSpPr>
+      <p:grpSpPr>
+        <a:xfrm>
+          <a:off x="0" y="0"/>
+          <a:ext cx="0" cy="0"/>
+          <a:chOff x="0" y="0"/>
+          <a:chExt cx="0" cy="0"/>
+        </a:xfrm>
+      </p:grpSpPr>
+      <p:sp>
+        <p:nvSpPr>
+          <p:cNvPr id="2" name="Title 1">
+            <a:extLst>
+              <a:ext uri="{FF2B5EF4-FFF2-40B4-BE49-F238E27FC236}">
+                <a16:creationId xmlns:a16="http://schemas.microsoft.com/office/drawing/2014/main" id="{AC40CC8D-59A4-E289-B568-FAC8683AD8F9}"/>
+              </a:ext>
+            </a:extLst>
+          </p:cNvPr>
+          <p:cNvSpPr>
+            <a:spLocks noGrp="1"/>
+          </p:cNvSpPr>
+          <p:nvPr>
+            <p:ph type="title"/>
+          </p:nvPr>
+        </p:nvSpPr>
+        <p:spPr/>
+        <p:txBody>
+          <a:bodyPr/>
+          <a:lstStyle/>
+          <a:p>
+            <a:endParaRPr lang="en-IN"/>
+          </a:p>
+        </p:txBody>
+      </p:sp>
+      <p:pic>
+        <p:nvPicPr>
+          <p:cNvPr id="7" name="Content Placeholder 6">
+            <a:extLst>
+              <a:ext uri="{FF2B5EF4-FFF2-40B4-BE49-F238E27FC236}">
+                <a16:creationId xmlns:a16="http://schemas.microsoft.com/office/drawing/2014/main" id="{142092B4-461D-7419-E0C8-DEAC925F36CF}"/>
+              </a:ext>
+            </a:extLst>
+          </p:cNvPr>
+          <p:cNvPicPr>
+            <a:picLocks noGrp="1" noChangeAspect="1"/>
+          </p:cNvPicPr>
+          <p:nvPr>
+            <p:ph idx="1"/>
+          </p:nvPr>
+        </p:nvPicPr>
+        <p:blipFill>
+          <a:blip r:embed="rId2">
+            <a:extLst>
+              <a:ext uri="{28A0092B-C50C-407E-A947-70E740481C1C}">
+                <a14:useLocalDpi xmlns:a14="http://schemas.microsoft.com/office/drawing/2010/main" val="0"/>
+              </a:ext>
+            </a:extLst>
+          </a:blip>
+          <a:stretch>
+            <a:fillRect/>
+          </a:stretch>
+        </p:blipFill>
+        <p:spPr bwMode="auto">
+          <a:xfrm>
+            <a:off x="0" y="0"/>
+            <a:ext cx="12191999" cy="6858000"/>
+          </a:xfrm>
+          <a:prstGeom prst="rect">
+            <a:avLst/>
+          </a:prstGeom>
+          <a:noFill/>
+          <a:extLst>
+            <a:ext uri="{909E8E84-426E-40DD-AFC4-6F175D3DCCD1}">
+              <a14:hiddenFill xmlns:a14="http://schemas.microsoft.com/office/drawing/2010/main">
+                <a:solidFill>
+                  <a:srgbClr val="FFFFFF"/>
+                </a:solidFill>
+              </a14:hiddenFill>
+            </a:ext>
+          </a:extLst>
+        </p:spPr>
+      </p:pic>
+    </p:spTree>
+    <p:extLst>
+      <p:ext uri="{BB962C8B-B14F-4D97-AF65-F5344CB8AC3E}">
+        <p14:creationId xmlns:p14="http://schemas.microsoft.com/office/powerpoint/2010/main" val="336565014"/>
       </p:ext>
     </p:extLst>
   </p:cSld>
@@ -8469,7 +11509,7 @@
         </p:spPr>
         <p:txBody>
           <a:bodyPr>
-            <a:normAutofit lnSpcReduction="10000"/>
+            <a:normAutofit/>
           </a:bodyPr>
           <a:lstStyle/>
           <a:p>
@@ -8479,25 +11519,11 @@
               </a:lnSpc>
             </a:pPr>
             <a:r>
-              <a:rPr lang="en-US" sz="2400" dirty="0">
-                <a:latin typeface="Times New Roman" panose="02020603050405020304" pitchFamily="18" charset="0"/>
-                <a:cs typeface="Times New Roman" panose="02020603050405020304" pitchFamily="18" charset="0"/>
-              </a:rPr>
-              <a:t>The focus of this project is to design and implement a scalable data engineering and analytics solution for a </a:t>
-            </a:r>
-            <a:r>
-              <a:rPr lang="en-US" sz="2400" dirty="0" err="1">
-                <a:latin typeface="Times New Roman" panose="02020603050405020304" pitchFamily="18" charset="0"/>
-                <a:cs typeface="Times New Roman" panose="02020603050405020304" pitchFamily="18" charset="0"/>
-              </a:rPr>
-              <a:t>fabindia</a:t>
-            </a:r>
-            <a:r>
-              <a:rPr lang="en-US" sz="2400" dirty="0">
-                <a:latin typeface="Times New Roman" panose="02020603050405020304" pitchFamily="18" charset="0"/>
-                <a:cs typeface="Times New Roman" panose="02020603050405020304" pitchFamily="18" charset="0"/>
-              </a:rPr>
-              <a:t> fashion retailer. The project emphasizes integrating raw POS and operational data from multiple physical stores into a centralized data warehouse.</a:t>
+              <a:rPr lang="en-US" sz="2800" dirty="0">
+                <a:latin typeface="Times New Roman" panose="02020603050405020304" pitchFamily="18" charset="0"/>
+                <a:cs typeface="Times New Roman" panose="02020603050405020304" pitchFamily="18" charset="0"/>
+              </a:rPr>
+              <a:t>This project aims to build a unified analytics solution that integrates offline POS sales and online e-commerce data for fashion retailers.</a:t>
             </a:r>
           </a:p>
           <a:p>
@@ -8507,15 +11533,16 @@
               </a:lnSpc>
             </a:pPr>
             <a:r>
-              <a:rPr lang="en-US" sz="2400" dirty="0">
-                <a:latin typeface="Times New Roman" panose="02020603050405020304" pitchFamily="18" charset="0"/>
-                <a:cs typeface="Times New Roman" panose="02020603050405020304" pitchFamily="18" charset="0"/>
-              </a:rPr>
-              <a:t>It focuses on enabling sales trend analysis, inventory optimization, employee performance monitoring, and customer segmentation through structured data modeling and interactive Power BI dashboards, supporting data-driven decision-making and business growth.</a:t>
-            </a:r>
-          </a:p>
-          <a:p>
-            <a:endParaRPr lang="en-IN" dirty="0"/>
+              <a:rPr lang="en-US" sz="2800" dirty="0">
+                <a:latin typeface="Times New Roman" panose="02020603050405020304" pitchFamily="18" charset="0"/>
+                <a:cs typeface="Times New Roman" panose="02020603050405020304" pitchFamily="18" charset="0"/>
+              </a:rPr>
+              <a:t>The focus is to provide real-time insights into product performance, inventory movement, and store/employee productivity. By automating data analysis, the project enables accurate, data-driven decisions in merchandising and operations.</a:t>
+            </a:r>
+            <a:endParaRPr lang="en-IN" sz="2800" dirty="0">
+              <a:latin typeface="Times New Roman" panose="02020603050405020304" pitchFamily="18" charset="0"/>
+              <a:cs typeface="Times New Roman" panose="02020603050405020304" pitchFamily="18" charset="0"/>
+            </a:endParaRPr>
           </a:p>
         </p:txBody>
       </p:sp>
@@ -8630,8 +11657,8 @@
         </p:nvSpPr>
         <p:spPr>
           <a:xfrm>
-            <a:off x="677334" y="1613043"/>
-            <a:ext cx="10819448" cy="4428319"/>
+            <a:off x="677334" y="1613044"/>
+            <a:ext cx="10819448" cy="4212404"/>
           </a:xfrm>
         </p:spPr>
         <p:txBody>
@@ -8645,7 +11672,7 @@
               <a:buChar char="Ø"/>
             </a:pPr>
             <a:r>
-              <a:rPr lang="en-IN" sz="2800" b="1" dirty="0">
+              <a:rPr lang="en-IN" sz="2400" dirty="0">
                 <a:latin typeface="Times New Roman" panose="02020603050405020304" pitchFamily="18" charset="0"/>
                 <a:cs typeface="Times New Roman" panose="02020603050405020304" pitchFamily="18" charset="0"/>
               </a:rPr>
@@ -8658,7 +11685,7 @@
               <a:buChar char="Ø"/>
             </a:pPr>
             <a:r>
-              <a:rPr lang="en-IN" sz="2800" b="1" dirty="0">
+              <a:rPr lang="en-IN" sz="2400" dirty="0">
                 <a:latin typeface="Times New Roman" panose="02020603050405020304" pitchFamily="18" charset="0"/>
                 <a:cs typeface="Times New Roman" panose="02020603050405020304" pitchFamily="18" charset="0"/>
               </a:rPr>
@@ -8671,7 +11698,7 @@
               <a:buChar char="Ø"/>
             </a:pPr>
             <a:r>
-              <a:rPr lang="en-IN" sz="2800" b="1" dirty="0">
+              <a:rPr lang="en-IN" sz="2400" dirty="0">
                 <a:latin typeface="Times New Roman" panose="02020603050405020304" pitchFamily="18" charset="0"/>
                 <a:cs typeface="Times New Roman" panose="02020603050405020304" pitchFamily="18" charset="0"/>
               </a:rPr>
@@ -8684,7 +11711,7 @@
               <a:buChar char="Ø"/>
             </a:pPr>
             <a:r>
-              <a:rPr lang="en-IN" sz="2800" b="1" dirty="0">
+              <a:rPr lang="en-IN" sz="2400" dirty="0">
                 <a:latin typeface="Times New Roman" panose="02020603050405020304" pitchFamily="18" charset="0"/>
                 <a:cs typeface="Times New Roman" panose="02020603050405020304" pitchFamily="18" charset="0"/>
               </a:rPr>
@@ -8697,21 +11724,21 @@
               <a:buChar char="Ø"/>
             </a:pPr>
             <a:r>
-              <a:rPr lang="en-IN" sz="2800" b="1" dirty="0">
+              <a:rPr lang="en-IN" sz="2400" dirty="0">
                 <a:latin typeface="Times New Roman" panose="02020603050405020304" pitchFamily="18" charset="0"/>
                 <a:cs typeface="Times New Roman" panose="02020603050405020304" pitchFamily="18" charset="0"/>
               </a:rPr>
               <a:t>Customer Segmentation &amp; </a:t>
             </a:r>
             <a:r>
-              <a:rPr lang="en-IN" sz="2800" b="1" dirty="0" err="1">
+              <a:rPr lang="en-IN" sz="2400" dirty="0" err="1">
                 <a:latin typeface="Times New Roman" panose="02020603050405020304" pitchFamily="18" charset="0"/>
                 <a:cs typeface="Times New Roman" panose="02020603050405020304" pitchFamily="18" charset="0"/>
               </a:rPr>
               <a:t>Behavior</a:t>
             </a:r>
             <a:r>
-              <a:rPr lang="en-IN" sz="2800" b="1" dirty="0">
+              <a:rPr lang="en-IN" sz="2400" dirty="0">
                 <a:latin typeface="Times New Roman" panose="02020603050405020304" pitchFamily="18" charset="0"/>
                 <a:cs typeface="Times New Roman" panose="02020603050405020304" pitchFamily="18" charset="0"/>
               </a:rPr>
@@ -8724,7 +11751,7 @@
               <a:buChar char="Ø"/>
             </a:pPr>
             <a:r>
-              <a:rPr lang="en-IN" sz="2800" b="1" dirty="0">
+              <a:rPr lang="en-IN" sz="2400" dirty="0">
                 <a:latin typeface="Times New Roman" panose="02020603050405020304" pitchFamily="18" charset="0"/>
                 <a:cs typeface="Times New Roman" panose="02020603050405020304" pitchFamily="18" charset="0"/>
               </a:rPr>
@@ -8737,7 +11764,7 @@
               <a:buChar char="Ø"/>
             </a:pPr>
             <a:r>
-              <a:rPr lang="en-IN" sz="2800" b="1" dirty="0">
+              <a:rPr lang="en-IN" sz="2400" dirty="0">
                 <a:latin typeface="Times New Roman" panose="02020603050405020304" pitchFamily="18" charset="0"/>
                 <a:cs typeface="Times New Roman" panose="02020603050405020304" pitchFamily="18" charset="0"/>
               </a:rPr>
@@ -8750,7 +11777,7 @@
               <a:buChar char="Ø"/>
             </a:pPr>
             <a:r>
-              <a:rPr lang="en-IN" sz="2800" b="1" dirty="0">
+              <a:rPr lang="en-IN" sz="2400" dirty="0">
                 <a:latin typeface="Times New Roman" panose="02020603050405020304" pitchFamily="18" charset="0"/>
                 <a:cs typeface="Times New Roman" panose="02020603050405020304" pitchFamily="18" charset="0"/>
               </a:rPr>
@@ -8773,155 +11800,6 @@
 </file>
 
 <file path=ppt/slides/slide6.xml><?xml version="1.0" encoding="utf-8"?>
-<p:sld xmlns:a="http://schemas.openxmlformats.org/drawingml/2006/main" xmlns:r="http://schemas.openxmlformats.org/officeDocument/2006/relationships" xmlns:p="http://schemas.openxmlformats.org/presentationml/2006/main">
-  <p:cSld>
-    <p:spTree>
-      <p:nvGrpSpPr>
-        <p:cNvPr id="1" name="">
-          <a:extLst>
-            <a:ext uri="{FF2B5EF4-FFF2-40B4-BE49-F238E27FC236}">
-              <a16:creationId xmlns:a16="http://schemas.microsoft.com/office/drawing/2014/main" id="{F3C27FA1-1AB1-A84F-1D6D-7770DDB8C7AE}"/>
-            </a:ext>
-          </a:extLst>
-        </p:cNvPr>
-        <p:cNvGrpSpPr/>
-        <p:nvPr/>
-      </p:nvGrpSpPr>
-      <p:grpSpPr>
-        <a:xfrm>
-          <a:off x="0" y="0"/>
-          <a:ext cx="0" cy="0"/>
-          <a:chOff x="0" y="0"/>
-          <a:chExt cx="0" cy="0"/>
-        </a:xfrm>
-      </p:grpSpPr>
-      <p:sp>
-        <p:nvSpPr>
-          <p:cNvPr id="2" name="Title 1">
-            <a:extLst>
-              <a:ext uri="{FF2B5EF4-FFF2-40B4-BE49-F238E27FC236}">
-                <a16:creationId xmlns:a16="http://schemas.microsoft.com/office/drawing/2014/main" id="{1B5429B8-4950-8769-E788-E326828A9F94}"/>
-              </a:ext>
-            </a:extLst>
-          </p:cNvPr>
-          <p:cNvSpPr>
-            <a:spLocks noGrp="1"/>
-          </p:cNvSpPr>
-          <p:nvPr>
-            <p:ph type="title"/>
-          </p:nvPr>
-        </p:nvSpPr>
-        <p:spPr>
-          <a:xfrm>
-            <a:off x="0" y="630148"/>
-            <a:ext cx="9432437" cy="1320800"/>
-          </a:xfrm>
-        </p:spPr>
-        <p:txBody>
-          <a:bodyPr>
-            <a:normAutofit/>
-          </a:bodyPr>
-          <a:lstStyle/>
-          <a:p>
-            <a:pPr algn="ctr"/>
-            <a:r>
-              <a:rPr lang="en-US" sz="4000" b="1" dirty="0">
-                <a:solidFill>
-                  <a:schemeClr val="tx1"/>
-                </a:solidFill>
-              </a:rPr>
-              <a:t>               </a:t>
-            </a:r>
-            <a:r>
-              <a:rPr lang="en-US" sz="4000" b="1" dirty="0">
-                <a:solidFill>
-                  <a:schemeClr val="tx1"/>
-                </a:solidFill>
-                <a:latin typeface="Times New Roman" panose="02020603050405020304" pitchFamily="18" charset="0"/>
-                <a:cs typeface="Times New Roman" panose="02020603050405020304" pitchFamily="18" charset="0"/>
-              </a:rPr>
-              <a:t>How data is generated </a:t>
-            </a:r>
-            <a:endParaRPr lang="en-IN" sz="4000" b="1" dirty="0">
-              <a:solidFill>
-                <a:schemeClr val="tx1"/>
-              </a:solidFill>
-              <a:latin typeface="Times New Roman" panose="02020603050405020304" pitchFamily="18" charset="0"/>
-              <a:cs typeface="Times New Roman" panose="02020603050405020304" pitchFamily="18" charset="0"/>
-            </a:endParaRPr>
-          </a:p>
-        </p:txBody>
-      </p:sp>
-      <p:sp>
-        <p:nvSpPr>
-          <p:cNvPr id="3" name="Content Placeholder 2">
-            <a:extLst>
-              <a:ext uri="{FF2B5EF4-FFF2-40B4-BE49-F238E27FC236}">
-                <a16:creationId xmlns:a16="http://schemas.microsoft.com/office/drawing/2014/main" id="{B2928B5C-0769-D066-705E-0426B4EA774F}"/>
-              </a:ext>
-            </a:extLst>
-          </p:cNvPr>
-          <p:cNvSpPr>
-            <a:spLocks noGrp="1"/>
-          </p:cNvSpPr>
-          <p:nvPr>
-            <p:ph idx="1"/>
-          </p:nvPr>
-        </p:nvSpPr>
-        <p:spPr>
-          <a:xfrm>
-            <a:off x="871210" y="2570095"/>
-            <a:ext cx="10819448" cy="1632035"/>
-          </a:xfrm>
-        </p:spPr>
-        <p:txBody>
-          <a:bodyPr>
-            <a:normAutofit/>
-          </a:bodyPr>
-          <a:lstStyle/>
-          <a:p>
-            <a:pPr>
-              <a:buFont typeface="Wingdings" panose="05000000000000000000" pitchFamily="2" charset="2"/>
-              <a:buChar char="Ø"/>
-            </a:pPr>
-            <a:r>
-              <a:rPr lang="en-US" sz="2800" dirty="0">
-                <a:latin typeface="Times New Roman" panose="02020603050405020304" pitchFamily="18" charset="0"/>
-                <a:cs typeface="Times New Roman" panose="02020603050405020304" pitchFamily="18" charset="0"/>
-              </a:rPr>
-              <a:t>Data is generated daily from POS billing systems, inventory updates, customer interactions, and promotional activities across multiple offline stores.</a:t>
-            </a:r>
-            <a:endParaRPr lang="en-IN" sz="2800" b="1" dirty="0">
-              <a:latin typeface="Times New Roman" panose="02020603050405020304" pitchFamily="18" charset="0"/>
-              <a:cs typeface="Times New Roman" panose="02020603050405020304" pitchFamily="18" charset="0"/>
-            </a:endParaRPr>
-          </a:p>
-          <a:p>
-            <a:pPr>
-              <a:buFont typeface="Wingdings" panose="05000000000000000000" pitchFamily="2" charset="2"/>
-              <a:buChar char="Ø"/>
-            </a:pPr>
-            <a:endParaRPr lang="en-IN" sz="2800" b="1" dirty="0">
-              <a:latin typeface="Times New Roman" panose="02020603050405020304" pitchFamily="18" charset="0"/>
-              <a:cs typeface="Times New Roman" panose="02020603050405020304" pitchFamily="18" charset="0"/>
-            </a:endParaRPr>
-          </a:p>
-        </p:txBody>
-      </p:sp>
-    </p:spTree>
-    <p:extLst>
-      <p:ext uri="{BB962C8B-B14F-4D97-AF65-F5344CB8AC3E}">
-        <p14:creationId xmlns:p14="http://schemas.microsoft.com/office/powerpoint/2010/main" val="3800741943"/>
-      </p:ext>
-    </p:extLst>
-  </p:cSld>
-  <p:clrMapOvr>
-    <a:masterClrMapping/>
-  </p:clrMapOvr>
-</p:sld>
-</file>
-
-<file path=ppt/slides/slide7.xml><?xml version="1.0" encoding="utf-8"?>
 <p:sld xmlns:a="http://schemas.openxmlformats.org/drawingml/2006/main" xmlns:r="http://schemas.openxmlformats.org/officeDocument/2006/relationships" xmlns:p="http://schemas.openxmlformats.org/presentationml/2006/main">
   <p:cSld>
     <p:spTree>
@@ -9305,7 +12183,7 @@
                 <a:latin typeface="Times New Roman" panose="02020603050405020304" pitchFamily="18" charset="0"/>
                 <a:cs typeface="Times New Roman" panose="02020603050405020304" pitchFamily="18" charset="0"/>
               </a:rPr>
-              <a:t>     Collect Offline </a:t>
+              <a:t>     Collect Online &amp; Offline </a:t>
             </a:r>
           </a:p>
           <a:p>
@@ -9555,8 +12433,8 @@
         </p:nvSpPr>
         <p:spPr>
           <a:xfrm>
-            <a:off x="503434" y="3626778"/>
-            <a:ext cx="1849347" cy="646331"/>
+            <a:off x="289644" y="388894"/>
+            <a:ext cx="2149324" cy="646331"/>
           </a:xfrm>
           <a:prstGeom prst="rect">
             <a:avLst/>
@@ -9574,7 +12452,7 @@
                 <a:latin typeface="Times New Roman" panose="02020603050405020304" pitchFamily="18" charset="0"/>
                 <a:cs typeface="Times New Roman" panose="02020603050405020304" pitchFamily="18" charset="0"/>
               </a:rPr>
-              <a:t>      </a:t>
+              <a:t>       </a:t>
             </a:r>
             <a:r>
               <a:rPr lang="en-US" b="1" dirty="0" err="1">
@@ -9588,7 +12466,166 @@
                 <a:latin typeface="Times New Roman" panose="02020603050405020304" pitchFamily="18" charset="0"/>
                 <a:cs typeface="Times New Roman" panose="02020603050405020304" pitchFamily="18" charset="0"/>
               </a:rPr>
-              <a:t>    Fashion Store</a:t>
+              <a:t>          Fashion Store</a:t>
+            </a:r>
+            <a:endParaRPr lang="en-IN" b="1" dirty="0">
+              <a:latin typeface="Times New Roman" panose="02020603050405020304" pitchFamily="18" charset="0"/>
+              <a:cs typeface="Times New Roman" panose="02020603050405020304" pitchFamily="18" charset="0"/>
+            </a:endParaRPr>
+          </a:p>
+        </p:txBody>
+      </p:sp>
+      <p:pic>
+        <p:nvPicPr>
+          <p:cNvPr id="4" name="Picture 3">
+            <a:extLst>
+              <a:ext uri="{FF2B5EF4-FFF2-40B4-BE49-F238E27FC236}">
+                <a16:creationId xmlns:a16="http://schemas.microsoft.com/office/drawing/2014/main" id="{CBBF4B86-3D23-27C4-0ED4-099E75146F15}"/>
+              </a:ext>
+            </a:extLst>
+          </p:cNvPr>
+          <p:cNvPicPr>
+            <a:picLocks noChangeAspect="1"/>
+          </p:cNvPicPr>
+          <p:nvPr/>
+        </p:nvPicPr>
+        <p:blipFill>
+          <a:blip r:embed="rId7"/>
+          <a:stretch>
+            <a:fillRect/>
+          </a:stretch>
+        </p:blipFill>
+        <p:spPr>
+          <a:xfrm>
+            <a:off x="309912" y="4733714"/>
+            <a:ext cx="2286319" cy="1514686"/>
+          </a:xfrm>
+          <a:prstGeom prst="rect">
+            <a:avLst/>
+          </a:prstGeom>
+        </p:spPr>
+      </p:pic>
+      <p:cxnSp>
+        <p:nvCxnSpPr>
+          <p:cNvPr id="8" name="Straight Connector 7">
+            <a:extLst>
+              <a:ext uri="{FF2B5EF4-FFF2-40B4-BE49-F238E27FC236}">
+                <a16:creationId xmlns:a16="http://schemas.microsoft.com/office/drawing/2014/main" id="{1AAF509E-29F2-7899-0CBB-D4977AE9FE31}"/>
+              </a:ext>
+            </a:extLst>
+          </p:cNvPr>
+          <p:cNvCxnSpPr>
+            <a:cxnSpLocks/>
+          </p:cNvCxnSpPr>
+          <p:nvPr/>
+        </p:nvCxnSpPr>
+        <p:spPr>
+          <a:xfrm flipV="1">
+            <a:off x="1496656" y="3954092"/>
+            <a:ext cx="0" cy="819442"/>
+          </a:xfrm>
+          <a:prstGeom prst="line">
+            <a:avLst/>
+          </a:prstGeom>
+          <a:ln w="57150">
+            <a:solidFill>
+              <a:schemeClr val="tx1"/>
+            </a:solidFill>
+          </a:ln>
+        </p:spPr>
+        <p:style>
+          <a:lnRef idx="1">
+            <a:schemeClr val="dk1"/>
+          </a:lnRef>
+          <a:fillRef idx="0">
+            <a:schemeClr val="dk1"/>
+          </a:fillRef>
+          <a:effectRef idx="0">
+            <a:schemeClr val="dk1"/>
+          </a:effectRef>
+          <a:fontRef idx="minor">
+            <a:schemeClr val="tx1"/>
+          </a:fontRef>
+        </p:style>
+      </p:cxnSp>
+      <p:cxnSp>
+        <p:nvCxnSpPr>
+          <p:cNvPr id="14" name="Straight Arrow Connector 13">
+            <a:extLst>
+              <a:ext uri="{FF2B5EF4-FFF2-40B4-BE49-F238E27FC236}">
+                <a16:creationId xmlns:a16="http://schemas.microsoft.com/office/drawing/2014/main" id="{98F66C8A-0D1D-62B4-7119-9FF2D7E44351}"/>
+              </a:ext>
+            </a:extLst>
+          </p:cNvPr>
+          <p:cNvCxnSpPr>
+            <a:cxnSpLocks/>
+          </p:cNvCxnSpPr>
+          <p:nvPr/>
+        </p:nvCxnSpPr>
+        <p:spPr>
+          <a:xfrm flipV="1">
+            <a:off x="1496656" y="3927496"/>
+            <a:ext cx="1099575" cy="26596"/>
+          </a:xfrm>
+          <a:prstGeom prst="straightConnector1">
+            <a:avLst/>
+          </a:prstGeom>
+          <a:ln w="57150">
+            <a:solidFill>
+              <a:schemeClr val="tx1"/>
+            </a:solidFill>
+            <a:tailEnd type="triangle"/>
+          </a:ln>
+        </p:spPr>
+        <p:style>
+          <a:lnRef idx="1">
+            <a:schemeClr val="accent1"/>
+          </a:lnRef>
+          <a:fillRef idx="0">
+            <a:schemeClr val="accent1"/>
+          </a:fillRef>
+          <a:effectRef idx="0">
+            <a:schemeClr val="accent1"/>
+          </a:effectRef>
+          <a:fontRef idx="minor">
+            <a:schemeClr val="tx1"/>
+          </a:fontRef>
+        </p:style>
+      </p:cxnSp>
+      <p:sp>
+        <p:nvSpPr>
+          <p:cNvPr id="19" name="TextBox 18">
+            <a:extLst>
+              <a:ext uri="{FF2B5EF4-FFF2-40B4-BE49-F238E27FC236}">
+                <a16:creationId xmlns:a16="http://schemas.microsoft.com/office/drawing/2014/main" id="{72646A48-D01F-7D7C-C4D2-389DEDB9CB3F}"/>
+              </a:ext>
+            </a:extLst>
+          </p:cNvPr>
+          <p:cNvSpPr txBox="1"/>
+          <p:nvPr/>
+        </p:nvSpPr>
+        <p:spPr>
+          <a:xfrm>
+            <a:off x="883578" y="6391784"/>
+            <a:ext cx="2547991" cy="369332"/>
+          </a:xfrm>
+          <a:prstGeom prst="rect">
+            <a:avLst/>
+          </a:prstGeom>
+          <a:noFill/>
+        </p:spPr>
+        <p:txBody>
+          <a:bodyPr wrap="square" rtlCol="0">
+            <a:spAutoFit/>
+          </a:bodyPr>
+          <a:lstStyle/>
+          <a:p>
+            <a:r>
+              <a:rPr lang="en-US" b="1" dirty="0">
+                <a:latin typeface="Times New Roman" panose="02020603050405020304" pitchFamily="18" charset="0"/>
+                <a:cs typeface="Times New Roman" panose="02020603050405020304" pitchFamily="18" charset="0"/>
+              </a:rPr>
+              <a:t>Online Sales</a:t>
             </a:r>
             <a:endParaRPr lang="en-IN" b="1" dirty="0">
               <a:latin typeface="Times New Roman" panose="02020603050405020304" pitchFamily="18" charset="0"/>
@@ -9610,7 +12647,7 @@
 </p:sld>
 </file>
 
-<file path=ppt/slides/slide8.xml><?xml version="1.0" encoding="utf-8"?>
+<file path=ppt/slides/slide7.xml><?xml version="1.0" encoding="utf-8"?>
 <p:sld xmlns:a="http://schemas.openxmlformats.org/drawingml/2006/main" xmlns:r="http://schemas.openxmlformats.org/officeDocument/2006/relationships" xmlns:p="http://schemas.openxmlformats.org/presentationml/2006/main">
   <p:cSld>
     <p:spTree>
@@ -10091,7 +13128,7 @@
 </p:sld>
 </file>
 
-<file path=ppt/slides/slide9.xml><?xml version="1.0" encoding="utf-8"?>
+<file path=ppt/slides/slide8.xml><?xml version="1.0" encoding="utf-8"?>
 <p:sld xmlns:a="http://schemas.openxmlformats.org/drawingml/2006/main" xmlns:r="http://schemas.openxmlformats.org/officeDocument/2006/relationships" xmlns:p="http://schemas.openxmlformats.org/presentationml/2006/main">
   <p:cSld>
     <p:spTree>
@@ -10145,6 +13182,15 @@
               </a:rPr>
               <a:t>                 Technical Diagram</a:t>
             </a:r>
+            <a:br>
+              <a:rPr lang="en-US" b="1" dirty="0">
+                <a:solidFill>
+                  <a:schemeClr val="tx1"/>
+                </a:solidFill>
+                <a:latin typeface="Times New Roman" panose="02020603050405020304" pitchFamily="18" charset="0"/>
+                <a:cs typeface="Times New Roman" panose="02020603050405020304" pitchFamily="18" charset="0"/>
+              </a:rPr>
+            </a:br>
             <a:endParaRPr lang="en-IN" b="1" dirty="0">
               <a:solidFill>
                 <a:schemeClr val="tx1"/>
@@ -10155,186 +13201,6 @@
           </a:p>
         </p:txBody>
       </p:sp>
-      <p:pic>
-        <p:nvPicPr>
-          <p:cNvPr id="15" name="Picture 14">
-            <a:extLst>
-              <a:ext uri="{FF2B5EF4-FFF2-40B4-BE49-F238E27FC236}">
-                <a16:creationId xmlns:a16="http://schemas.microsoft.com/office/drawing/2014/main" id="{7219A3D5-647A-7224-0654-0E2E0C885C36}"/>
-              </a:ext>
-            </a:extLst>
-          </p:cNvPr>
-          <p:cNvPicPr>
-            <a:picLocks noChangeAspect="1"/>
-          </p:cNvPicPr>
-          <p:nvPr/>
-        </p:nvPicPr>
-        <p:blipFill>
-          <a:blip r:embed="rId2"/>
-          <a:stretch>
-            <a:fillRect/>
-          </a:stretch>
-        </p:blipFill>
-        <p:spPr>
-          <a:xfrm>
-            <a:off x="1957790" y="1354650"/>
-            <a:ext cx="1769022" cy="3092897"/>
-          </a:xfrm>
-          <a:prstGeom prst="rect">
-            <a:avLst/>
-          </a:prstGeom>
-        </p:spPr>
-      </p:pic>
-      <p:pic>
-        <p:nvPicPr>
-          <p:cNvPr id="17" name="Picture 16">
-            <a:extLst>
-              <a:ext uri="{FF2B5EF4-FFF2-40B4-BE49-F238E27FC236}">
-                <a16:creationId xmlns:a16="http://schemas.microsoft.com/office/drawing/2014/main" id="{A4608280-872F-198D-CBA3-5B99AC381C4B}"/>
-              </a:ext>
-            </a:extLst>
-          </p:cNvPr>
-          <p:cNvPicPr>
-            <a:picLocks noChangeAspect="1"/>
-          </p:cNvPicPr>
-          <p:nvPr/>
-        </p:nvPicPr>
-        <p:blipFill>
-          <a:blip r:embed="rId3"/>
-          <a:stretch>
-            <a:fillRect/>
-          </a:stretch>
-        </p:blipFill>
-        <p:spPr>
-          <a:xfrm>
-            <a:off x="4082451" y="1355813"/>
-            <a:ext cx="1769022" cy="3091737"/>
-          </a:xfrm>
-          <a:prstGeom prst="rect">
-            <a:avLst/>
-          </a:prstGeom>
-        </p:spPr>
-      </p:pic>
-      <p:pic>
-        <p:nvPicPr>
-          <p:cNvPr id="19" name="Picture 18">
-            <a:extLst>
-              <a:ext uri="{FF2B5EF4-FFF2-40B4-BE49-F238E27FC236}">
-                <a16:creationId xmlns:a16="http://schemas.microsoft.com/office/drawing/2014/main" id="{14ABA11A-57C0-269A-21AA-790F49B1C5FA}"/>
-              </a:ext>
-            </a:extLst>
-          </p:cNvPr>
-          <p:cNvPicPr>
-            <a:picLocks noChangeAspect="1"/>
-          </p:cNvPicPr>
-          <p:nvPr/>
-        </p:nvPicPr>
-        <p:blipFill>
-          <a:blip r:embed="rId4"/>
-          <a:stretch>
-            <a:fillRect/>
-          </a:stretch>
-        </p:blipFill>
-        <p:spPr>
-          <a:xfrm>
-            <a:off x="8225526" y="1354651"/>
-            <a:ext cx="1899912" cy="3092898"/>
-          </a:xfrm>
-          <a:prstGeom prst="rect">
-            <a:avLst/>
-          </a:prstGeom>
-        </p:spPr>
-      </p:pic>
-      <p:pic>
-        <p:nvPicPr>
-          <p:cNvPr id="21" name="Picture 20">
-            <a:extLst>
-              <a:ext uri="{FF2B5EF4-FFF2-40B4-BE49-F238E27FC236}">
-                <a16:creationId xmlns:a16="http://schemas.microsoft.com/office/drawing/2014/main" id="{C6ED778A-8F62-E43F-E3E4-0063DABC4590}"/>
-              </a:ext>
-            </a:extLst>
-          </p:cNvPr>
-          <p:cNvPicPr>
-            <a:picLocks noChangeAspect="1"/>
-          </p:cNvPicPr>
-          <p:nvPr/>
-        </p:nvPicPr>
-        <p:blipFill>
-          <a:blip r:embed="rId5"/>
-          <a:stretch>
-            <a:fillRect/>
-          </a:stretch>
-        </p:blipFill>
-        <p:spPr>
-          <a:xfrm>
-            <a:off x="10430455" y="1354651"/>
-            <a:ext cx="1774401" cy="3092898"/>
-          </a:xfrm>
-          <a:prstGeom prst="rect">
-            <a:avLst/>
-          </a:prstGeom>
-        </p:spPr>
-      </p:pic>
-      <p:pic>
-        <p:nvPicPr>
-          <p:cNvPr id="6" name="Picture 5">
-            <a:extLst>
-              <a:ext uri="{FF2B5EF4-FFF2-40B4-BE49-F238E27FC236}">
-                <a16:creationId xmlns:a16="http://schemas.microsoft.com/office/drawing/2014/main" id="{4AFE4FA9-2EC6-1D66-4279-810650E644E6}"/>
-              </a:ext>
-            </a:extLst>
-          </p:cNvPr>
-          <p:cNvPicPr>
-            <a:picLocks noChangeAspect="1"/>
-          </p:cNvPicPr>
-          <p:nvPr/>
-        </p:nvPicPr>
-        <p:blipFill>
-          <a:blip r:embed="rId6"/>
-          <a:stretch>
-            <a:fillRect/>
-          </a:stretch>
-        </p:blipFill>
-        <p:spPr>
-          <a:xfrm>
-            <a:off x="33076" y="1355813"/>
-            <a:ext cx="1569076" cy="3092896"/>
-          </a:xfrm>
-          <a:prstGeom prst="rect">
-            <a:avLst/>
-          </a:prstGeom>
-        </p:spPr>
-      </p:pic>
-      <p:pic>
-        <p:nvPicPr>
-          <p:cNvPr id="14" name="Picture 13">
-            <a:extLst>
-              <a:ext uri="{FF2B5EF4-FFF2-40B4-BE49-F238E27FC236}">
-                <a16:creationId xmlns:a16="http://schemas.microsoft.com/office/drawing/2014/main" id="{157F1ECB-1371-CF22-98C5-F70A24189C06}"/>
-              </a:ext>
-            </a:extLst>
-          </p:cNvPr>
-          <p:cNvPicPr>
-            <a:picLocks noChangeAspect="1"/>
-          </p:cNvPicPr>
-          <p:nvPr/>
-        </p:nvPicPr>
-        <p:blipFill>
-          <a:blip r:embed="rId7"/>
-          <a:stretch>
-            <a:fillRect/>
-          </a:stretch>
-        </p:blipFill>
-        <p:spPr>
-          <a:xfrm>
-            <a:off x="6181134" y="1354651"/>
-            <a:ext cx="1739375" cy="3092897"/>
-          </a:xfrm>
-          <a:prstGeom prst="rect">
-            <a:avLst/>
-          </a:prstGeom>
-        </p:spPr>
-      </p:pic>
       <p:cxnSp>
         <p:nvCxnSpPr>
           <p:cNvPr id="24" name="Straight Arrow Connector 23">
@@ -10351,8 +13217,8 @@
         </p:nvCxnSpPr>
         <p:spPr>
           <a:xfrm>
-            <a:off x="1488821" y="2366483"/>
-            <a:ext cx="576717" cy="0"/>
+            <a:off x="1259890" y="2524251"/>
+            <a:ext cx="754733" cy="0"/>
           </a:xfrm>
           <a:prstGeom prst="straightConnector1">
             <a:avLst/>
@@ -10395,7 +13261,7 @@
         </p:nvCxnSpPr>
         <p:spPr>
           <a:xfrm>
-            <a:off x="3573029" y="2366483"/>
+            <a:off x="3527536" y="2544800"/>
             <a:ext cx="576717" cy="0"/>
           </a:xfrm>
           <a:prstGeom prst="straightConnector1">
@@ -10439,7 +13305,7 @@
         </p:nvCxnSpPr>
         <p:spPr>
           <a:xfrm>
-            <a:off x="5813731" y="2366483"/>
+            <a:off x="5581162" y="2579137"/>
             <a:ext cx="576717" cy="0"/>
           </a:xfrm>
           <a:prstGeom prst="straightConnector1">
@@ -10483,7 +13349,7 @@
         </p:nvCxnSpPr>
         <p:spPr>
           <a:xfrm>
-            <a:off x="7802262" y="2390459"/>
+            <a:off x="7738041" y="2582651"/>
             <a:ext cx="576717" cy="0"/>
           </a:xfrm>
           <a:prstGeom prst="straightConnector1">
@@ -10527,7 +13393,7 @@
         </p:nvCxnSpPr>
         <p:spPr>
           <a:xfrm>
-            <a:off x="10033385" y="2366483"/>
+            <a:off x="9976781" y="2551795"/>
             <a:ext cx="576717" cy="0"/>
           </a:xfrm>
           <a:prstGeom prst="straightConnector1">
@@ -10555,10 +13421,616 @@
           </a:fontRef>
         </p:style>
       </p:cxnSp>
+      <p:pic>
+        <p:nvPicPr>
+          <p:cNvPr id="4" name="Picture 3">
+            <a:extLst>
+              <a:ext uri="{FF2B5EF4-FFF2-40B4-BE49-F238E27FC236}">
+                <a16:creationId xmlns:a16="http://schemas.microsoft.com/office/drawing/2014/main" id="{95E6CA1E-FFD7-1628-B18D-62A1792825A0}"/>
+              </a:ext>
+            </a:extLst>
+          </p:cNvPr>
+          <p:cNvPicPr>
+            <a:picLocks noChangeAspect="1"/>
+          </p:cNvPicPr>
+          <p:nvPr/>
+        </p:nvPicPr>
+        <p:blipFill>
+          <a:blip r:embed="rId2"/>
+          <a:stretch>
+            <a:fillRect/>
+          </a:stretch>
+        </p:blipFill>
+        <p:spPr>
+          <a:xfrm>
+            <a:off x="-50546" y="896134"/>
+            <a:ext cx="1765706" cy="3716963"/>
+          </a:xfrm>
+          <a:prstGeom prst="rect">
+            <a:avLst/>
+          </a:prstGeom>
+        </p:spPr>
+      </p:pic>
+      <p:pic>
+        <p:nvPicPr>
+          <p:cNvPr id="13" name="Picture 12">
+            <a:extLst>
+              <a:ext uri="{FF2B5EF4-FFF2-40B4-BE49-F238E27FC236}">
+                <a16:creationId xmlns:a16="http://schemas.microsoft.com/office/drawing/2014/main" id="{C799C7DC-96AE-6702-A542-0C1C9B72ED9B}"/>
+              </a:ext>
+            </a:extLst>
+          </p:cNvPr>
+          <p:cNvPicPr>
+            <a:picLocks noChangeAspect="1"/>
+          </p:cNvPicPr>
+          <p:nvPr/>
+        </p:nvPicPr>
+        <p:blipFill>
+          <a:blip r:embed="rId3"/>
+          <a:stretch>
+            <a:fillRect/>
+          </a:stretch>
+        </p:blipFill>
+        <p:spPr>
+          <a:xfrm>
+            <a:off x="2006984" y="909923"/>
+            <a:ext cx="1808911" cy="3716962"/>
+          </a:xfrm>
+          <a:prstGeom prst="rect">
+            <a:avLst/>
+          </a:prstGeom>
+        </p:spPr>
+      </p:pic>
+      <p:pic>
+        <p:nvPicPr>
+          <p:cNvPr id="18" name="Picture 17">
+            <a:extLst>
+              <a:ext uri="{FF2B5EF4-FFF2-40B4-BE49-F238E27FC236}">
+                <a16:creationId xmlns:a16="http://schemas.microsoft.com/office/drawing/2014/main" id="{C8CB7D3F-6805-21FF-6D3D-A685EDF659F1}"/>
+              </a:ext>
+            </a:extLst>
+          </p:cNvPr>
+          <p:cNvPicPr>
+            <a:picLocks noChangeAspect="1"/>
+          </p:cNvPicPr>
+          <p:nvPr/>
+        </p:nvPicPr>
+        <p:blipFill>
+          <a:blip r:embed="rId4"/>
+          <a:stretch>
+            <a:fillRect/>
+          </a:stretch>
+        </p:blipFill>
+        <p:spPr>
+          <a:xfrm>
+            <a:off x="4103815" y="909923"/>
+            <a:ext cx="1765706" cy="3716962"/>
+          </a:xfrm>
+          <a:prstGeom prst="rect">
+            <a:avLst/>
+          </a:prstGeom>
+        </p:spPr>
+      </p:pic>
+      <p:pic>
+        <p:nvPicPr>
+          <p:cNvPr id="22" name="Picture 21">
+            <a:extLst>
+              <a:ext uri="{FF2B5EF4-FFF2-40B4-BE49-F238E27FC236}">
+                <a16:creationId xmlns:a16="http://schemas.microsoft.com/office/drawing/2014/main" id="{F1A99F95-1D3C-6992-6BCB-B28C45FB9E31}"/>
+              </a:ext>
+            </a:extLst>
+          </p:cNvPr>
+          <p:cNvPicPr>
+            <a:picLocks noChangeAspect="1"/>
+          </p:cNvPicPr>
+          <p:nvPr/>
+        </p:nvPicPr>
+        <p:blipFill>
+          <a:blip r:embed="rId5"/>
+          <a:stretch>
+            <a:fillRect/>
+          </a:stretch>
+        </p:blipFill>
+        <p:spPr>
+          <a:xfrm>
+            <a:off x="6173190" y="913352"/>
+            <a:ext cx="1765706" cy="3713533"/>
+          </a:xfrm>
+          <a:prstGeom prst="rect">
+            <a:avLst/>
+          </a:prstGeom>
+        </p:spPr>
+      </p:pic>
+      <p:pic>
+        <p:nvPicPr>
+          <p:cNvPr id="25" name="Picture 24">
+            <a:extLst>
+              <a:ext uri="{FF2B5EF4-FFF2-40B4-BE49-F238E27FC236}">
+                <a16:creationId xmlns:a16="http://schemas.microsoft.com/office/drawing/2014/main" id="{FFF1E70C-9DF5-8DAD-FFE4-0E58ABCEB5CA}"/>
+              </a:ext>
+            </a:extLst>
+          </p:cNvPr>
+          <p:cNvPicPr>
+            <a:picLocks noChangeAspect="1"/>
+          </p:cNvPicPr>
+          <p:nvPr/>
+        </p:nvPicPr>
+        <p:blipFill>
+          <a:blip r:embed="rId6"/>
+          <a:stretch>
+            <a:fillRect/>
+          </a:stretch>
+        </p:blipFill>
+        <p:spPr>
+          <a:xfrm>
+            <a:off x="8314758" y="892943"/>
+            <a:ext cx="1950382" cy="3703173"/>
+          </a:xfrm>
+          <a:prstGeom prst="rect">
+            <a:avLst/>
+          </a:prstGeom>
+        </p:spPr>
+      </p:pic>
+      <p:pic>
+        <p:nvPicPr>
+          <p:cNvPr id="28" name="Picture 27">
+            <a:extLst>
+              <a:ext uri="{FF2B5EF4-FFF2-40B4-BE49-F238E27FC236}">
+                <a16:creationId xmlns:a16="http://schemas.microsoft.com/office/drawing/2014/main" id="{70304392-B5AF-7CC3-8968-3C616999AC4E}"/>
+              </a:ext>
+            </a:extLst>
+          </p:cNvPr>
+          <p:cNvPicPr>
+            <a:picLocks noChangeAspect="1"/>
+          </p:cNvPicPr>
+          <p:nvPr/>
+        </p:nvPicPr>
+        <p:blipFill>
+          <a:blip r:embed="rId7"/>
+          <a:stretch>
+            <a:fillRect/>
+          </a:stretch>
+        </p:blipFill>
+        <p:spPr>
+          <a:xfrm>
+            <a:off x="10553498" y="896134"/>
+            <a:ext cx="1705557" cy="3730751"/>
+          </a:xfrm>
+          <a:prstGeom prst="rect">
+            <a:avLst/>
+          </a:prstGeom>
+        </p:spPr>
+      </p:pic>
     </p:spTree>
     <p:extLst>
       <p:ext uri="{BB962C8B-B14F-4D97-AF65-F5344CB8AC3E}">
         <p14:creationId xmlns:p14="http://schemas.microsoft.com/office/powerpoint/2010/main" val="3591574101"/>
+      </p:ext>
+    </p:extLst>
+  </p:cSld>
+  <p:clrMapOvr>
+    <a:masterClrMapping/>
+  </p:clrMapOvr>
+</p:sld>
+</file>
+
+<file path=ppt/slides/slide9.xml><?xml version="1.0" encoding="utf-8"?>
+<p:sld xmlns:a="http://schemas.openxmlformats.org/drawingml/2006/main" xmlns:r="http://schemas.openxmlformats.org/officeDocument/2006/relationships" xmlns:p="http://schemas.openxmlformats.org/presentationml/2006/main">
+  <p:cSld>
+    <p:spTree>
+      <p:nvGrpSpPr>
+        <p:cNvPr id="1" name="">
+          <a:extLst>
+            <a:ext uri="{FF2B5EF4-FFF2-40B4-BE49-F238E27FC236}">
+              <a16:creationId xmlns:a16="http://schemas.microsoft.com/office/drawing/2014/main" id="{DE30BC4B-6F0F-57AE-9CC0-53A77CAC35F4}"/>
+            </a:ext>
+          </a:extLst>
+        </p:cNvPr>
+        <p:cNvGrpSpPr/>
+        <p:nvPr/>
+      </p:nvGrpSpPr>
+      <p:grpSpPr>
+        <a:xfrm>
+          <a:off x="0" y="0"/>
+          <a:ext cx="0" cy="0"/>
+          <a:chOff x="0" y="0"/>
+          <a:chExt cx="0" cy="0"/>
+        </a:xfrm>
+      </p:grpSpPr>
+      <p:sp>
+        <p:nvSpPr>
+          <p:cNvPr id="2" name="Title 1">
+            <a:extLst>
+              <a:ext uri="{FF2B5EF4-FFF2-40B4-BE49-F238E27FC236}">
+                <a16:creationId xmlns:a16="http://schemas.microsoft.com/office/drawing/2014/main" id="{65D7A437-235A-F498-D31D-650015EC6D1C}"/>
+              </a:ext>
+            </a:extLst>
+          </p:cNvPr>
+          <p:cNvSpPr>
+            <a:spLocks noGrp="1"/>
+          </p:cNvSpPr>
+          <p:nvPr>
+            <p:ph type="title"/>
+          </p:nvPr>
+        </p:nvSpPr>
+        <p:spPr>
+          <a:xfrm>
+            <a:off x="851995" y="301376"/>
+            <a:ext cx="8596668" cy="1320800"/>
+          </a:xfrm>
+        </p:spPr>
+        <p:txBody>
+          <a:bodyPr/>
+          <a:lstStyle/>
+          <a:p>
+            <a:pPr algn="ctr"/>
+            <a:r>
+              <a:rPr lang="en-US" b="1" dirty="0">
+                <a:solidFill>
+                  <a:schemeClr val="tx1"/>
+                </a:solidFill>
+                <a:latin typeface="Times New Roman" panose="02020603050405020304" pitchFamily="18" charset="0"/>
+                <a:cs typeface="Times New Roman" panose="02020603050405020304" pitchFamily="18" charset="0"/>
+              </a:rPr>
+              <a:t>                </a:t>
+            </a:r>
+            <a:endParaRPr lang="en-IN" b="1" dirty="0">
+              <a:solidFill>
+                <a:schemeClr val="tx1"/>
+              </a:solidFill>
+              <a:latin typeface="Times New Roman" panose="02020603050405020304" pitchFamily="18" charset="0"/>
+              <a:cs typeface="Times New Roman" panose="02020603050405020304" pitchFamily="18" charset="0"/>
+            </a:endParaRPr>
+          </a:p>
+        </p:txBody>
+      </p:sp>
+      <p:sp>
+        <p:nvSpPr>
+          <p:cNvPr id="3" name="Content Placeholder 2">
+            <a:extLst>
+              <a:ext uri="{FF2B5EF4-FFF2-40B4-BE49-F238E27FC236}">
+                <a16:creationId xmlns:a16="http://schemas.microsoft.com/office/drawing/2014/main" id="{6CB875A2-9D90-ED18-378B-0C1F1EA3152B}"/>
+              </a:ext>
+            </a:extLst>
+          </p:cNvPr>
+          <p:cNvSpPr>
+            <a:spLocks noGrp="1"/>
+          </p:cNvSpPr>
+          <p:nvPr>
+            <p:ph idx="1"/>
+          </p:nvPr>
+        </p:nvSpPr>
+        <p:spPr>
+          <a:xfrm>
+            <a:off x="616449" y="824596"/>
+            <a:ext cx="11709115" cy="5552914"/>
+          </a:xfrm>
+        </p:spPr>
+        <p:txBody>
+          <a:bodyPr>
+            <a:normAutofit fontScale="92500" lnSpcReduction="10000"/>
+          </a:bodyPr>
+          <a:lstStyle/>
+          <a:p>
+            <a:pPr marL="0" indent="0">
+              <a:lnSpc>
+                <a:spcPct val="120000"/>
+              </a:lnSpc>
+              <a:buNone/>
+            </a:pPr>
+            <a:r>
+              <a:rPr lang="en-IN" sz="2800" dirty="0">
+                <a:latin typeface="Times New Roman" panose="02020603050405020304" pitchFamily="18" charset="0"/>
+                <a:cs typeface="Times New Roman" panose="02020603050405020304" pitchFamily="18" charset="0"/>
+              </a:rPr>
+              <a:t>The dataset is divided into </a:t>
+            </a:r>
+            <a:r>
+              <a:rPr lang="en-IN" sz="2800" b="1" dirty="0">
+                <a:latin typeface="Times New Roman" panose="02020603050405020304" pitchFamily="18" charset="0"/>
+                <a:cs typeface="Times New Roman" panose="02020603050405020304" pitchFamily="18" charset="0"/>
+              </a:rPr>
+              <a:t>fact table and multiple dimension tables</a:t>
+            </a:r>
+            <a:r>
+              <a:rPr lang="en-IN" sz="2800" dirty="0">
+                <a:latin typeface="Times New Roman" panose="02020603050405020304" pitchFamily="18" charset="0"/>
+                <a:cs typeface="Times New Roman" panose="02020603050405020304" pitchFamily="18" charset="0"/>
+              </a:rPr>
+              <a:t>.</a:t>
+            </a:r>
+          </a:p>
+          <a:p>
+            <a:pPr>
+              <a:lnSpc>
+                <a:spcPct val="120000"/>
+              </a:lnSpc>
+              <a:buFont typeface="Wingdings" panose="05000000000000000000" pitchFamily="2" charset="2"/>
+              <a:buChar char="Ø"/>
+            </a:pPr>
+            <a:r>
+              <a:rPr lang="en-IN" sz="2400" b="1" dirty="0" err="1">
+                <a:latin typeface="Times New Roman" panose="02020603050405020304" pitchFamily="18" charset="0"/>
+                <a:cs typeface="Times New Roman" panose="02020603050405020304" pitchFamily="18" charset="0"/>
+              </a:rPr>
+              <a:t>Fact_Sales</a:t>
+            </a:r>
+            <a:r>
+              <a:rPr lang="en-IN" sz="2400" dirty="0">
+                <a:latin typeface="Times New Roman" panose="02020603050405020304" pitchFamily="18" charset="0"/>
+                <a:cs typeface="Times New Roman" panose="02020603050405020304" pitchFamily="18" charset="0"/>
+              </a:rPr>
+              <a:t> → In-store sales transactions.</a:t>
+            </a:r>
+          </a:p>
+          <a:p>
+            <a:pPr>
+              <a:lnSpc>
+                <a:spcPct val="120000"/>
+              </a:lnSpc>
+              <a:buFont typeface="Wingdings" panose="05000000000000000000" pitchFamily="2" charset="2"/>
+              <a:buChar char="Ø"/>
+            </a:pPr>
+            <a:r>
+              <a:rPr lang="en-IN" sz="2400" b="1" dirty="0" err="1">
+                <a:latin typeface="Times New Roman" panose="02020603050405020304" pitchFamily="18" charset="0"/>
+                <a:cs typeface="Times New Roman" panose="02020603050405020304" pitchFamily="18" charset="0"/>
+              </a:rPr>
+              <a:t>Fact_Sales_Online</a:t>
+            </a:r>
+            <a:r>
+              <a:rPr lang="en-IN" sz="2400" dirty="0">
+                <a:latin typeface="Times New Roman" panose="02020603050405020304" pitchFamily="18" charset="0"/>
+                <a:cs typeface="Times New Roman" panose="02020603050405020304" pitchFamily="18" charset="0"/>
+              </a:rPr>
+              <a:t> → Online sales transactions.</a:t>
+            </a:r>
+          </a:p>
+          <a:p>
+            <a:pPr>
+              <a:lnSpc>
+                <a:spcPct val="120000"/>
+              </a:lnSpc>
+              <a:buFont typeface="Wingdings" panose="05000000000000000000" pitchFamily="2" charset="2"/>
+              <a:buChar char="Ø"/>
+            </a:pPr>
+            <a:r>
+              <a:rPr lang="en-IN" sz="2400" b="1" dirty="0" err="1">
+                <a:latin typeface="Times New Roman" panose="02020603050405020304" pitchFamily="18" charset="0"/>
+                <a:cs typeface="Times New Roman" panose="02020603050405020304" pitchFamily="18" charset="0"/>
+              </a:rPr>
+              <a:t>Fact_Returns</a:t>
+            </a:r>
+            <a:r>
+              <a:rPr lang="en-IN" sz="2400" dirty="0">
+                <a:latin typeface="Times New Roman" panose="02020603050405020304" pitchFamily="18" charset="0"/>
+                <a:cs typeface="Times New Roman" panose="02020603050405020304" pitchFamily="18" charset="0"/>
+              </a:rPr>
+              <a:t> → Returned sales records.</a:t>
+            </a:r>
+          </a:p>
+          <a:p>
+            <a:pPr>
+              <a:lnSpc>
+                <a:spcPct val="120000"/>
+              </a:lnSpc>
+              <a:buFont typeface="Wingdings" panose="05000000000000000000" pitchFamily="2" charset="2"/>
+              <a:buChar char="Ø"/>
+            </a:pPr>
+            <a:r>
+              <a:rPr lang="en-IN" sz="2400" b="1" dirty="0" err="1">
+                <a:latin typeface="Times New Roman" panose="02020603050405020304" pitchFamily="18" charset="0"/>
+                <a:cs typeface="Times New Roman" panose="02020603050405020304" pitchFamily="18" charset="0"/>
+              </a:rPr>
+              <a:t>Fact_Expenses</a:t>
+            </a:r>
+            <a:r>
+              <a:rPr lang="en-IN" sz="2400" dirty="0">
+                <a:latin typeface="Times New Roman" panose="02020603050405020304" pitchFamily="18" charset="0"/>
+                <a:cs typeface="Times New Roman" panose="02020603050405020304" pitchFamily="18" charset="0"/>
+              </a:rPr>
+              <a:t> → Operational expense data.</a:t>
+            </a:r>
+            <a:endParaRPr lang="en-IN" sz="2400" b="1" dirty="0">
+              <a:latin typeface="Times New Roman" panose="02020603050405020304" pitchFamily="18" charset="0"/>
+              <a:cs typeface="Times New Roman" panose="02020603050405020304" pitchFamily="18" charset="0"/>
+            </a:endParaRPr>
+          </a:p>
+          <a:p>
+            <a:pPr>
+              <a:lnSpc>
+                <a:spcPct val="120000"/>
+              </a:lnSpc>
+              <a:buFont typeface="Wingdings" panose="05000000000000000000" pitchFamily="2" charset="2"/>
+              <a:buChar char="Ø"/>
+            </a:pPr>
+            <a:r>
+              <a:rPr lang="en-IN" sz="2400" b="1" dirty="0" err="1">
+                <a:latin typeface="Times New Roman" panose="02020603050405020304" pitchFamily="18" charset="0"/>
+                <a:cs typeface="Times New Roman" panose="02020603050405020304" pitchFamily="18" charset="0"/>
+              </a:rPr>
+              <a:t>Dim_Branch</a:t>
+            </a:r>
+            <a:r>
+              <a:rPr lang="en-IN" sz="2400" dirty="0">
+                <a:latin typeface="Times New Roman" panose="02020603050405020304" pitchFamily="18" charset="0"/>
+                <a:cs typeface="Times New Roman" panose="02020603050405020304" pitchFamily="18" charset="0"/>
+              </a:rPr>
+              <a:t> → Branch location details.</a:t>
+            </a:r>
+          </a:p>
+          <a:p>
+            <a:pPr>
+              <a:lnSpc>
+                <a:spcPct val="120000"/>
+              </a:lnSpc>
+              <a:buFont typeface="Wingdings" panose="05000000000000000000" pitchFamily="2" charset="2"/>
+              <a:buChar char="Ø"/>
+            </a:pPr>
+            <a:r>
+              <a:rPr lang="en-IN" sz="2400" b="1" dirty="0" err="1">
+                <a:latin typeface="Times New Roman" panose="02020603050405020304" pitchFamily="18" charset="0"/>
+                <a:cs typeface="Times New Roman" panose="02020603050405020304" pitchFamily="18" charset="0"/>
+              </a:rPr>
+              <a:t>Dim_Customer</a:t>
+            </a:r>
+            <a:r>
+              <a:rPr lang="en-IN" sz="2400" dirty="0">
+                <a:latin typeface="Times New Roman" panose="02020603050405020304" pitchFamily="18" charset="0"/>
+                <a:cs typeface="Times New Roman" panose="02020603050405020304" pitchFamily="18" charset="0"/>
+              </a:rPr>
+              <a:t> → Customer profile data.</a:t>
+            </a:r>
+          </a:p>
+          <a:p>
+            <a:pPr>
+              <a:lnSpc>
+                <a:spcPct val="120000"/>
+              </a:lnSpc>
+              <a:buFont typeface="Wingdings" panose="05000000000000000000" pitchFamily="2" charset="2"/>
+              <a:buChar char="Ø"/>
+            </a:pPr>
+            <a:r>
+              <a:rPr lang="en-IN" sz="2400" b="1" dirty="0" err="1">
+                <a:latin typeface="Times New Roman" panose="02020603050405020304" pitchFamily="18" charset="0"/>
+                <a:cs typeface="Times New Roman" panose="02020603050405020304" pitchFamily="18" charset="0"/>
+              </a:rPr>
+              <a:t>Dim_Date</a:t>
+            </a:r>
+            <a:r>
+              <a:rPr lang="en-IN" sz="2400" dirty="0">
+                <a:latin typeface="Times New Roman" panose="02020603050405020304" pitchFamily="18" charset="0"/>
+                <a:cs typeface="Times New Roman" panose="02020603050405020304" pitchFamily="18" charset="0"/>
+              </a:rPr>
+              <a:t> → Calendar and time attributes.</a:t>
+            </a:r>
+          </a:p>
+          <a:p>
+            <a:pPr>
+              <a:lnSpc>
+                <a:spcPct val="120000"/>
+              </a:lnSpc>
+              <a:buFont typeface="Wingdings" panose="05000000000000000000" pitchFamily="2" charset="2"/>
+              <a:buChar char="Ø"/>
+            </a:pPr>
+            <a:r>
+              <a:rPr lang="en-IN" sz="2400" b="1" dirty="0" err="1">
+                <a:latin typeface="Times New Roman" panose="02020603050405020304" pitchFamily="18" charset="0"/>
+                <a:cs typeface="Times New Roman" panose="02020603050405020304" pitchFamily="18" charset="0"/>
+              </a:rPr>
+              <a:t>Dim_Order</a:t>
+            </a:r>
+            <a:r>
+              <a:rPr lang="en-IN" sz="2400" dirty="0">
+                <a:latin typeface="Times New Roman" panose="02020603050405020304" pitchFamily="18" charset="0"/>
+                <a:cs typeface="Times New Roman" panose="02020603050405020304" pitchFamily="18" charset="0"/>
+              </a:rPr>
+              <a:t> → Order-level information.</a:t>
+            </a:r>
+          </a:p>
+          <a:p>
+            <a:pPr>
+              <a:lnSpc>
+                <a:spcPct val="120000"/>
+              </a:lnSpc>
+              <a:buFont typeface="Wingdings" panose="05000000000000000000" pitchFamily="2" charset="2"/>
+              <a:buChar char="Ø"/>
+            </a:pPr>
+            <a:r>
+              <a:rPr lang="en-IN" sz="2400" b="1" dirty="0" err="1">
+                <a:latin typeface="Times New Roman" panose="02020603050405020304" pitchFamily="18" charset="0"/>
+                <a:cs typeface="Times New Roman" panose="02020603050405020304" pitchFamily="18" charset="0"/>
+              </a:rPr>
+              <a:t>Dim_Customer_Segment</a:t>
+            </a:r>
+            <a:r>
+              <a:rPr lang="en-IN" sz="2400" dirty="0">
+                <a:latin typeface="Times New Roman" panose="02020603050405020304" pitchFamily="18" charset="0"/>
+                <a:cs typeface="Times New Roman" panose="02020603050405020304" pitchFamily="18" charset="0"/>
+              </a:rPr>
+              <a:t> → Customer classification groups.</a:t>
+            </a:r>
+          </a:p>
+          <a:p>
+            <a:pPr>
+              <a:lnSpc>
+                <a:spcPct val="120000"/>
+              </a:lnSpc>
+              <a:buFont typeface="Wingdings" panose="05000000000000000000" pitchFamily="2" charset="2"/>
+              <a:buChar char="Ø"/>
+            </a:pPr>
+            <a:r>
+              <a:rPr lang="en-IN" sz="2400" b="1" dirty="0" err="1">
+                <a:latin typeface="Times New Roman" panose="02020603050405020304" pitchFamily="18" charset="0"/>
+                <a:cs typeface="Times New Roman" panose="02020603050405020304" pitchFamily="18" charset="0"/>
+              </a:rPr>
+              <a:t>Dim_Size</a:t>
+            </a:r>
+            <a:r>
+              <a:rPr lang="en-IN" sz="2400" dirty="0">
+                <a:latin typeface="Times New Roman" panose="02020603050405020304" pitchFamily="18" charset="0"/>
+                <a:cs typeface="Times New Roman" panose="02020603050405020304" pitchFamily="18" charset="0"/>
+              </a:rPr>
+              <a:t> → Product size reference.</a:t>
+            </a:r>
+          </a:p>
+          <a:p>
+            <a:pPr marL="0" indent="0">
+              <a:buNone/>
+            </a:pPr>
+            <a:endParaRPr lang="en-IN" sz="2600" dirty="0">
+              <a:latin typeface="Times New Roman" panose="02020603050405020304" pitchFamily="18" charset="0"/>
+              <a:cs typeface="Times New Roman" panose="02020603050405020304" pitchFamily="18" charset="0"/>
+            </a:endParaRPr>
+          </a:p>
+        </p:txBody>
+      </p:sp>
+      <p:sp>
+        <p:nvSpPr>
+          <p:cNvPr id="4" name="TextBox 3">
+            <a:extLst>
+              <a:ext uri="{FF2B5EF4-FFF2-40B4-BE49-F238E27FC236}">
+                <a16:creationId xmlns:a16="http://schemas.microsoft.com/office/drawing/2014/main" id="{2FBD1D8E-B808-7954-D35F-6DBF9B684F0D}"/>
+              </a:ext>
+            </a:extLst>
+          </p:cNvPr>
+          <p:cNvSpPr txBox="1"/>
+          <p:nvPr/>
+        </p:nvSpPr>
+        <p:spPr>
+          <a:xfrm>
+            <a:off x="4014530" y="132233"/>
+            <a:ext cx="7222733" cy="523220"/>
+          </a:xfrm>
+          <a:prstGeom prst="rect">
+            <a:avLst/>
+          </a:prstGeom>
+          <a:noFill/>
+        </p:spPr>
+        <p:txBody>
+          <a:bodyPr wrap="square" rtlCol="0">
+            <a:spAutoFit/>
+          </a:bodyPr>
+          <a:lstStyle/>
+          <a:p>
+            <a:r>
+              <a:rPr lang="en-US" sz="2800" b="1" dirty="0">
+                <a:latin typeface="Times New Roman" panose="02020603050405020304" pitchFamily="18" charset="0"/>
+                <a:cs typeface="Times New Roman" panose="02020603050405020304" pitchFamily="18" charset="0"/>
+              </a:rPr>
+              <a:t>DATASET</a:t>
+            </a:r>
+            <a:endParaRPr lang="en-IN" sz="2800" b="1" dirty="0">
+              <a:latin typeface="Times New Roman" panose="02020603050405020304" pitchFamily="18" charset="0"/>
+              <a:cs typeface="Times New Roman" panose="02020603050405020304" pitchFamily="18" charset="0"/>
+            </a:endParaRPr>
+          </a:p>
+        </p:txBody>
+      </p:sp>
+    </p:spTree>
+    <p:extLst>
+      <p:ext uri="{BB962C8B-B14F-4D97-AF65-F5344CB8AC3E}">
+        <p14:creationId xmlns:p14="http://schemas.microsoft.com/office/powerpoint/2010/main" val="1502903002"/>
       </p:ext>
     </p:extLst>
   </p:cSld>
